--- a/HERCULES_EQUIPAMENTOS_DE_PROTE.pptx
+++ b/HERCULES_EQUIPAMENTOS_DE_PROTE.pptx
@@ -162,10 +162,10 @@
                 <c:formatCode>General</c:formatCode>
                 <c:ptCount val="2"/>
                 <c:pt idx="0">
-                  <c:v>367</c:v>
+                  <c:v>1</c:v>
                 </c:pt>
                 <c:pt idx="1">
-                  <c:v>267</c:v>
+                  <c:v>256</c:v>
                 </c:pt>
               </c:numCache>
             </c:numRef>
@@ -211,10 +211,10 @@
                 <c:formatCode>General</c:formatCode>
                 <c:ptCount val="2"/>
                 <c:pt idx="0">
-                  <c:v>5</c:v>
+                  <c:v>0</c:v>
                 </c:pt>
                 <c:pt idx="1">
-                  <c:v>10</c:v>
+                  <c:v>8</c:v>
                 </c:pt>
               </c:numCache>
             </c:numRef>
@@ -3688,7 +3688,7 @@
         <p:spPr>
           <a:xfrm>
             <a:off x="1005840" y="2240279"/>
-            <a:ext cx="2377439" cy="891540"/>
+            <a:ext cx="2377440" cy="868680"/>
           </a:xfrm>
           <a:prstGeom prst="rect">
             <a:avLst/>
@@ -3709,7 +3709,7 @@
                 </a:solidFill>
                 <a:latin typeface="Calibri"/>
               </a:rPr>
-              <a:t>277</a:t>
+              <a:t>264</a:t>
             </a:r>
           </a:p>
         </p:txBody>
@@ -3722,8 +3722,8 @@
         </p:nvSpPr>
         <p:spPr>
           <a:xfrm>
-            <a:off x="1005840" y="3058668"/>
-            <a:ext cx="2377439" cy="548640"/>
+            <a:off x="1005840" y="3090672"/>
+            <a:ext cx="2377440" cy="411480"/>
           </a:xfrm>
           <a:prstGeom prst="rect">
             <a:avLst/>
@@ -3803,7 +3803,7 @@
         <p:spPr>
           <a:xfrm>
             <a:off x="3931920" y="2240279"/>
-            <a:ext cx="2377439" cy="891540"/>
+            <a:ext cx="2377440" cy="868680"/>
           </a:xfrm>
           <a:prstGeom prst="rect">
             <a:avLst/>
@@ -3824,7 +3824,7 @@
                 </a:solidFill>
                 <a:latin typeface="Calibri"/>
               </a:rPr>
-              <a:t>267</a:t>
+              <a:t>256</a:t>
             </a:r>
           </a:p>
         </p:txBody>
@@ -3837,8 +3837,8 @@
         </p:nvSpPr>
         <p:spPr>
           <a:xfrm>
-            <a:off x="3931920" y="3058668"/>
-            <a:ext cx="2377439" cy="548640"/>
+            <a:off x="3931920" y="3090672"/>
+            <a:ext cx="2377440" cy="411480"/>
           </a:xfrm>
           <a:prstGeom prst="rect">
             <a:avLst/>
@@ -3918,7 +3918,7 @@
         <p:spPr>
           <a:xfrm>
             <a:off x="6858000" y="2240279"/>
-            <a:ext cx="2377439" cy="891540"/>
+            <a:ext cx="2377440" cy="868680"/>
           </a:xfrm>
           <a:prstGeom prst="rect">
             <a:avLst/>
@@ -3939,7 +3939,7 @@
                 </a:solidFill>
                 <a:latin typeface="Calibri"/>
               </a:rPr>
-              <a:t>10</a:t>
+              <a:t>8</a:t>
             </a:r>
           </a:p>
         </p:txBody>
@@ -3952,8 +3952,8 @@
         </p:nvSpPr>
         <p:spPr>
           <a:xfrm>
-            <a:off x="6858000" y="3058668"/>
-            <a:ext cx="2377439" cy="548640"/>
+            <a:off x="6858000" y="3090672"/>
+            <a:ext cx="2377440" cy="411480"/>
           </a:xfrm>
           <a:prstGeom prst="rect">
             <a:avLst/>
@@ -4033,7 +4033,7 @@
         <p:spPr>
           <a:xfrm>
             <a:off x="9784080" y="2240279"/>
-            <a:ext cx="2377439" cy="891540"/>
+            <a:ext cx="2377440" cy="868680"/>
           </a:xfrm>
           <a:prstGeom prst="rect">
             <a:avLst/>
@@ -4054,7 +4054,7 @@
                 </a:solidFill>
                 <a:latin typeface="Calibri"/>
               </a:rPr>
-              <a:t>96.4%</a:t>
+              <a:t>97.0%</a:t>
             </a:r>
           </a:p>
         </p:txBody>
@@ -4067,8 +4067,8 @@
         </p:nvSpPr>
         <p:spPr>
           <a:xfrm>
-            <a:off x="9784080" y="3058668"/>
-            <a:ext cx="2377439" cy="548640"/>
+            <a:off x="9784080" y="3090672"/>
+            <a:ext cx="2377440" cy="411480"/>
           </a:xfrm>
           <a:prstGeom prst="rect">
             <a:avLst/>
@@ -4121,7 +4121,7 @@
               <a:tr h="475488">
                 <a:tc>
                   <a:txBody>
-                    <a:bodyPr wrap="square"/>
+                    <a:bodyPr/>
                     <a:lstStyle/>
                     <a:p>
                       <a:pPr algn="ctr"/>
@@ -4144,7 +4144,7 @@
                 </a:tc>
                 <a:tc>
                   <a:txBody>
-                    <a:bodyPr wrap="square"/>
+                    <a:bodyPr/>
                     <a:lstStyle/>
                     <a:p>
                       <a:pPr algn="ctr"/>
@@ -4167,7 +4167,7 @@
                 </a:tc>
                 <a:tc>
                   <a:txBody>
-                    <a:bodyPr wrap="square"/>
+                    <a:bodyPr/>
                     <a:lstStyle/>
                     <a:p>
                       <a:pPr algn="ctr"/>
@@ -4190,7 +4190,7 @@
                 </a:tc>
                 <a:tc>
                   <a:txBody>
-                    <a:bodyPr wrap="square"/>
+                    <a:bodyPr/>
                     <a:lstStyle/>
                     <a:p>
                       <a:pPr algn="ctr"/>
@@ -4215,18 +4215,18 @@
               <a:tr h="475488">
                 <a:tc>
                   <a:txBody>
-                    <a:bodyPr wrap="square"/>
-                    <a:lstStyle/>
-                    <a:p>
-                      <a:pPr algn="l"/>
-                      <a:r>
-                        <a:rPr sz="1000" b="0">
-                          <a:solidFill>
-                            <a:srgbClr val="1D1B43"/>
-                          </a:solidFill>
-                          <a:latin typeface="Calibri"/>
-                        </a:rPr>
-                        <a:t>Total Entregas</a:t>
+                    <a:bodyPr/>
+                    <a:lstStyle/>
+                    <a:p>
+                      <a:pPr algn="l"/>
+                      <a:r>
+                        <a:rPr sz="1000" b="0">
+                          <a:solidFill>
+                            <a:srgbClr val="1D1B43"/>
+                          </a:solidFill>
+                          <a:latin typeface="Calibri"/>
+                        </a:rPr>
+                        <a:t>Total</a:t>
                       </a:r>
                     </a:p>
                   </a:txBody>
@@ -4238,18 +4238,18 @@
                 </a:tc>
                 <a:tc>
                   <a:txBody>
-                    <a:bodyPr wrap="square"/>
-                    <a:lstStyle/>
-                    <a:p>
-                      <a:pPr algn="l"/>
-                      <a:r>
-                        <a:rPr sz="1000" b="0">
-                          <a:solidFill>
-                            <a:srgbClr val="1D1B43"/>
-                          </a:solidFill>
-                          <a:latin typeface="Calibri"/>
-                        </a:rPr>
-                        <a:t>372</a:t>
+                    <a:bodyPr/>
+                    <a:lstStyle/>
+                    <a:p>
+                      <a:pPr algn="l"/>
+                      <a:r>
+                        <a:rPr sz="1000" b="0">
+                          <a:solidFill>
+                            <a:srgbClr val="1D1B43"/>
+                          </a:solidFill>
+                          <a:latin typeface="Calibri"/>
+                        </a:rPr>
+                        <a:t>1</a:t>
                       </a:r>
                     </a:p>
                   </a:txBody>
@@ -4261,18 +4261,18 @@
                 </a:tc>
                 <a:tc>
                   <a:txBody>
-                    <a:bodyPr wrap="square"/>
-                    <a:lstStyle/>
-                    <a:p>
-                      <a:pPr algn="l"/>
-                      <a:r>
-                        <a:rPr sz="1000" b="0">
-                          <a:solidFill>
-                            <a:srgbClr val="1D1B43"/>
-                          </a:solidFill>
-                          <a:latin typeface="Calibri"/>
-                        </a:rPr>
-                        <a:t>277</a:t>
+                    <a:bodyPr/>
+                    <a:lstStyle/>
+                    <a:p>
+                      <a:pPr algn="l"/>
+                      <a:r>
+                        <a:rPr sz="1000" b="0">
+                          <a:solidFill>
+                            <a:srgbClr val="1D1B43"/>
+                          </a:solidFill>
+                          <a:latin typeface="Calibri"/>
+                        </a:rPr>
+                        <a:t>264</a:t>
                       </a:r>
                     </a:p>
                   </a:txBody>
@@ -4284,18 +4284,18 @@
                 </a:tc>
                 <a:tc>
                   <a:txBody>
-                    <a:bodyPr wrap="square"/>
-                    <a:lstStyle/>
-                    <a:p>
-                      <a:pPr algn="l"/>
-                      <a:r>
-                        <a:rPr sz="1000" b="0">
-                          <a:solidFill>
-                            <a:srgbClr val="1D1B43"/>
-                          </a:solidFill>
-                          <a:latin typeface="Calibri"/>
-                        </a:rPr>
-                        <a:t>- 95</a:t>
+                    <a:bodyPr/>
+                    <a:lstStyle/>
+                    <a:p>
+                      <a:pPr algn="l"/>
+                      <a:r>
+                        <a:rPr sz="1000" b="0">
+                          <a:solidFill>
+                            <a:srgbClr val="1D1B43"/>
+                          </a:solidFill>
+                          <a:latin typeface="Calibri"/>
+                        </a:rPr>
+                        <a:t>+ 263</a:t>
                       </a:r>
                     </a:p>
                   </a:txBody>
@@ -4309,7 +4309,7 @@
               <a:tr h="475488">
                 <a:tc>
                   <a:txBody>
-                    <a:bodyPr wrap="square"/>
+                    <a:bodyPr/>
                     <a:lstStyle/>
                     <a:p>
                       <a:pPr algn="l"/>
@@ -4332,18 +4332,18 @@
                 </a:tc>
                 <a:tc>
                   <a:txBody>
-                    <a:bodyPr wrap="square"/>
-                    <a:lstStyle/>
-                    <a:p>
-                      <a:pPr algn="l"/>
-                      <a:r>
-                        <a:rPr sz="1000" b="0">
-                          <a:solidFill>
-                            <a:srgbClr val="1D1B43"/>
-                          </a:solidFill>
-                          <a:latin typeface="Calibri"/>
-                        </a:rPr>
-                        <a:t>367</a:t>
+                    <a:bodyPr/>
+                    <a:lstStyle/>
+                    <a:p>
+                      <a:pPr algn="l"/>
+                      <a:r>
+                        <a:rPr sz="1000" b="0">
+                          <a:solidFill>
+                            <a:srgbClr val="1D1B43"/>
+                          </a:solidFill>
+                          <a:latin typeface="Calibri"/>
+                        </a:rPr>
+                        <a:t>1</a:t>
                       </a:r>
                     </a:p>
                   </a:txBody>
@@ -4355,18 +4355,18 @@
                 </a:tc>
                 <a:tc>
                   <a:txBody>
-                    <a:bodyPr wrap="square"/>
-                    <a:lstStyle/>
-                    <a:p>
-                      <a:pPr algn="l"/>
-                      <a:r>
-                        <a:rPr sz="1000" b="0">
-                          <a:solidFill>
-                            <a:srgbClr val="1D1B43"/>
-                          </a:solidFill>
-                          <a:latin typeface="Calibri"/>
-                        </a:rPr>
-                        <a:t>267</a:t>
+                    <a:bodyPr/>
+                    <a:lstStyle/>
+                    <a:p>
+                      <a:pPr algn="l"/>
+                      <a:r>
+                        <a:rPr sz="1000" b="0">
+                          <a:solidFill>
+                            <a:srgbClr val="1D1B43"/>
+                          </a:solidFill>
+                          <a:latin typeface="Calibri"/>
+                        </a:rPr>
+                        <a:t>256</a:t>
                       </a:r>
                     </a:p>
                   </a:txBody>
@@ -4378,18 +4378,18 @@
                 </a:tc>
                 <a:tc>
                   <a:txBody>
-                    <a:bodyPr wrap="square"/>
-                    <a:lstStyle/>
-                    <a:p>
-                      <a:pPr algn="l"/>
-                      <a:r>
-                        <a:rPr sz="1000" b="0">
-                          <a:solidFill>
-                            <a:srgbClr val="1D1B43"/>
-                          </a:solidFill>
-                          <a:latin typeface="Calibri"/>
-                        </a:rPr>
-                        <a:t>- 100</a:t>
+                    <a:bodyPr/>
+                    <a:lstStyle/>
+                    <a:p>
+                      <a:pPr algn="l"/>
+                      <a:r>
+                        <a:rPr sz="1000" b="0">
+                          <a:solidFill>
+                            <a:srgbClr val="1D1B43"/>
+                          </a:solidFill>
+                          <a:latin typeface="Calibri"/>
+                        </a:rPr>
+                        <a:t>+ 255</a:t>
                       </a:r>
                     </a:p>
                   </a:txBody>
@@ -4403,18 +4403,18 @@
               <a:tr h="475488">
                 <a:tc>
                   <a:txBody>
-                    <a:bodyPr wrap="square"/>
-                    <a:lstStyle/>
-                    <a:p>
-                      <a:pPr algn="l"/>
-                      <a:r>
-                        <a:rPr sz="1000" b="0">
-                          <a:solidFill>
-                            <a:srgbClr val="1D1B43"/>
-                          </a:solidFill>
-                          <a:latin typeface="Calibri"/>
-                        </a:rPr>
-                        <a:t>Fora do Prazo</a:t>
+                    <a:bodyPr/>
+                    <a:lstStyle/>
+                    <a:p>
+                      <a:pPr algn="l"/>
+                      <a:r>
+                        <a:rPr sz="1000" b="0">
+                          <a:solidFill>
+                            <a:srgbClr val="1D1B43"/>
+                          </a:solidFill>
+                          <a:latin typeface="Calibri"/>
+                        </a:rPr>
+                        <a:t>Fora Prazo</a:t>
                       </a:r>
                     </a:p>
                   </a:txBody>
@@ -4426,18 +4426,18 @@
                 </a:tc>
                 <a:tc>
                   <a:txBody>
-                    <a:bodyPr wrap="square"/>
-                    <a:lstStyle/>
-                    <a:p>
-                      <a:pPr algn="l"/>
-                      <a:r>
-                        <a:rPr sz="1000" b="0">
-                          <a:solidFill>
-                            <a:srgbClr val="1D1B43"/>
-                          </a:solidFill>
-                          <a:latin typeface="Calibri"/>
-                        </a:rPr>
-                        <a:t>5</a:t>
+                    <a:bodyPr/>
+                    <a:lstStyle/>
+                    <a:p>
+                      <a:pPr algn="l"/>
+                      <a:r>
+                        <a:rPr sz="1000" b="0">
+                          <a:solidFill>
+                            <a:srgbClr val="1D1B43"/>
+                          </a:solidFill>
+                          <a:latin typeface="Calibri"/>
+                        </a:rPr>
+                        <a:t>0</a:t>
                       </a:r>
                     </a:p>
                   </a:txBody>
@@ -4449,18 +4449,18 @@
                 </a:tc>
                 <a:tc>
                   <a:txBody>
-                    <a:bodyPr wrap="square"/>
-                    <a:lstStyle/>
-                    <a:p>
-                      <a:pPr algn="l"/>
-                      <a:r>
-                        <a:rPr sz="1000" b="0">
-                          <a:solidFill>
-                            <a:srgbClr val="1D1B43"/>
-                          </a:solidFill>
-                          <a:latin typeface="Calibri"/>
-                        </a:rPr>
-                        <a:t>10</a:t>
+                    <a:bodyPr/>
+                    <a:lstStyle/>
+                    <a:p>
+                      <a:pPr algn="l"/>
+                      <a:r>
+                        <a:rPr sz="1000" b="0">
+                          <a:solidFill>
+                            <a:srgbClr val="1D1B43"/>
+                          </a:solidFill>
+                          <a:latin typeface="Calibri"/>
+                        </a:rPr>
+                        <a:t>8</a:t>
                       </a:r>
                     </a:p>
                   </a:txBody>
@@ -4472,18 +4472,18 @@
                 </a:tc>
                 <a:tc>
                   <a:txBody>
-                    <a:bodyPr wrap="square"/>
-                    <a:lstStyle/>
-                    <a:p>
-                      <a:pPr algn="l"/>
-                      <a:r>
-                        <a:rPr sz="1000" b="0">
-                          <a:solidFill>
-                            <a:srgbClr val="1D1B43"/>
-                          </a:solidFill>
-                          <a:latin typeface="Calibri"/>
-                        </a:rPr>
-                        <a:t>+ 5</a:t>
+                    <a:bodyPr/>
+                    <a:lstStyle/>
+                    <a:p>
+                      <a:pPr algn="l"/>
+                      <a:r>
+                        <a:rPr sz="1000" b="0">
+                          <a:solidFill>
+                            <a:srgbClr val="1D1B43"/>
+                          </a:solidFill>
+                          <a:latin typeface="Calibri"/>
+                        </a:rPr>
+                        <a:t>+ 8</a:t>
                       </a:r>
                     </a:p>
                   </a:txBody>
@@ -4497,7 +4497,7 @@
               <a:tr h="475488">
                 <a:tc>
                   <a:txBody>
-                    <a:bodyPr wrap="square"/>
+                    <a:bodyPr/>
                     <a:lstStyle/>
                     <a:p>
                       <a:pPr algn="l"/>
@@ -4520,18 +4520,18 @@
                 </a:tc>
                 <a:tc>
                   <a:txBody>
-                    <a:bodyPr wrap="square"/>
-                    <a:lstStyle/>
-                    <a:p>
-                      <a:pPr algn="l"/>
-                      <a:r>
-                        <a:rPr sz="1000" b="0">
-                          <a:solidFill>
-                            <a:srgbClr val="1D1B43"/>
-                          </a:solidFill>
-                          <a:latin typeface="Calibri"/>
-                        </a:rPr>
-                        <a:t>98.7%</a:t>
+                    <a:bodyPr/>
+                    <a:lstStyle/>
+                    <a:p>
+                      <a:pPr algn="l"/>
+                      <a:r>
+                        <a:rPr sz="1000" b="0">
+                          <a:solidFill>
+                            <a:srgbClr val="1D1B43"/>
+                          </a:solidFill>
+                          <a:latin typeface="Calibri"/>
+                        </a:rPr>
+                        <a:t>100.0%</a:t>
                       </a:r>
                     </a:p>
                   </a:txBody>
@@ -4543,18 +4543,18 @@
                 </a:tc>
                 <a:tc>
                   <a:txBody>
-                    <a:bodyPr wrap="square"/>
-                    <a:lstStyle/>
-                    <a:p>
-                      <a:pPr algn="l"/>
-                      <a:r>
-                        <a:rPr sz="1000" b="0">
-                          <a:solidFill>
-                            <a:srgbClr val="1D1B43"/>
-                          </a:solidFill>
-                          <a:latin typeface="Calibri"/>
-                        </a:rPr>
-                        <a:t>96.4%</a:t>
+                    <a:bodyPr/>
+                    <a:lstStyle/>
+                    <a:p>
+                      <a:pPr algn="l"/>
+                      <a:r>
+                        <a:rPr sz="1000" b="0">
+                          <a:solidFill>
+                            <a:srgbClr val="1D1B43"/>
+                          </a:solidFill>
+                          <a:latin typeface="Calibri"/>
+                        </a:rPr>
+                        <a:t>97.0%</a:t>
                       </a:r>
                     </a:p>
                   </a:txBody>
@@ -4566,18 +4566,18 @@
                 </a:tc>
                 <a:tc>
                   <a:txBody>
-                    <a:bodyPr wrap="square"/>
-                    <a:lstStyle/>
-                    <a:p>
-                      <a:pPr algn="l"/>
-                      <a:r>
-                        <a:rPr sz="1000" b="0">
-                          <a:solidFill>
-                            <a:srgbClr val="1D1B43"/>
-                          </a:solidFill>
-                          <a:latin typeface="Calibri"/>
-                        </a:rPr>
-                        <a:t>- 2.3pp</a:t>
+                    <a:bodyPr/>
+                    <a:lstStyle/>
+                    <a:p>
+                      <a:pPr algn="l"/>
+                      <a:r>
+                        <a:rPr sz="1000" b="0">
+                          <a:solidFill>
+                            <a:srgbClr val="1D1B43"/>
+                          </a:solidFill>
+                          <a:latin typeface="Calibri"/>
+                        </a:rPr>
+                        <a:t>- 3.0pp</a:t>
                       </a:r>
                     </a:p>
                   </a:txBody>
@@ -4766,7 +4766,7 @@
               <a:tr h="438912">
                 <a:tc>
                   <a:txBody>
-                    <a:bodyPr wrap="square"/>
+                    <a:bodyPr/>
                     <a:lstStyle/>
                     <a:p>
                       <a:pPr algn="ctr"/>
@@ -4789,7 +4789,7 @@
                 </a:tc>
                 <a:tc>
                   <a:txBody>
-                    <a:bodyPr wrap="square"/>
+                    <a:bodyPr/>
                     <a:lstStyle/>
                     <a:p>
                       <a:pPr algn="ctr"/>
@@ -4812,7 +4812,7 @@
                 </a:tc>
                 <a:tc>
                   <a:txBody>
-                    <a:bodyPr wrap="square"/>
+                    <a:bodyPr/>
                     <a:lstStyle/>
                     <a:p>
                       <a:pPr algn="ctr"/>
@@ -4835,7 +4835,7 @@
                 </a:tc>
                 <a:tc>
                   <a:txBody>
-                    <a:bodyPr wrap="square"/>
+                    <a:bodyPr/>
                     <a:lstStyle/>
                     <a:p>
                       <a:pPr algn="ctr"/>
@@ -4858,7 +4858,7 @@
                 </a:tc>
                 <a:tc>
                   <a:txBody>
-                    <a:bodyPr wrap="square"/>
+                    <a:bodyPr/>
                     <a:lstStyle/>
                     <a:p>
                       <a:pPr algn="ctr"/>
@@ -4883,7 +4883,7 @@
               <a:tr h="438912">
                 <a:tc>
                   <a:txBody>
-                    <a:bodyPr wrap="square"/>
+                    <a:bodyPr/>
                     <a:lstStyle/>
                     <a:p>
                       <a:pPr algn="l"/>
@@ -4906,18 +4906,18 @@
                 </a:tc>
                 <a:tc>
                   <a:txBody>
-                    <a:bodyPr wrap="square"/>
-                    <a:lstStyle/>
-                    <a:p>
-                      <a:pPr algn="l"/>
-                      <a:r>
-                        <a:rPr sz="1000" b="0">
-                          <a:solidFill>
-                            <a:srgbClr val="1D1B43"/>
-                          </a:solidFill>
-                          <a:latin typeface="Calibri"/>
-                        </a:rPr>
-                        <a:t>372</a:t>
+                    <a:bodyPr/>
+                    <a:lstStyle/>
+                    <a:p>
+                      <a:pPr algn="l"/>
+                      <a:r>
+                        <a:rPr sz="1000" b="0">
+                          <a:solidFill>
+                            <a:srgbClr val="1D1B43"/>
+                          </a:solidFill>
+                          <a:latin typeface="Calibri"/>
+                        </a:rPr>
+                        <a:t>1</a:t>
                       </a:r>
                     </a:p>
                   </a:txBody>
@@ -4929,18 +4929,18 @@
                 </a:tc>
                 <a:tc>
                   <a:txBody>
-                    <a:bodyPr wrap="square"/>
-                    <a:lstStyle/>
-                    <a:p>
-                      <a:pPr algn="l"/>
-                      <a:r>
-                        <a:rPr sz="1000" b="0">
-                          <a:solidFill>
-                            <a:srgbClr val="1D1B43"/>
-                          </a:solidFill>
-                          <a:latin typeface="Calibri"/>
-                        </a:rPr>
-                        <a:t>367</a:t>
+                    <a:bodyPr/>
+                    <a:lstStyle/>
+                    <a:p>
+                      <a:pPr algn="l"/>
+                      <a:r>
+                        <a:rPr sz="1000" b="0">
+                          <a:solidFill>
+                            <a:srgbClr val="1D1B43"/>
+                          </a:solidFill>
+                          <a:latin typeface="Calibri"/>
+                        </a:rPr>
+                        <a:t>1</a:t>
                       </a:r>
                     </a:p>
                   </a:txBody>
@@ -4952,18 +4952,18 @@
                 </a:tc>
                 <a:tc>
                   <a:txBody>
-                    <a:bodyPr wrap="square"/>
-                    <a:lstStyle/>
-                    <a:p>
-                      <a:pPr algn="l"/>
-                      <a:r>
-                        <a:rPr sz="1000" b="0">
-                          <a:solidFill>
-                            <a:srgbClr val="1D1B43"/>
-                          </a:solidFill>
-                          <a:latin typeface="Calibri"/>
-                        </a:rPr>
-                        <a:t>5</a:t>
+                    <a:bodyPr/>
+                    <a:lstStyle/>
+                    <a:p>
+                      <a:pPr algn="l"/>
+                      <a:r>
+                        <a:rPr sz="1000" b="0">
+                          <a:solidFill>
+                            <a:srgbClr val="1D1B43"/>
+                          </a:solidFill>
+                          <a:latin typeface="Calibri"/>
+                        </a:rPr>
+                        <a:t>0</a:t>
                       </a:r>
                     </a:p>
                   </a:txBody>
@@ -4975,18 +4975,18 @@
                 </a:tc>
                 <a:tc>
                   <a:txBody>
-                    <a:bodyPr wrap="square"/>
-                    <a:lstStyle/>
-                    <a:p>
-                      <a:pPr algn="l"/>
-                      <a:r>
-                        <a:rPr sz="1000" b="0">
-                          <a:solidFill>
-                            <a:srgbClr val="1D1B43"/>
-                          </a:solidFill>
-                          <a:latin typeface="Calibri"/>
-                        </a:rPr>
-                        <a:t>98.7%</a:t>
+                    <a:bodyPr/>
+                    <a:lstStyle/>
+                    <a:p>
+                      <a:pPr algn="l"/>
+                      <a:r>
+                        <a:rPr sz="1000" b="0">
+                          <a:solidFill>
+                            <a:srgbClr val="1D1B43"/>
+                          </a:solidFill>
+                          <a:latin typeface="Calibri"/>
+                        </a:rPr>
+                        <a:t>100.0%</a:t>
                       </a:r>
                     </a:p>
                   </a:txBody>
@@ -5000,7 +5000,7 @@
               <a:tr h="438912">
                 <a:tc>
                   <a:txBody>
-                    <a:bodyPr wrap="square"/>
+                    <a:bodyPr/>
                     <a:lstStyle/>
                     <a:p>
                       <a:pPr algn="l"/>
@@ -5023,18 +5023,18 @@
                 </a:tc>
                 <a:tc>
                   <a:txBody>
-                    <a:bodyPr wrap="square"/>
-                    <a:lstStyle/>
-                    <a:p>
-                      <a:pPr algn="l"/>
-                      <a:r>
-                        <a:rPr sz="1000" b="0">
-                          <a:solidFill>
-                            <a:srgbClr val="1D1B43"/>
-                          </a:solidFill>
-                          <a:latin typeface="Calibri"/>
-                        </a:rPr>
-                        <a:t>277</a:t>
+                    <a:bodyPr/>
+                    <a:lstStyle/>
+                    <a:p>
+                      <a:pPr algn="l"/>
+                      <a:r>
+                        <a:rPr sz="1000" b="0">
+                          <a:solidFill>
+                            <a:srgbClr val="1D1B43"/>
+                          </a:solidFill>
+                          <a:latin typeface="Calibri"/>
+                        </a:rPr>
+                        <a:t>264</a:t>
                       </a:r>
                     </a:p>
                   </a:txBody>
@@ -5046,18 +5046,18 @@
                 </a:tc>
                 <a:tc>
                   <a:txBody>
-                    <a:bodyPr wrap="square"/>
-                    <a:lstStyle/>
-                    <a:p>
-                      <a:pPr algn="l"/>
-                      <a:r>
-                        <a:rPr sz="1000" b="0">
-                          <a:solidFill>
-                            <a:srgbClr val="1D1B43"/>
-                          </a:solidFill>
-                          <a:latin typeface="Calibri"/>
-                        </a:rPr>
-                        <a:t>267</a:t>
+                    <a:bodyPr/>
+                    <a:lstStyle/>
+                    <a:p>
+                      <a:pPr algn="l"/>
+                      <a:r>
+                        <a:rPr sz="1000" b="0">
+                          <a:solidFill>
+                            <a:srgbClr val="1D1B43"/>
+                          </a:solidFill>
+                          <a:latin typeface="Calibri"/>
+                        </a:rPr>
+                        <a:t>256</a:t>
                       </a:r>
                     </a:p>
                   </a:txBody>
@@ -5069,18 +5069,18 @@
                 </a:tc>
                 <a:tc>
                   <a:txBody>
-                    <a:bodyPr wrap="square"/>
-                    <a:lstStyle/>
-                    <a:p>
-                      <a:pPr algn="l"/>
-                      <a:r>
-                        <a:rPr sz="1000" b="0">
-                          <a:solidFill>
-                            <a:srgbClr val="1D1B43"/>
-                          </a:solidFill>
-                          <a:latin typeface="Calibri"/>
-                        </a:rPr>
-                        <a:t>10</a:t>
+                    <a:bodyPr/>
+                    <a:lstStyle/>
+                    <a:p>
+                      <a:pPr algn="l"/>
+                      <a:r>
+                        <a:rPr sz="1000" b="0">
+                          <a:solidFill>
+                            <a:srgbClr val="1D1B43"/>
+                          </a:solidFill>
+                          <a:latin typeface="Calibri"/>
+                        </a:rPr>
+                        <a:t>8</a:t>
                       </a:r>
                     </a:p>
                   </a:txBody>
@@ -5092,18 +5092,18 @@
                 </a:tc>
                 <a:tc>
                   <a:txBody>
-                    <a:bodyPr wrap="square"/>
-                    <a:lstStyle/>
-                    <a:p>
-                      <a:pPr algn="l"/>
-                      <a:r>
-                        <a:rPr sz="1000" b="0">
-                          <a:solidFill>
-                            <a:srgbClr val="1D1B43"/>
-                          </a:solidFill>
-                          <a:latin typeface="Calibri"/>
-                        </a:rPr>
-                        <a:t>96.4%</a:t>
+                    <a:bodyPr/>
+                    <a:lstStyle/>
+                    <a:p>
+                      <a:pPr algn="l"/>
+                      <a:r>
+                        <a:rPr sz="1000" b="0">
+                          <a:solidFill>
+                            <a:srgbClr val="1D1B43"/>
+                          </a:solidFill>
+                          <a:latin typeface="Calibri"/>
+                        </a:rPr>
+                        <a:t>97.0%</a:t>
                       </a:r>
                     </a:p>
                   </a:txBody>
@@ -5191,7 +5191,7 @@
                 </a:solidFill>
                 <a:latin typeface="Calibri"/>
               </a:rPr>
-              <a:t>PERFORMANCE: 96.4% - EXCELENTE</a:t>
+              <a:t>PERFORMANCE: 97.0% - EXCELENTE</a:t>
             </a:r>
           </a:p>
         </p:txBody>
@@ -5276,7 +5276,7 @@
                 </a:solidFill>
                 <a:latin typeface="Calibri"/>
               </a:rPr>
-              <a:t>OCORRENCIAS FORA DO PRAZO (10)</a:t>
+              <a:t>OCORRENCIAS FORA DO PRAZO (8)</a:t>
             </a:r>
           </a:p>
         </p:txBody>
@@ -5334,7 +5334,7 @@
         </p:nvGraphicFramePr>
         <p:xfrm>
           <a:off x="457200" y="1828800"/>
-          <a:ext cx="11429999" cy="4224528"/>
+          <a:ext cx="11429999" cy="3456432"/>
         </p:xfrm>
         <a:graphic>
           <a:graphicData uri="http://schemas.openxmlformats.org/drawingml/2006/table">
@@ -5352,7 +5352,7 @@
               <a:tr h="384048">
                 <a:tc>
                   <a:txBody>
-                    <a:bodyPr wrap="square"/>
+                    <a:bodyPr/>
                     <a:lstStyle/>
                     <a:p>
                       <a:pPr algn="ctr"/>
@@ -5375,7 +5375,7 @@
                 </a:tc>
                 <a:tc>
                   <a:txBody>
-                    <a:bodyPr wrap="square"/>
+                    <a:bodyPr/>
                     <a:lstStyle/>
                     <a:p>
                       <a:pPr algn="ctr"/>
@@ -5398,7 +5398,7 @@
                 </a:tc>
                 <a:tc>
                   <a:txBody>
-                    <a:bodyPr wrap="square"/>
+                    <a:bodyPr/>
                     <a:lstStyle/>
                     <a:p>
                       <a:pPr algn="ctr"/>
@@ -5421,7 +5421,7 @@
                 </a:tc>
                 <a:tc>
                   <a:txBody>
-                    <a:bodyPr wrap="square"/>
+                    <a:bodyPr/>
                     <a:lstStyle/>
                     <a:p>
                       <a:pPr algn="ctr"/>
@@ -5444,7 +5444,7 @@
                 </a:tc>
                 <a:tc>
                   <a:txBody>
-                    <a:bodyPr wrap="square"/>
+                    <a:bodyPr/>
                     <a:lstStyle/>
                     <a:p>
                       <a:pPr algn="ctr"/>
@@ -5469,7 +5469,7 @@
               <a:tr h="384048">
                 <a:tc>
                   <a:txBody>
-                    <a:bodyPr wrap="square"/>
+                    <a:bodyPr/>
                     <a:lstStyle/>
                     <a:p>
                       <a:pPr algn="l"/>
@@ -5492,7 +5492,7 @@
                 </a:tc>
                 <a:tc>
                   <a:txBody>
-                    <a:bodyPr wrap="square"/>
+                    <a:bodyPr/>
                     <a:lstStyle/>
                     <a:p>
                       <a:pPr algn="l"/>
@@ -5515,7 +5515,7 @@
                 </a:tc>
                 <a:tc>
                   <a:txBody>
-                    <a:bodyPr wrap="square"/>
+                    <a:bodyPr/>
                     <a:lstStyle/>
                     <a:p>
                       <a:pPr algn="l"/>
@@ -5538,7 +5538,7 @@
                 </a:tc>
                 <a:tc>
                   <a:txBody>
-                    <a:bodyPr wrap="square"/>
+                    <a:bodyPr/>
                     <a:lstStyle/>
                     <a:p>
                       <a:pPr algn="l"/>
@@ -5561,7 +5561,7 @@
                 </a:tc>
                 <a:tc>
                   <a:txBody>
-                    <a:bodyPr wrap="square"/>
+                    <a:bodyPr/>
                     <a:lstStyle/>
                     <a:p>
                       <a:pPr algn="l"/>
@@ -5586,18 +5586,18 @@
               <a:tr h="384048">
                 <a:tc>
                   <a:txBody>
-                    <a:bodyPr wrap="square"/>
-                    <a:lstStyle/>
-                    <a:p>
-                      <a:pPr algn="l"/>
-                      <a:r>
-                        <a:rPr sz="1000" b="0">
-                          <a:solidFill>
-                            <a:srgbClr val="1D1B43"/>
-                          </a:solidFill>
-                          <a:latin typeface="Calibri"/>
-                        </a:rPr>
-                        <a:t>277933</a:t>
+                    <a:bodyPr/>
+                    <a:lstStyle/>
+                    <a:p>
+                      <a:pPr algn="l"/>
+                      <a:r>
+                        <a:rPr sz="1000" b="0">
+                          <a:solidFill>
+                            <a:srgbClr val="1D1B43"/>
+                          </a:solidFill>
+                          <a:latin typeface="Calibri"/>
+                        </a:rPr>
+                        <a:t>277942</a:t>
                       </a:r>
                     </a:p>
                   </a:txBody>
@@ -5609,18 +5609,18 @@
                 </a:tc>
                 <a:tc>
                   <a:txBody>
-                    <a:bodyPr wrap="square"/>
-                    <a:lstStyle/>
-                    <a:p>
-                      <a:pPr algn="l"/>
-                      <a:r>
-                        <a:rPr sz="1000" b="0">
-                          <a:solidFill>
-                            <a:srgbClr val="1D1B43"/>
-                          </a:solidFill>
-                          <a:latin typeface="Calibri"/>
-                        </a:rPr>
-                        <a:t>CORSUL COMERCIO E RE - CAXIAS DO SUL / RS</a:t>
+                    <a:bodyPr/>
+                    <a:lstStyle/>
+                    <a:p>
+                      <a:pPr algn="l"/>
+                      <a:r>
+                        <a:rPr sz="1000" b="0">
+                          <a:solidFill>
+                            <a:srgbClr val="1D1B43"/>
+                          </a:solidFill>
+                          <a:latin typeface="Calibri"/>
+                        </a:rPr>
+                        <a:t>CORSUL COMERCIO E RE - JOINVILLE / SC</a:t>
                       </a:r>
                     </a:p>
                   </a:txBody>
@@ -5632,18 +5632,18 @@
                 </a:tc>
                 <a:tc>
                   <a:txBody>
-                    <a:bodyPr wrap="square"/>
-                    <a:lstStyle/>
-                    <a:p>
-                      <a:pPr algn="l"/>
-                      <a:r>
-                        <a:rPr sz="1000" b="0">
-                          <a:solidFill>
-                            <a:srgbClr val="1D1B43"/>
-                          </a:solidFill>
-                          <a:latin typeface="Calibri"/>
-                        </a:rPr>
-                        <a:t>CAXIAS DO SUL/RS</a:t>
+                    <a:bodyPr/>
+                    <a:lstStyle/>
+                    <a:p>
+                      <a:pPr algn="l"/>
+                      <a:r>
+                        <a:rPr sz="1000" b="0">
+                          <a:solidFill>
+                            <a:srgbClr val="1D1B43"/>
+                          </a:solidFill>
+                          <a:latin typeface="Calibri"/>
+                        </a:rPr>
+                        <a:t>JOINVILLE/SC</a:t>
                       </a:r>
                     </a:p>
                   </a:txBody>
@@ -5655,18 +5655,18 @@
                 </a:tc>
                 <a:tc>
                   <a:txBody>
-                    <a:bodyPr wrap="square"/>
-                    <a:lstStyle/>
-                    <a:p>
-                      <a:pPr algn="l"/>
-                      <a:r>
-                        <a:rPr sz="1000" b="0">
-                          <a:solidFill>
-                            <a:srgbClr val="1D1B43"/>
-                          </a:solidFill>
-                          <a:latin typeface="Calibri"/>
-                        </a:rPr>
-                        <a:t>24/04/2026</a:t>
+                    <a:bodyPr/>
+                    <a:lstStyle/>
+                    <a:p>
+                      <a:pPr algn="l"/>
+                      <a:r>
+                        <a:rPr sz="1000" b="0">
+                          <a:solidFill>
+                            <a:srgbClr val="1D1B43"/>
+                          </a:solidFill>
+                          <a:latin typeface="Calibri"/>
+                        </a:rPr>
+                        <a:t>14/04/2026</a:t>
                       </a:r>
                     </a:p>
                   </a:txBody>
@@ -5678,7 +5678,7 @@
                 </a:tc>
                 <a:tc>
                   <a:txBody>
-                    <a:bodyPr wrap="square"/>
+                    <a:bodyPr/>
                     <a:lstStyle/>
                     <a:p>
                       <a:pPr algn="l"/>
@@ -5703,18 +5703,18 @@
               <a:tr h="384048">
                 <a:tc>
                   <a:txBody>
-                    <a:bodyPr wrap="square"/>
-                    <a:lstStyle/>
-                    <a:p>
-                      <a:pPr algn="l"/>
-                      <a:r>
-                        <a:rPr sz="1000" b="0">
-                          <a:solidFill>
-                            <a:srgbClr val="1D1B43"/>
-                          </a:solidFill>
-                          <a:latin typeface="Calibri"/>
-                        </a:rPr>
-                        <a:t>277934</a:t>
+                    <a:bodyPr/>
+                    <a:lstStyle/>
+                    <a:p>
+                      <a:pPr algn="l"/>
+                      <a:r>
+                        <a:rPr sz="1000" b="0">
+                          <a:solidFill>
+                            <a:srgbClr val="1D1B43"/>
+                          </a:solidFill>
+                          <a:latin typeface="Calibri"/>
+                        </a:rPr>
+                        <a:t>278080</a:t>
                       </a:r>
                     </a:p>
                   </a:txBody>
@@ -5726,18 +5726,18 @@
                 </a:tc>
                 <a:tc>
                   <a:txBody>
-                    <a:bodyPr wrap="square"/>
-                    <a:lstStyle/>
-                    <a:p>
-                      <a:pPr algn="l"/>
-                      <a:r>
-                        <a:rPr sz="1000" b="0">
-                          <a:solidFill>
-                            <a:srgbClr val="1D1B43"/>
-                          </a:solidFill>
-                          <a:latin typeface="Calibri"/>
-                        </a:rPr>
-                        <a:t>CORSUL COMERCIO E RE - CAXIAS DO SUL / RS</a:t>
+                    <a:bodyPr/>
+                    <a:lstStyle/>
+                    <a:p>
+                      <a:pPr algn="l"/>
+                      <a:r>
+                        <a:rPr sz="1000" b="0">
+                          <a:solidFill>
+                            <a:srgbClr val="1D1B43"/>
+                          </a:solidFill>
+                          <a:latin typeface="Calibri"/>
+                        </a:rPr>
+                        <a:t>CORSUL COMERCIO E RE - INDAIAL / SC</a:t>
                       </a:r>
                     </a:p>
                   </a:txBody>
@@ -5749,18 +5749,18 @@
                 </a:tc>
                 <a:tc>
                   <a:txBody>
-                    <a:bodyPr wrap="square"/>
-                    <a:lstStyle/>
-                    <a:p>
-                      <a:pPr algn="l"/>
-                      <a:r>
-                        <a:rPr sz="1000" b="0">
-                          <a:solidFill>
-                            <a:srgbClr val="1D1B43"/>
-                          </a:solidFill>
-                          <a:latin typeface="Calibri"/>
-                        </a:rPr>
-                        <a:t>CAXIAS DO SUL/RS</a:t>
+                    <a:bodyPr/>
+                    <a:lstStyle/>
+                    <a:p>
+                      <a:pPr algn="l"/>
+                      <a:r>
+                        <a:rPr sz="1000" b="0">
+                          <a:solidFill>
+                            <a:srgbClr val="1D1B43"/>
+                          </a:solidFill>
+                          <a:latin typeface="Calibri"/>
+                        </a:rPr>
+                        <a:t>INDAIAL/SC</a:t>
                       </a:r>
                     </a:p>
                   </a:txBody>
@@ -5772,18 +5772,18 @@
                 </a:tc>
                 <a:tc>
                   <a:txBody>
-                    <a:bodyPr wrap="square"/>
-                    <a:lstStyle/>
-                    <a:p>
-                      <a:pPr algn="l"/>
-                      <a:r>
-                        <a:rPr sz="1000" b="0">
-                          <a:solidFill>
-                            <a:srgbClr val="1D1B43"/>
-                          </a:solidFill>
-                          <a:latin typeface="Calibri"/>
-                        </a:rPr>
-                        <a:t>24/04/2026</a:t>
+                    <a:bodyPr/>
+                    <a:lstStyle/>
+                    <a:p>
+                      <a:pPr algn="l"/>
+                      <a:r>
+                        <a:rPr sz="1000" b="0">
+                          <a:solidFill>
+                            <a:srgbClr val="1D1B43"/>
+                          </a:solidFill>
+                          <a:latin typeface="Calibri"/>
+                        </a:rPr>
+                        <a:t>16/04/2026</a:t>
                       </a:r>
                     </a:p>
                   </a:txBody>
@@ -5795,7 +5795,7 @@
                 </a:tc>
                 <a:tc>
                   <a:txBody>
-                    <a:bodyPr wrap="square"/>
+                    <a:bodyPr/>
                     <a:lstStyle/>
                     <a:p>
                       <a:pPr algn="l"/>
@@ -5820,18 +5820,18 @@
               <a:tr h="384048">
                 <a:tc>
                   <a:txBody>
-                    <a:bodyPr wrap="square"/>
-                    <a:lstStyle/>
-                    <a:p>
-                      <a:pPr algn="l"/>
-                      <a:r>
-                        <a:rPr sz="1000" b="0">
-                          <a:solidFill>
-                            <a:srgbClr val="1D1B43"/>
-                          </a:solidFill>
-                          <a:latin typeface="Calibri"/>
-                        </a:rPr>
-                        <a:t>277942</a:t>
+                    <a:bodyPr/>
+                    <a:lstStyle/>
+                    <a:p>
+                      <a:pPr algn="l"/>
+                      <a:r>
+                        <a:rPr sz="1000" b="0">
+                          <a:solidFill>
+                            <a:srgbClr val="1D1B43"/>
+                          </a:solidFill>
+                          <a:latin typeface="Calibri"/>
+                        </a:rPr>
+                        <a:t>278747</a:t>
                       </a:r>
                     </a:p>
                   </a:txBody>
@@ -5843,18 +5843,18 @@
                 </a:tc>
                 <a:tc>
                   <a:txBody>
-                    <a:bodyPr wrap="square"/>
-                    <a:lstStyle/>
-                    <a:p>
-                      <a:pPr algn="l"/>
-                      <a:r>
-                        <a:rPr sz="1000" b="0">
-                          <a:solidFill>
-                            <a:srgbClr val="1D1B43"/>
-                          </a:solidFill>
-                          <a:latin typeface="Calibri"/>
-                        </a:rPr>
-                        <a:t>CORSUL COMERCIO E RE - JOINVILLE / SC</a:t>
+                    <a:bodyPr/>
+                    <a:lstStyle/>
+                    <a:p>
+                      <a:pPr algn="l"/>
+                      <a:r>
+                        <a:rPr sz="1000" b="0">
+                          <a:solidFill>
+                            <a:srgbClr val="1D1B43"/>
+                          </a:solidFill>
+                          <a:latin typeface="Calibri"/>
+                        </a:rPr>
+                        <a:t>RF-BRA TRANSPORTES L - GUARULHOS / SP</a:t>
                       </a:r>
                     </a:p>
                   </a:txBody>
@@ -5866,18 +5866,18 @@
                 </a:tc>
                 <a:tc>
                   <a:txBody>
-                    <a:bodyPr wrap="square"/>
-                    <a:lstStyle/>
-                    <a:p>
-                      <a:pPr algn="l"/>
-                      <a:r>
-                        <a:rPr sz="1000" b="0">
-                          <a:solidFill>
-                            <a:srgbClr val="1D1B43"/>
-                          </a:solidFill>
-                          <a:latin typeface="Calibri"/>
-                        </a:rPr>
-                        <a:t>JOINVILLE/SC</a:t>
+                    <a:bodyPr/>
+                    <a:lstStyle/>
+                    <a:p>
+                      <a:pPr algn="l"/>
+                      <a:r>
+                        <a:rPr sz="1000" b="0">
+                          <a:solidFill>
+                            <a:srgbClr val="1D1B43"/>
+                          </a:solidFill>
+                          <a:latin typeface="Calibri"/>
+                        </a:rPr>
+                        <a:t>GUARULHOS/SP</a:t>
                       </a:r>
                     </a:p>
                   </a:txBody>
@@ -5889,7 +5889,7 @@
                 </a:tc>
                 <a:tc>
                   <a:txBody>
-                    <a:bodyPr wrap="square"/>
+                    <a:bodyPr/>
                     <a:lstStyle/>
                     <a:p>
                       <a:pPr algn="l"/>
@@ -5912,7 +5912,7 @@
                 </a:tc>
                 <a:tc>
                   <a:txBody>
-                    <a:bodyPr wrap="square"/>
+                    <a:bodyPr/>
                     <a:lstStyle/>
                     <a:p>
                       <a:pPr algn="l"/>
@@ -5937,18 +5937,18 @@
               <a:tr h="384048">
                 <a:tc>
                   <a:txBody>
-                    <a:bodyPr wrap="square"/>
-                    <a:lstStyle/>
-                    <a:p>
-                      <a:pPr algn="l"/>
-                      <a:r>
-                        <a:rPr sz="1000" b="0">
-                          <a:solidFill>
-                            <a:srgbClr val="1D1B43"/>
-                          </a:solidFill>
-                          <a:latin typeface="Calibri"/>
-                        </a:rPr>
-                        <a:t>278080</a:t>
+                    <a:bodyPr/>
+                    <a:lstStyle/>
+                    <a:p>
+                      <a:pPr algn="l"/>
+                      <a:r>
+                        <a:rPr sz="1000" b="0">
+                          <a:solidFill>
+                            <a:srgbClr val="1D1B43"/>
+                          </a:solidFill>
+                          <a:latin typeface="Calibri"/>
+                        </a:rPr>
+                        <a:t>279044</a:t>
                       </a:r>
                     </a:p>
                   </a:txBody>
@@ -5960,18 +5960,18 @@
                 </a:tc>
                 <a:tc>
                   <a:txBody>
-                    <a:bodyPr wrap="square"/>
-                    <a:lstStyle/>
-                    <a:p>
-                      <a:pPr algn="l"/>
-                      <a:r>
-                        <a:rPr sz="1000" b="0">
-                          <a:solidFill>
-                            <a:srgbClr val="1D1B43"/>
-                          </a:solidFill>
-                          <a:latin typeface="Calibri"/>
-                        </a:rPr>
-                        <a:t>CORSUL COMERCIO E RE - INDAIAL / SC</a:t>
+                    <a:bodyPr/>
+                    <a:lstStyle/>
+                    <a:p>
+                      <a:pPr algn="l"/>
+                      <a:r>
+                        <a:rPr sz="1000" b="0">
+                          <a:solidFill>
+                            <a:srgbClr val="1D1B43"/>
+                          </a:solidFill>
+                          <a:latin typeface="Calibri"/>
+                        </a:rPr>
+                        <a:t>IR NEUTZLING &amp; CIA L - PELOTAS / RS</a:t>
                       </a:r>
                     </a:p>
                   </a:txBody>
@@ -5983,18 +5983,18 @@
                 </a:tc>
                 <a:tc>
                   <a:txBody>
-                    <a:bodyPr wrap="square"/>
-                    <a:lstStyle/>
-                    <a:p>
-                      <a:pPr algn="l"/>
-                      <a:r>
-                        <a:rPr sz="1000" b="0">
-                          <a:solidFill>
-                            <a:srgbClr val="1D1B43"/>
-                          </a:solidFill>
-                          <a:latin typeface="Calibri"/>
-                        </a:rPr>
-                        <a:t>INDAIAL/SC</a:t>
+                    <a:bodyPr/>
+                    <a:lstStyle/>
+                    <a:p>
+                      <a:pPr algn="l"/>
+                      <a:r>
+                        <a:rPr sz="1000" b="0">
+                          <a:solidFill>
+                            <a:srgbClr val="1D1B43"/>
+                          </a:solidFill>
+                          <a:latin typeface="Calibri"/>
+                        </a:rPr>
+                        <a:t>PELOTAS/RS</a:t>
                       </a:r>
                     </a:p>
                   </a:txBody>
@@ -6006,18 +6006,18 @@
                 </a:tc>
                 <a:tc>
                   <a:txBody>
-                    <a:bodyPr wrap="square"/>
-                    <a:lstStyle/>
-                    <a:p>
-                      <a:pPr algn="l"/>
-                      <a:r>
-                        <a:rPr sz="1000" b="0">
-                          <a:solidFill>
-                            <a:srgbClr val="1D1B43"/>
-                          </a:solidFill>
-                          <a:latin typeface="Calibri"/>
-                        </a:rPr>
-                        <a:t>16/04/2026</a:t>
+                    <a:bodyPr/>
+                    <a:lstStyle/>
+                    <a:p>
+                      <a:pPr algn="l"/>
+                      <a:r>
+                        <a:rPr sz="1000" b="0">
+                          <a:solidFill>
+                            <a:srgbClr val="1D1B43"/>
+                          </a:solidFill>
+                          <a:latin typeface="Calibri"/>
+                        </a:rPr>
+                        <a:t>28/04/2026</a:t>
                       </a:r>
                     </a:p>
                   </a:txBody>
@@ -6029,18 +6029,18 @@
                 </a:tc>
                 <a:tc>
                   <a:txBody>
-                    <a:bodyPr wrap="square"/>
-                    <a:lstStyle/>
-                    <a:p>
-                      <a:pPr algn="l"/>
-                      <a:r>
-                        <a:rPr sz="1000" b="0">
-                          <a:solidFill>
-                            <a:srgbClr val="1D1B43"/>
-                          </a:solidFill>
-                          <a:latin typeface="Calibri"/>
-                        </a:rPr>
-                        <a:t>ENTREGUE FORA DO PRAZO</a:t>
+                    <a:bodyPr/>
+                    <a:lstStyle/>
+                    <a:p>
+                      <a:pPr algn="l"/>
+                      <a:r>
+                        <a:rPr sz="1000" b="0">
+                          <a:solidFill>
+                            <a:srgbClr val="1D1B43"/>
+                          </a:solidFill>
+                          <a:latin typeface="Calibri"/>
+                        </a:rPr>
+                        <a:t>FORA DO PRAZO</a:t>
                       </a:r>
                     </a:p>
                   </a:txBody>
@@ -6054,18 +6054,18 @@
               <a:tr h="384048">
                 <a:tc>
                   <a:txBody>
-                    <a:bodyPr wrap="square"/>
-                    <a:lstStyle/>
-                    <a:p>
-                      <a:pPr algn="l"/>
-                      <a:r>
-                        <a:rPr sz="1000" b="0">
-                          <a:solidFill>
-                            <a:srgbClr val="1D1B43"/>
-                          </a:solidFill>
-                          <a:latin typeface="Calibri"/>
-                        </a:rPr>
-                        <a:t>278747</a:t>
+                    <a:bodyPr/>
+                    <a:lstStyle/>
+                    <a:p>
+                      <a:pPr algn="l"/>
+                      <a:r>
+                        <a:rPr sz="1000" b="0">
+                          <a:solidFill>
+                            <a:srgbClr val="1D1B43"/>
+                          </a:solidFill>
+                          <a:latin typeface="Calibri"/>
+                        </a:rPr>
+                        <a:t>279586</a:t>
                       </a:r>
                     </a:p>
                   </a:txBody>
@@ -6077,18 +6077,18 @@
                 </a:tc>
                 <a:tc>
                   <a:txBody>
-                    <a:bodyPr wrap="square"/>
-                    <a:lstStyle/>
-                    <a:p>
-                      <a:pPr algn="l"/>
-                      <a:r>
-                        <a:rPr sz="1000" b="0">
-                          <a:solidFill>
-                            <a:srgbClr val="1D1B43"/>
-                          </a:solidFill>
-                          <a:latin typeface="Calibri"/>
-                        </a:rPr>
-                        <a:t>RF-BRA TRANSPORTES L - GUARULHOS / SP</a:t>
+                    <a:bodyPr/>
+                    <a:lstStyle/>
+                    <a:p>
+                      <a:pPr algn="l"/>
+                      <a:r>
+                        <a:rPr sz="1000" b="0">
+                          <a:solidFill>
+                            <a:srgbClr val="1D1B43"/>
+                          </a:solidFill>
+                          <a:latin typeface="Calibri"/>
+                        </a:rPr>
+                        <a:t>BUNZL EQUIPAMENTOS P - CONTAGEM / MG</a:t>
                       </a:r>
                     </a:p>
                   </a:txBody>
@@ -6100,18 +6100,18 @@
                 </a:tc>
                 <a:tc>
                   <a:txBody>
-                    <a:bodyPr wrap="square"/>
-                    <a:lstStyle/>
-                    <a:p>
-                      <a:pPr algn="l"/>
-                      <a:r>
-                        <a:rPr sz="1000" b="0">
-                          <a:solidFill>
-                            <a:srgbClr val="1D1B43"/>
-                          </a:solidFill>
-                          <a:latin typeface="Calibri"/>
-                        </a:rPr>
-                        <a:t>GUARULHOS/SP</a:t>
+                    <a:bodyPr/>
+                    <a:lstStyle/>
+                    <a:p>
+                      <a:pPr algn="l"/>
+                      <a:r>
+                        <a:rPr sz="1000" b="0">
+                          <a:solidFill>
+                            <a:srgbClr val="1D1B43"/>
+                          </a:solidFill>
+                          <a:latin typeface="Calibri"/>
+                        </a:rPr>
+                        <a:t>CONTAGEM/MG</a:t>
                       </a:r>
                     </a:p>
                   </a:txBody>
@@ -6123,18 +6123,18 @@
                 </a:tc>
                 <a:tc>
                   <a:txBody>
-                    <a:bodyPr wrap="square"/>
-                    <a:lstStyle/>
-                    <a:p>
-                      <a:pPr algn="l"/>
-                      <a:r>
-                        <a:rPr sz="1000" b="0">
-                          <a:solidFill>
-                            <a:srgbClr val="1D1B43"/>
-                          </a:solidFill>
-                          <a:latin typeface="Calibri"/>
-                        </a:rPr>
-                        <a:t>14/04/2026</a:t>
+                    <a:bodyPr/>
+                    <a:lstStyle/>
+                    <a:p>
+                      <a:pPr algn="l"/>
+                      <a:r>
+                        <a:rPr sz="1000" b="0">
+                          <a:solidFill>
+                            <a:srgbClr val="1D1B43"/>
+                          </a:solidFill>
+                          <a:latin typeface="Calibri"/>
+                        </a:rPr>
+                        <a:t>27/04/2026</a:t>
                       </a:r>
                     </a:p>
                   </a:txBody>
@@ -6146,7 +6146,7 @@
                 </a:tc>
                 <a:tc>
                   <a:txBody>
-                    <a:bodyPr wrap="square"/>
+                    <a:bodyPr/>
                     <a:lstStyle/>
                     <a:p>
                       <a:pPr algn="l"/>
@@ -6171,18 +6171,18 @@
               <a:tr h="384048">
                 <a:tc>
                   <a:txBody>
-                    <a:bodyPr wrap="square"/>
-                    <a:lstStyle/>
-                    <a:p>
-                      <a:pPr algn="l"/>
-                      <a:r>
-                        <a:rPr sz="1000" b="0">
-                          <a:solidFill>
-                            <a:srgbClr val="1D1B43"/>
-                          </a:solidFill>
-                          <a:latin typeface="Calibri"/>
-                        </a:rPr>
-                        <a:t>279044</a:t>
+                    <a:bodyPr/>
+                    <a:lstStyle/>
+                    <a:p>
+                      <a:pPr algn="l"/>
+                      <a:r>
+                        <a:rPr sz="1000" b="0">
+                          <a:solidFill>
+                            <a:srgbClr val="1D1B43"/>
+                          </a:solidFill>
+                          <a:latin typeface="Calibri"/>
+                        </a:rPr>
+                        <a:t>279599</a:t>
                       </a:r>
                     </a:p>
                   </a:txBody>
@@ -6194,18 +6194,18 @@
                 </a:tc>
                 <a:tc>
                   <a:txBody>
-                    <a:bodyPr wrap="square"/>
-                    <a:lstStyle/>
-                    <a:p>
-                      <a:pPr algn="l"/>
-                      <a:r>
-                        <a:rPr sz="1000" b="0">
-                          <a:solidFill>
-                            <a:srgbClr val="1D1B43"/>
-                          </a:solidFill>
-                          <a:latin typeface="Calibri"/>
-                        </a:rPr>
-                        <a:t>IR NEUTZLING &amp; CIA L - PELOTAS / RS</a:t>
+                    <a:bodyPr/>
+                    <a:lstStyle/>
+                    <a:p>
+                      <a:pPr algn="l"/>
+                      <a:r>
+                        <a:rPr sz="1000" b="0">
+                          <a:solidFill>
+                            <a:srgbClr val="1D1B43"/>
+                          </a:solidFill>
+                          <a:latin typeface="Calibri"/>
+                        </a:rPr>
+                        <a:t>BUNZL EQUIPAMENTOS P - CONTAGEM / MG</a:t>
                       </a:r>
                     </a:p>
                   </a:txBody>
@@ -6217,18 +6217,18 @@
                 </a:tc>
                 <a:tc>
                   <a:txBody>
-                    <a:bodyPr wrap="square"/>
-                    <a:lstStyle/>
-                    <a:p>
-                      <a:pPr algn="l"/>
-                      <a:r>
-                        <a:rPr sz="1000" b="0">
-                          <a:solidFill>
-                            <a:srgbClr val="1D1B43"/>
-                          </a:solidFill>
-                          <a:latin typeface="Calibri"/>
-                        </a:rPr>
-                        <a:t>PELOTAS/RS</a:t>
+                    <a:bodyPr/>
+                    <a:lstStyle/>
+                    <a:p>
+                      <a:pPr algn="l"/>
+                      <a:r>
+                        <a:rPr sz="1000" b="0">
+                          <a:solidFill>
+                            <a:srgbClr val="1D1B43"/>
+                          </a:solidFill>
+                          <a:latin typeface="Calibri"/>
+                        </a:rPr>
+                        <a:t>CONTAGEM/MG</a:t>
                       </a:r>
                     </a:p>
                   </a:txBody>
@@ -6240,18 +6240,18 @@
                 </a:tc>
                 <a:tc>
                   <a:txBody>
-                    <a:bodyPr wrap="square"/>
-                    <a:lstStyle/>
-                    <a:p>
-                      <a:pPr algn="l"/>
-                      <a:r>
-                        <a:rPr sz="1000" b="0">
-                          <a:solidFill>
-                            <a:srgbClr val="1D1B43"/>
-                          </a:solidFill>
-                          <a:latin typeface="Calibri"/>
-                        </a:rPr>
-                        <a:t>28/04/2026</a:t>
+                    <a:bodyPr/>
+                    <a:lstStyle/>
+                    <a:p>
+                      <a:pPr algn="l"/>
+                      <a:r>
+                        <a:rPr sz="1000" b="0">
+                          <a:solidFill>
+                            <a:srgbClr val="1D1B43"/>
+                          </a:solidFill>
+                          <a:latin typeface="Calibri"/>
+                        </a:rPr>
+                        <a:t>27/04/2026</a:t>
                       </a:r>
                     </a:p>
                   </a:txBody>
@@ -6263,18 +6263,18 @@
                 </a:tc>
                 <a:tc>
                   <a:txBody>
-                    <a:bodyPr wrap="square"/>
-                    <a:lstStyle/>
-                    <a:p>
-                      <a:pPr algn="l"/>
-                      <a:r>
-                        <a:rPr sz="1000" b="0">
-                          <a:solidFill>
-                            <a:srgbClr val="1D1B43"/>
-                          </a:solidFill>
-                          <a:latin typeface="Calibri"/>
-                        </a:rPr>
-                        <a:t>FORA DO PRAZO</a:t>
+                    <a:bodyPr/>
+                    <a:lstStyle/>
+                    <a:p>
+                      <a:pPr algn="l"/>
+                      <a:r>
+                        <a:rPr sz="1000" b="0">
+                          <a:solidFill>
+                            <a:srgbClr val="1D1B43"/>
+                          </a:solidFill>
+                          <a:latin typeface="Calibri"/>
+                        </a:rPr>
+                        <a:t>ENTREGUE FORA DO PRAZO</a:t>
                       </a:r>
                     </a:p>
                   </a:txBody>
@@ -6288,18 +6288,18 @@
               <a:tr h="384048">
                 <a:tc>
                   <a:txBody>
-                    <a:bodyPr wrap="square"/>
-                    <a:lstStyle/>
-                    <a:p>
-                      <a:pPr algn="l"/>
-                      <a:r>
-                        <a:rPr sz="1000" b="0">
-                          <a:solidFill>
-                            <a:srgbClr val="1D1B43"/>
-                          </a:solidFill>
-                          <a:latin typeface="Calibri"/>
-                        </a:rPr>
-                        <a:t>279586</a:t>
+                    <a:bodyPr/>
+                    <a:lstStyle/>
+                    <a:p>
+                      <a:pPr algn="l"/>
+                      <a:r>
+                        <a:rPr sz="1000" b="0">
+                          <a:solidFill>
+                            <a:srgbClr val="1D1B43"/>
+                          </a:solidFill>
+                          <a:latin typeface="Calibri"/>
+                        </a:rPr>
+                        <a:t>280019</a:t>
                       </a:r>
                     </a:p>
                   </a:txBody>
@@ -6311,18 +6311,18 @@
                 </a:tc>
                 <a:tc>
                   <a:txBody>
-                    <a:bodyPr wrap="square"/>
-                    <a:lstStyle/>
-                    <a:p>
-                      <a:pPr algn="l"/>
-                      <a:r>
-                        <a:rPr sz="1000" b="0">
-                          <a:solidFill>
-                            <a:srgbClr val="1D1B43"/>
-                          </a:solidFill>
-                          <a:latin typeface="Calibri"/>
-                        </a:rPr>
-                        <a:t>BUNZL EQUIPAMENTOS P - CONTAGEM / MG</a:t>
+                    <a:bodyPr/>
+                    <a:lstStyle/>
+                    <a:p>
+                      <a:pPr algn="l"/>
+                      <a:r>
+                        <a:rPr sz="1000" b="0">
+                          <a:solidFill>
+                            <a:srgbClr val="1D1B43"/>
+                          </a:solidFill>
+                          <a:latin typeface="Calibri"/>
+                        </a:rPr>
+                        <a:t>1000 MARCAS SAFETY B - ARACARIGUAMA / SP</a:t>
                       </a:r>
                     </a:p>
                   </a:txBody>
@@ -6334,18 +6334,18 @@
                 </a:tc>
                 <a:tc>
                   <a:txBody>
-                    <a:bodyPr wrap="square"/>
-                    <a:lstStyle/>
-                    <a:p>
-                      <a:pPr algn="l"/>
-                      <a:r>
-                        <a:rPr sz="1000" b="0">
-                          <a:solidFill>
-                            <a:srgbClr val="1D1B43"/>
-                          </a:solidFill>
-                          <a:latin typeface="Calibri"/>
-                        </a:rPr>
-                        <a:t>CONTAGEM/MG</a:t>
+                    <a:bodyPr/>
+                    <a:lstStyle/>
+                    <a:p>
+                      <a:pPr algn="l"/>
+                      <a:r>
+                        <a:rPr sz="1000" b="0">
+                          <a:solidFill>
+                            <a:srgbClr val="1D1B43"/>
+                          </a:solidFill>
+                          <a:latin typeface="Calibri"/>
+                        </a:rPr>
+                        <a:t>ARACARIGUAMA/SP</a:t>
                       </a:r>
                     </a:p>
                   </a:txBody>
@@ -6357,18 +6357,18 @@
                 </a:tc>
                 <a:tc>
                   <a:txBody>
-                    <a:bodyPr wrap="square"/>
-                    <a:lstStyle/>
-                    <a:p>
-                      <a:pPr algn="l"/>
-                      <a:r>
-                        <a:rPr sz="1000" b="0">
-                          <a:solidFill>
-                            <a:srgbClr val="1D1B43"/>
-                          </a:solidFill>
-                          <a:latin typeface="Calibri"/>
-                        </a:rPr>
-                        <a:t>27/04/2026</a:t>
+                    <a:bodyPr/>
+                    <a:lstStyle/>
+                    <a:p>
+                      <a:pPr algn="l"/>
+                      <a:r>
+                        <a:rPr sz="1000" b="0">
+                          <a:solidFill>
+                            <a:srgbClr val="1D1B43"/>
+                          </a:solidFill>
+                          <a:latin typeface="Calibri"/>
+                        </a:rPr>
+                        <a:t>24/04/2026</a:t>
                       </a:r>
                     </a:p>
                   </a:txBody>
@@ -6380,241 +6380,7 @@
                 </a:tc>
                 <a:tc>
                   <a:txBody>
-                    <a:bodyPr wrap="square"/>
-                    <a:lstStyle/>
-                    <a:p>
-                      <a:pPr algn="l"/>
-                      <a:r>
-                        <a:rPr sz="1000" b="0">
-                          <a:solidFill>
-                            <a:srgbClr val="1D1B43"/>
-                          </a:solidFill>
-                          <a:latin typeface="Calibri"/>
-                        </a:rPr>
-                        <a:t>ENTREGUE FORA DO PRAZO</a:t>
-                      </a:r>
-                    </a:p>
-                  </a:txBody>
-                  <a:tcPr>
-                    <a:solidFill>
-                      <a:srgbClr val="F2F2F2"/>
-                    </a:solidFill>
-                  </a:tcPr>
-                </a:tc>
-              </a:tr>
-              <a:tr h="384048">
-                <a:tc>
-                  <a:txBody>
-                    <a:bodyPr wrap="square"/>
-                    <a:lstStyle/>
-                    <a:p>
-                      <a:pPr algn="l"/>
-                      <a:r>
-                        <a:rPr sz="1000" b="0">
-                          <a:solidFill>
-                            <a:srgbClr val="1D1B43"/>
-                          </a:solidFill>
-                          <a:latin typeface="Calibri"/>
-                        </a:rPr>
-                        <a:t>279599</a:t>
-                      </a:r>
-                    </a:p>
-                  </a:txBody>
-                  <a:tcPr>
-                    <a:solidFill>
-                      <a:srgbClr val="FFFFFF"/>
-                    </a:solidFill>
-                  </a:tcPr>
-                </a:tc>
-                <a:tc>
-                  <a:txBody>
-                    <a:bodyPr wrap="square"/>
-                    <a:lstStyle/>
-                    <a:p>
-                      <a:pPr algn="l"/>
-                      <a:r>
-                        <a:rPr sz="1000" b="0">
-                          <a:solidFill>
-                            <a:srgbClr val="1D1B43"/>
-                          </a:solidFill>
-                          <a:latin typeface="Calibri"/>
-                        </a:rPr>
-                        <a:t>BUNZL EQUIPAMENTOS P - CONTAGEM / MG</a:t>
-                      </a:r>
-                    </a:p>
-                  </a:txBody>
-                  <a:tcPr>
-                    <a:solidFill>
-                      <a:srgbClr val="FFFFFF"/>
-                    </a:solidFill>
-                  </a:tcPr>
-                </a:tc>
-                <a:tc>
-                  <a:txBody>
-                    <a:bodyPr wrap="square"/>
-                    <a:lstStyle/>
-                    <a:p>
-                      <a:pPr algn="l"/>
-                      <a:r>
-                        <a:rPr sz="1000" b="0">
-                          <a:solidFill>
-                            <a:srgbClr val="1D1B43"/>
-                          </a:solidFill>
-                          <a:latin typeface="Calibri"/>
-                        </a:rPr>
-                        <a:t>CONTAGEM/MG</a:t>
-                      </a:r>
-                    </a:p>
-                  </a:txBody>
-                  <a:tcPr>
-                    <a:solidFill>
-                      <a:srgbClr val="FFFFFF"/>
-                    </a:solidFill>
-                  </a:tcPr>
-                </a:tc>
-                <a:tc>
-                  <a:txBody>
-                    <a:bodyPr wrap="square"/>
-                    <a:lstStyle/>
-                    <a:p>
-                      <a:pPr algn="l"/>
-                      <a:r>
-                        <a:rPr sz="1000" b="0">
-                          <a:solidFill>
-                            <a:srgbClr val="1D1B43"/>
-                          </a:solidFill>
-                          <a:latin typeface="Calibri"/>
-                        </a:rPr>
-                        <a:t>27/04/2026</a:t>
-                      </a:r>
-                    </a:p>
-                  </a:txBody>
-                  <a:tcPr>
-                    <a:solidFill>
-                      <a:srgbClr val="FFFFFF"/>
-                    </a:solidFill>
-                  </a:tcPr>
-                </a:tc>
-                <a:tc>
-                  <a:txBody>
-                    <a:bodyPr wrap="square"/>
-                    <a:lstStyle/>
-                    <a:p>
-                      <a:pPr algn="l"/>
-                      <a:r>
-                        <a:rPr sz="1000" b="0">
-                          <a:solidFill>
-                            <a:srgbClr val="1D1B43"/>
-                          </a:solidFill>
-                          <a:latin typeface="Calibri"/>
-                        </a:rPr>
-                        <a:t>ENTREGUE FORA DO PRAZO</a:t>
-                      </a:r>
-                    </a:p>
-                  </a:txBody>
-                  <a:tcPr>
-                    <a:solidFill>
-                      <a:srgbClr val="FFFFFF"/>
-                    </a:solidFill>
-                  </a:tcPr>
-                </a:tc>
-              </a:tr>
-              <a:tr h="384048">
-                <a:tc>
-                  <a:txBody>
-                    <a:bodyPr wrap="square"/>
-                    <a:lstStyle/>
-                    <a:p>
-                      <a:pPr algn="l"/>
-                      <a:r>
-                        <a:rPr sz="1000" b="0">
-                          <a:solidFill>
-                            <a:srgbClr val="1D1B43"/>
-                          </a:solidFill>
-                          <a:latin typeface="Calibri"/>
-                        </a:rPr>
-                        <a:t>280019</a:t>
-                      </a:r>
-                    </a:p>
-                  </a:txBody>
-                  <a:tcPr>
-                    <a:solidFill>
-                      <a:srgbClr val="F2F2F2"/>
-                    </a:solidFill>
-                  </a:tcPr>
-                </a:tc>
-                <a:tc>
-                  <a:txBody>
-                    <a:bodyPr wrap="square"/>
-                    <a:lstStyle/>
-                    <a:p>
-                      <a:pPr algn="l"/>
-                      <a:r>
-                        <a:rPr sz="1000" b="0">
-                          <a:solidFill>
-                            <a:srgbClr val="1D1B43"/>
-                          </a:solidFill>
-                          <a:latin typeface="Calibri"/>
-                        </a:rPr>
-                        <a:t>1000 MARCAS SAFETY B - ARACARIGUAMA / SP</a:t>
-                      </a:r>
-                    </a:p>
-                  </a:txBody>
-                  <a:tcPr>
-                    <a:solidFill>
-                      <a:srgbClr val="F2F2F2"/>
-                    </a:solidFill>
-                  </a:tcPr>
-                </a:tc>
-                <a:tc>
-                  <a:txBody>
-                    <a:bodyPr wrap="square"/>
-                    <a:lstStyle/>
-                    <a:p>
-                      <a:pPr algn="l"/>
-                      <a:r>
-                        <a:rPr sz="1000" b="0">
-                          <a:solidFill>
-                            <a:srgbClr val="1D1B43"/>
-                          </a:solidFill>
-                          <a:latin typeface="Calibri"/>
-                        </a:rPr>
-                        <a:t>ARACARIGUAMA/SP</a:t>
-                      </a:r>
-                    </a:p>
-                  </a:txBody>
-                  <a:tcPr>
-                    <a:solidFill>
-                      <a:srgbClr val="F2F2F2"/>
-                    </a:solidFill>
-                  </a:tcPr>
-                </a:tc>
-                <a:tc>
-                  <a:txBody>
-                    <a:bodyPr wrap="square"/>
-                    <a:lstStyle/>
-                    <a:p>
-                      <a:pPr algn="l"/>
-                      <a:r>
-                        <a:rPr sz="1000" b="0">
-                          <a:solidFill>
-                            <a:srgbClr val="1D1B43"/>
-                          </a:solidFill>
-                          <a:latin typeface="Calibri"/>
-                        </a:rPr>
-                        <a:t>24/04/2026</a:t>
-                      </a:r>
-                    </a:p>
-                  </a:txBody>
-                  <a:tcPr>
-                    <a:solidFill>
-                      <a:srgbClr val="F2F2F2"/>
-                    </a:solidFill>
-                  </a:tcPr>
-                </a:tc>
-                <a:tc>
-                  <a:txBody>
-                    <a:bodyPr wrap="square"/>
+                    <a:bodyPr/>
                     <a:lstStyle/>
                     <a:p>
                       <a:pPr algn="l"/>
@@ -6797,7 +6563,7 @@
               <a:tr h="399010">
                 <a:tc>
                   <a:txBody>
-                    <a:bodyPr wrap="square"/>
+                    <a:bodyPr/>
                     <a:lstStyle/>
                     <a:p>
                       <a:pPr algn="ctr"/>
@@ -6820,7 +6586,7 @@
                 </a:tc>
                 <a:tc>
                   <a:txBody>
-                    <a:bodyPr wrap="square"/>
+                    <a:bodyPr/>
                     <a:lstStyle/>
                     <a:p>
                       <a:pPr algn="ctr"/>
@@ -6843,7 +6609,7 @@
                 </a:tc>
                 <a:tc>
                   <a:txBody>
-                    <a:bodyPr wrap="square"/>
+                    <a:bodyPr/>
                     <a:lstStyle/>
                     <a:p>
                       <a:pPr algn="ctr"/>
@@ -6866,7 +6632,7 @@
                 </a:tc>
                 <a:tc>
                   <a:txBody>
-                    <a:bodyPr wrap="square"/>
+                    <a:bodyPr/>
                     <a:lstStyle/>
                     <a:p>
                       <a:pPr algn="ctr"/>
@@ -6889,7 +6655,7 @@
                 </a:tc>
                 <a:tc>
                   <a:txBody>
-                    <a:bodyPr wrap="square"/>
+                    <a:bodyPr/>
                     <a:lstStyle/>
                     <a:p>
                       <a:pPr algn="ctr"/>
@@ -6912,7 +6678,7 @@
                 </a:tc>
                 <a:tc>
                   <a:txBody>
-                    <a:bodyPr wrap="square"/>
+                    <a:bodyPr/>
                     <a:lstStyle/>
                     <a:p>
                       <a:pPr algn="ctr"/>
@@ -6937,7 +6703,7 @@
               <a:tr h="399010">
                 <a:tc>
                   <a:txBody>
-                    <a:bodyPr wrap="square"/>
+                    <a:bodyPr/>
                     <a:lstStyle/>
                     <a:p>
                       <a:pPr algn="l"/>
@@ -6960,18 +6726,18 @@
                 </a:tc>
                 <a:tc>
                   <a:txBody>
-                    <a:bodyPr wrap="square"/>
-                    <a:lstStyle/>
-                    <a:p>
-                      <a:pPr algn="l"/>
-                      <a:r>
-                        <a:rPr sz="1000" b="0">
-                          <a:solidFill>
-                            <a:srgbClr val="1D1B43"/>
-                          </a:solidFill>
-                          <a:latin typeface="Calibri"/>
-                        </a:rPr>
-                        <a:t>153</a:t>
+                    <a:bodyPr/>
+                    <a:lstStyle/>
+                    <a:p>
+                      <a:pPr algn="l"/>
+                      <a:r>
+                        <a:rPr sz="1000" b="0">
+                          <a:solidFill>
+                            <a:srgbClr val="1D1B43"/>
+                          </a:solidFill>
+                          <a:latin typeface="Calibri"/>
+                        </a:rPr>
+                        <a:t>145</a:t>
                       </a:r>
                     </a:p>
                   </a:txBody>
@@ -6983,18 +6749,18 @@
                 </a:tc>
                 <a:tc>
                   <a:txBody>
-                    <a:bodyPr wrap="square"/>
-                    <a:lstStyle/>
-                    <a:p>
-                      <a:pPr algn="l"/>
-                      <a:r>
-                        <a:rPr sz="1000" b="0">
-                          <a:solidFill>
-                            <a:srgbClr val="1D1B43"/>
-                          </a:solidFill>
-                          <a:latin typeface="Calibri"/>
-                        </a:rPr>
-                        <a:t>150</a:t>
+                    <a:bodyPr/>
+                    <a:lstStyle/>
+                    <a:p>
+                      <a:pPr algn="l"/>
+                      <a:r>
+                        <a:rPr sz="1000" b="0">
+                          <a:solidFill>
+                            <a:srgbClr val="1D1B43"/>
+                          </a:solidFill>
+                          <a:latin typeface="Calibri"/>
+                        </a:rPr>
+                        <a:t>142</a:t>
                       </a:r>
                     </a:p>
                   </a:txBody>
@@ -7006,7 +6772,7 @@
                 </a:tc>
                 <a:tc>
                   <a:txBody>
-                    <a:bodyPr wrap="square"/>
+                    <a:bodyPr/>
                     <a:lstStyle/>
                     <a:p>
                       <a:pPr algn="l"/>
@@ -7029,18 +6795,18 @@
                 </a:tc>
                 <a:tc>
                   <a:txBody>
-                    <a:bodyPr wrap="square"/>
-                    <a:lstStyle/>
-                    <a:p>
-                      <a:pPr algn="l"/>
-                      <a:r>
-                        <a:rPr sz="1000" b="0">
-                          <a:solidFill>
-                            <a:srgbClr val="1D1B43"/>
-                          </a:solidFill>
-                          <a:latin typeface="Calibri"/>
-                        </a:rPr>
-                        <a:t>98.0%</a:t>
+                    <a:bodyPr/>
+                    <a:lstStyle/>
+                    <a:p>
+                      <a:pPr algn="l"/>
+                      <a:r>
+                        <a:rPr sz="1000" b="0">
+                          <a:solidFill>
+                            <a:srgbClr val="1D1B43"/>
+                          </a:solidFill>
+                          <a:latin typeface="Calibri"/>
+                        </a:rPr>
+                        <a:t>97.9%</a:t>
                       </a:r>
                     </a:p>
                   </a:txBody>
@@ -7052,7 +6818,7 @@
                 </a:tc>
                 <a:tc>
                   <a:txBody>
-                    <a:bodyPr wrap="square"/>
+                    <a:bodyPr/>
                     <a:lstStyle/>
                     <a:p>
                       <a:pPr algn="l"/>
@@ -7077,7 +6843,7 @@
               <a:tr h="399010">
                 <a:tc>
                   <a:txBody>
-                    <a:bodyPr wrap="square"/>
+                    <a:bodyPr/>
                     <a:lstStyle/>
                     <a:p>
                       <a:pPr algn="l"/>
@@ -7100,7 +6866,7 @@
                 </a:tc>
                 <a:tc>
                   <a:txBody>
-                    <a:bodyPr wrap="square"/>
+                    <a:bodyPr/>
                     <a:lstStyle/>
                     <a:p>
                       <a:pPr algn="l"/>
@@ -7123,7 +6889,7 @@
                 </a:tc>
                 <a:tc>
                   <a:txBody>
-                    <a:bodyPr wrap="square"/>
+                    <a:bodyPr/>
                     <a:lstStyle/>
                     <a:p>
                       <a:pPr algn="l"/>
@@ -7146,7 +6912,7 @@
                 </a:tc>
                 <a:tc>
                   <a:txBody>
-                    <a:bodyPr wrap="square"/>
+                    <a:bodyPr/>
                     <a:lstStyle/>
                     <a:p>
                       <a:pPr algn="l"/>
@@ -7169,7 +6935,7 @@
                 </a:tc>
                 <a:tc>
                   <a:txBody>
-                    <a:bodyPr wrap="square"/>
+                    <a:bodyPr/>
                     <a:lstStyle/>
                     <a:p>
                       <a:pPr algn="l"/>
@@ -7192,7 +6958,7 @@
                 </a:tc>
                 <a:tc>
                   <a:txBody>
-                    <a:bodyPr wrap="square"/>
+                    <a:bodyPr/>
                     <a:lstStyle/>
                     <a:p>
                       <a:pPr algn="l"/>
@@ -7217,7 +6983,7 @@
               <a:tr h="399010">
                 <a:tc>
                   <a:txBody>
-                    <a:bodyPr wrap="square"/>
+                    <a:bodyPr/>
                     <a:lstStyle/>
                     <a:p>
                       <a:pPr algn="l"/>
@@ -7240,18 +7006,18 @@
                 </a:tc>
                 <a:tc>
                   <a:txBody>
-                    <a:bodyPr wrap="square"/>
-                    <a:lstStyle/>
-                    <a:p>
-                      <a:pPr algn="l"/>
-                      <a:r>
-                        <a:rPr sz="1000" b="0">
-                          <a:solidFill>
-                            <a:srgbClr val="1D1B43"/>
-                          </a:solidFill>
-                          <a:latin typeface="Calibri"/>
-                        </a:rPr>
-                        <a:t>26</a:t>
+                    <a:bodyPr/>
+                    <a:lstStyle/>
+                    <a:p>
+                      <a:pPr algn="l"/>
+                      <a:r>
+                        <a:rPr sz="1000" b="0">
+                          <a:solidFill>
+                            <a:srgbClr val="1D1B43"/>
+                          </a:solidFill>
+                          <a:latin typeface="Calibri"/>
+                        </a:rPr>
+                        <a:t>23</a:t>
                       </a:r>
                     </a:p>
                   </a:txBody>
@@ -7263,18 +7029,18 @@
                 </a:tc>
                 <a:tc>
                   <a:txBody>
-                    <a:bodyPr wrap="square"/>
-                    <a:lstStyle/>
-                    <a:p>
-                      <a:pPr algn="l"/>
-                      <a:r>
-                        <a:rPr sz="1000" b="0">
-                          <a:solidFill>
-                            <a:srgbClr val="1D1B43"/>
-                          </a:solidFill>
-                          <a:latin typeface="Calibri"/>
-                        </a:rPr>
-                        <a:t>26</a:t>
+                    <a:bodyPr/>
+                    <a:lstStyle/>
+                    <a:p>
+                      <a:pPr algn="l"/>
+                      <a:r>
+                        <a:rPr sz="1000" b="0">
+                          <a:solidFill>
+                            <a:srgbClr val="1D1B43"/>
+                          </a:solidFill>
+                          <a:latin typeface="Calibri"/>
+                        </a:rPr>
+                        <a:t>23</a:t>
                       </a:r>
                     </a:p>
                   </a:txBody>
@@ -7286,7 +7052,7 @@
                 </a:tc>
                 <a:tc>
                   <a:txBody>
-                    <a:bodyPr wrap="square"/>
+                    <a:bodyPr/>
                     <a:lstStyle/>
                     <a:p>
                       <a:pPr algn="l"/>
@@ -7309,7 +7075,7 @@
                 </a:tc>
                 <a:tc>
                   <a:txBody>
-                    <a:bodyPr wrap="square"/>
+                    <a:bodyPr/>
                     <a:lstStyle/>
                     <a:p>
                       <a:pPr algn="l"/>
@@ -7332,7 +7098,7 @@
                 </a:tc>
                 <a:tc>
                   <a:txBody>
-                    <a:bodyPr wrap="square"/>
+                    <a:bodyPr/>
                     <a:lstStyle/>
                     <a:p>
                       <a:pPr algn="l"/>
@@ -7357,7 +7123,7 @@
               <a:tr h="399010">
                 <a:tc>
                   <a:txBody>
-                    <a:bodyPr wrap="square"/>
+                    <a:bodyPr/>
                     <a:lstStyle/>
                     <a:p>
                       <a:pPr algn="l"/>
@@ -7380,7 +7146,7 @@
                 </a:tc>
                 <a:tc>
                   <a:txBody>
-                    <a:bodyPr wrap="square"/>
+                    <a:bodyPr/>
                     <a:lstStyle/>
                     <a:p>
                       <a:pPr algn="l"/>
@@ -7403,7 +7169,7 @@
                 </a:tc>
                 <a:tc>
                   <a:txBody>
-                    <a:bodyPr wrap="square"/>
+                    <a:bodyPr/>
                     <a:lstStyle/>
                     <a:p>
                       <a:pPr algn="l"/>
@@ -7426,7 +7192,7 @@
                 </a:tc>
                 <a:tc>
                   <a:txBody>
-                    <a:bodyPr wrap="square"/>
+                    <a:bodyPr/>
                     <a:lstStyle/>
                     <a:p>
                       <a:pPr algn="l"/>
@@ -7449,7 +7215,7 @@
                 </a:tc>
                 <a:tc>
                   <a:txBody>
-                    <a:bodyPr wrap="square"/>
+                    <a:bodyPr/>
                     <a:lstStyle/>
                     <a:p>
                       <a:pPr algn="l"/>
@@ -7472,7 +7238,7 @@
                 </a:tc>
                 <a:tc>
                   <a:txBody>
-                    <a:bodyPr wrap="square"/>
+                    <a:bodyPr/>
                     <a:lstStyle/>
                     <a:p>
                       <a:pPr algn="l"/>
@@ -7497,7 +7263,7 @@
               <a:tr h="399010">
                 <a:tc>
                   <a:txBody>
-                    <a:bodyPr wrap="square"/>
+                    <a:bodyPr/>
                     <a:lstStyle/>
                     <a:p>
                       <a:pPr algn="l"/>
@@ -7520,18 +7286,18 @@
                 </a:tc>
                 <a:tc>
                   <a:txBody>
-                    <a:bodyPr wrap="square"/>
-                    <a:lstStyle/>
-                    <a:p>
-                      <a:pPr algn="l"/>
-                      <a:r>
-                        <a:rPr sz="1000" b="0">
-                          <a:solidFill>
-                            <a:srgbClr val="1D1B43"/>
-                          </a:solidFill>
-                          <a:latin typeface="Calibri"/>
-                        </a:rPr>
-                        <a:t>10</a:t>
+                    <a:bodyPr/>
+                    <a:lstStyle/>
+                    <a:p>
+                      <a:pPr algn="l"/>
+                      <a:r>
+                        <a:rPr sz="1000" b="0">
+                          <a:solidFill>
+                            <a:srgbClr val="1D1B43"/>
+                          </a:solidFill>
+                          <a:latin typeface="Calibri"/>
+                        </a:rPr>
+                        <a:t>9</a:t>
                       </a:r>
                     </a:p>
                   </a:txBody>
@@ -7543,18 +7309,18 @@
                 </a:tc>
                 <a:tc>
                   <a:txBody>
-                    <a:bodyPr wrap="square"/>
-                    <a:lstStyle/>
-                    <a:p>
-                      <a:pPr algn="l"/>
-                      <a:r>
-                        <a:rPr sz="1000" b="0">
-                          <a:solidFill>
-                            <a:srgbClr val="1D1B43"/>
-                          </a:solidFill>
-                          <a:latin typeface="Calibri"/>
-                        </a:rPr>
-                        <a:t>10</a:t>
+                    <a:bodyPr/>
+                    <a:lstStyle/>
+                    <a:p>
+                      <a:pPr algn="l"/>
+                      <a:r>
+                        <a:rPr sz="1000" b="0">
+                          <a:solidFill>
+                            <a:srgbClr val="1D1B43"/>
+                          </a:solidFill>
+                          <a:latin typeface="Calibri"/>
+                        </a:rPr>
+                        <a:t>9</a:t>
                       </a:r>
                     </a:p>
                   </a:txBody>
@@ -7566,7 +7332,7 @@
                 </a:tc>
                 <a:tc>
                   <a:txBody>
-                    <a:bodyPr wrap="square"/>
+                    <a:bodyPr/>
                     <a:lstStyle/>
                     <a:p>
                       <a:pPr algn="l"/>
@@ -7589,7 +7355,7 @@
                 </a:tc>
                 <a:tc>
                   <a:txBody>
-                    <a:bodyPr wrap="square"/>
+                    <a:bodyPr/>
                     <a:lstStyle/>
                     <a:p>
                       <a:pPr algn="l"/>
@@ -7612,7 +7378,7 @@
                 </a:tc>
                 <a:tc>
                   <a:txBody>
-                    <a:bodyPr wrap="square"/>
+                    <a:bodyPr/>
                     <a:lstStyle/>
                     <a:p>
                       <a:pPr algn="l"/>
@@ -7637,7 +7403,7 @@
               <a:tr h="399010">
                 <a:tc>
                   <a:txBody>
-                    <a:bodyPr wrap="square"/>
+                    <a:bodyPr/>
                     <a:lstStyle/>
                     <a:p>
                       <a:pPr algn="l"/>
@@ -7660,7 +7426,7 @@
                 </a:tc>
                 <a:tc>
                   <a:txBody>
-                    <a:bodyPr wrap="square"/>
+                    <a:bodyPr/>
                     <a:lstStyle/>
                     <a:p>
                       <a:pPr algn="l"/>
@@ -7683,7 +7449,7 @@
                 </a:tc>
                 <a:tc>
                   <a:txBody>
-                    <a:bodyPr wrap="square"/>
+                    <a:bodyPr/>
                     <a:lstStyle/>
                     <a:p>
                       <a:pPr algn="l"/>
@@ -7706,7 +7472,7 @@
                 </a:tc>
                 <a:tc>
                   <a:txBody>
-                    <a:bodyPr wrap="square"/>
+                    <a:bodyPr/>
                     <a:lstStyle/>
                     <a:p>
                       <a:pPr algn="l"/>
@@ -7729,7 +7495,7 @@
                 </a:tc>
                 <a:tc>
                   <a:txBody>
-                    <a:bodyPr wrap="square"/>
+                    <a:bodyPr/>
                     <a:lstStyle/>
                     <a:p>
                       <a:pPr algn="l"/>
@@ -7752,7 +7518,7 @@
                 </a:tc>
                 <a:tc>
                   <a:txBody>
-                    <a:bodyPr wrap="square"/>
+                    <a:bodyPr/>
                     <a:lstStyle/>
                     <a:p>
                       <a:pPr algn="l"/>
@@ -7777,7 +7543,7 @@
               <a:tr h="399010">
                 <a:tc>
                   <a:txBody>
-                    <a:bodyPr wrap="square"/>
+                    <a:bodyPr/>
                     <a:lstStyle/>
                     <a:p>
                       <a:pPr algn="l"/>
@@ -7800,18 +7566,18 @@
                 </a:tc>
                 <a:tc>
                   <a:txBody>
-                    <a:bodyPr wrap="square"/>
-                    <a:lstStyle/>
-                    <a:p>
-                      <a:pPr algn="l"/>
-                      <a:r>
-                        <a:rPr sz="1000" b="0">
-                          <a:solidFill>
-                            <a:srgbClr val="1D1B43"/>
-                          </a:solidFill>
-                          <a:latin typeface="Calibri"/>
-                        </a:rPr>
-                        <a:t>8</a:t>
+                    <a:bodyPr/>
+                    <a:lstStyle/>
+                    <a:p>
+                      <a:pPr algn="l"/>
+                      <a:r>
+                        <a:rPr sz="1000" b="0">
+                          <a:solidFill>
+                            <a:srgbClr val="1D1B43"/>
+                          </a:solidFill>
+                          <a:latin typeface="Calibri"/>
+                        </a:rPr>
+                        <a:t>7</a:t>
                       </a:r>
                     </a:p>
                   </a:txBody>
@@ -7823,18 +7589,18 @@
                 </a:tc>
                 <a:tc>
                   <a:txBody>
-                    <a:bodyPr wrap="square"/>
-                    <a:lstStyle/>
-                    <a:p>
-                      <a:pPr algn="l"/>
-                      <a:r>
-                        <a:rPr sz="1000" b="0">
-                          <a:solidFill>
-                            <a:srgbClr val="1D1B43"/>
-                          </a:solidFill>
-                          <a:latin typeface="Calibri"/>
-                        </a:rPr>
-                        <a:t>5</a:t>
+                    <a:bodyPr/>
+                    <a:lstStyle/>
+                    <a:p>
+                      <a:pPr algn="l"/>
+                      <a:r>
+                        <a:rPr sz="1000" b="0">
+                          <a:solidFill>
+                            <a:srgbClr val="1D1B43"/>
+                          </a:solidFill>
+                          <a:latin typeface="Calibri"/>
+                        </a:rPr>
+                        <a:t>6</a:t>
                       </a:r>
                     </a:p>
                   </a:txBody>
@@ -7846,18 +7612,18 @@
                 </a:tc>
                 <a:tc>
                   <a:txBody>
-                    <a:bodyPr wrap="square"/>
-                    <a:lstStyle/>
-                    <a:p>
-                      <a:pPr algn="l"/>
-                      <a:r>
-                        <a:rPr sz="1000" b="0">
-                          <a:solidFill>
-                            <a:srgbClr val="1D1B43"/>
-                          </a:solidFill>
-                          <a:latin typeface="Calibri"/>
-                        </a:rPr>
-                        <a:t>3</a:t>
+                    <a:bodyPr/>
+                    <a:lstStyle/>
+                    <a:p>
+                      <a:pPr algn="l"/>
+                      <a:r>
+                        <a:rPr sz="1000" b="0">
+                          <a:solidFill>
+                            <a:srgbClr val="1D1B43"/>
+                          </a:solidFill>
+                          <a:latin typeface="Calibri"/>
+                        </a:rPr>
+                        <a:t>1</a:t>
                       </a:r>
                     </a:p>
                   </a:txBody>
@@ -7869,18 +7635,18 @@
                 </a:tc>
                 <a:tc>
                   <a:txBody>
-                    <a:bodyPr wrap="square"/>
-                    <a:lstStyle/>
-                    <a:p>
-                      <a:pPr algn="l"/>
-                      <a:r>
-                        <a:rPr sz="1000" b="0">
-                          <a:solidFill>
-                            <a:srgbClr val="1D1B43"/>
-                          </a:solidFill>
-                          <a:latin typeface="Calibri"/>
-                        </a:rPr>
-                        <a:t>62.5%</a:t>
+                    <a:bodyPr/>
+                    <a:lstStyle/>
+                    <a:p>
+                      <a:pPr algn="l"/>
+                      <a:r>
+                        <a:rPr sz="1000" b="0">
+                          <a:solidFill>
+                            <a:srgbClr val="1D1B43"/>
+                          </a:solidFill>
+                          <a:latin typeface="Calibri"/>
+                        </a:rPr>
+                        <a:t>85.7%</a:t>
                       </a:r>
                     </a:p>
                   </a:txBody>
@@ -7892,18 +7658,18 @@
                 </a:tc>
                 <a:tc>
                   <a:txBody>
-                    <a:bodyPr wrap="square"/>
-                    <a:lstStyle/>
-                    <a:p>
-                      <a:pPr algn="l"/>
-                      <a:r>
-                        <a:rPr sz="1000" b="0">
-                          <a:solidFill>
-                            <a:srgbClr val="1D1B43"/>
-                          </a:solidFill>
-                          <a:latin typeface="Calibri"/>
-                        </a:rPr>
-                        <a:t>Atencao</a:t>
+                    <a:bodyPr/>
+                    <a:lstStyle/>
+                    <a:p>
+                      <a:pPr algn="l"/>
+                      <a:r>
+                        <a:rPr sz="1000" b="0">
+                          <a:solidFill>
+                            <a:srgbClr val="1D1B43"/>
+                          </a:solidFill>
+                          <a:latin typeface="Calibri"/>
+                        </a:rPr>
+                        <a:t>Regular</a:t>
                       </a:r>
                     </a:p>
                   </a:txBody>
@@ -7917,7 +7683,7 @@
               <a:tr h="399010">
                 <a:tc>
                   <a:txBody>
-                    <a:bodyPr wrap="square"/>
+                    <a:bodyPr/>
                     <a:lstStyle/>
                     <a:p>
                       <a:pPr algn="l"/>
@@ -7940,7 +7706,7 @@
                 </a:tc>
                 <a:tc>
                   <a:txBody>
-                    <a:bodyPr wrap="square"/>
+                    <a:bodyPr/>
                     <a:lstStyle/>
                     <a:p>
                       <a:pPr algn="l"/>
@@ -7963,7 +7729,7 @@
                 </a:tc>
                 <a:tc>
                   <a:txBody>
-                    <a:bodyPr wrap="square"/>
+                    <a:bodyPr/>
                     <a:lstStyle/>
                     <a:p>
                       <a:pPr algn="l"/>
@@ -7986,7 +7752,7 @@
                 </a:tc>
                 <a:tc>
                   <a:txBody>
-                    <a:bodyPr wrap="square"/>
+                    <a:bodyPr/>
                     <a:lstStyle/>
                     <a:p>
                       <a:pPr algn="l"/>
@@ -8009,7 +7775,7 @@
                 </a:tc>
                 <a:tc>
                   <a:txBody>
-                    <a:bodyPr wrap="square"/>
+                    <a:bodyPr/>
                     <a:lstStyle/>
                     <a:p>
                       <a:pPr algn="l"/>
@@ -8032,7 +7798,7 @@
                 </a:tc>
                 <a:tc>
                   <a:txBody>
-                    <a:bodyPr wrap="square"/>
+                    <a:bodyPr/>
                     <a:lstStyle/>
                     <a:p>
                       <a:pPr algn="l"/>
@@ -8057,7 +7823,7 @@
               <a:tr h="399010">
                 <a:tc>
                   <a:txBody>
-                    <a:bodyPr wrap="square"/>
+                    <a:bodyPr/>
                     <a:lstStyle/>
                     <a:p>
                       <a:pPr algn="l"/>
@@ -8080,7 +7846,7 @@
                 </a:tc>
                 <a:tc>
                   <a:txBody>
-                    <a:bodyPr wrap="square"/>
+                    <a:bodyPr/>
                     <a:lstStyle/>
                     <a:p>
                       <a:pPr algn="l"/>
@@ -8103,7 +7869,7 @@
                 </a:tc>
                 <a:tc>
                   <a:txBody>
-                    <a:bodyPr wrap="square"/>
+                    <a:bodyPr/>
                     <a:lstStyle/>
                     <a:p>
                       <a:pPr algn="l"/>
@@ -8126,7 +7892,7 @@
                 </a:tc>
                 <a:tc>
                   <a:txBody>
-                    <a:bodyPr wrap="square"/>
+                    <a:bodyPr/>
                     <a:lstStyle/>
                     <a:p>
                       <a:pPr algn="l"/>
@@ -8149,7 +7915,7 @@
                 </a:tc>
                 <a:tc>
                   <a:txBody>
-                    <a:bodyPr wrap="square"/>
+                    <a:bodyPr/>
                     <a:lstStyle/>
                     <a:p>
                       <a:pPr algn="l"/>
@@ -8172,7 +7938,7 @@
                 </a:tc>
                 <a:tc>
                   <a:txBody>
-                    <a:bodyPr wrap="square"/>
+                    <a:bodyPr/>
                     <a:lstStyle/>
                     <a:p>
                       <a:pPr algn="l"/>
@@ -8197,7 +7963,7 @@
               <a:tr h="399010">
                 <a:tc>
                   <a:txBody>
-                    <a:bodyPr wrap="square"/>
+                    <a:bodyPr/>
                     <a:lstStyle/>
                     <a:p>
                       <a:pPr algn="l"/>
@@ -8220,7 +7986,7 @@
                 </a:tc>
                 <a:tc>
                   <a:txBody>
-                    <a:bodyPr wrap="square"/>
+                    <a:bodyPr/>
                     <a:lstStyle/>
                     <a:p>
                       <a:pPr algn="l"/>
@@ -8243,7 +8009,7 @@
                 </a:tc>
                 <a:tc>
                   <a:txBody>
-                    <a:bodyPr wrap="square"/>
+                    <a:bodyPr/>
                     <a:lstStyle/>
                     <a:p>
                       <a:pPr algn="l"/>
@@ -8266,7 +8032,7 @@
                 </a:tc>
                 <a:tc>
                   <a:txBody>
-                    <a:bodyPr wrap="square"/>
+                    <a:bodyPr/>
                     <a:lstStyle/>
                     <a:p>
                       <a:pPr algn="l"/>
@@ -8289,7 +8055,7 @@
                 </a:tc>
                 <a:tc>
                   <a:txBody>
-                    <a:bodyPr wrap="square"/>
+                    <a:bodyPr/>
                     <a:lstStyle/>
                     <a:p>
                       <a:pPr algn="l"/>
@@ -8312,7 +8078,7 @@
                 </a:tc>
                 <a:tc>
                   <a:txBody>
-                    <a:bodyPr wrap="square"/>
+                    <a:bodyPr/>
                     <a:lstStyle/>
                     <a:p>
                       <a:pPr algn="l"/>
@@ -8496,7 +8262,7 @@
               <a:tr h="292608">
                 <a:tc>
                   <a:txBody>
-                    <a:bodyPr wrap="square"/>
+                    <a:bodyPr/>
                     <a:lstStyle/>
                     <a:p>
                       <a:pPr algn="ctr"/>
@@ -8519,7 +8285,7 @@
                 </a:tc>
                 <a:tc>
                   <a:txBody>
-                    <a:bodyPr wrap="square"/>
+                    <a:bodyPr/>
                     <a:lstStyle/>
                     <a:p>
                       <a:pPr algn="ctr"/>
@@ -8542,7 +8308,7 @@
                 </a:tc>
                 <a:tc>
                   <a:txBody>
-                    <a:bodyPr wrap="square"/>
+                    <a:bodyPr/>
                     <a:lstStyle/>
                     <a:p>
                       <a:pPr algn="ctr"/>
@@ -8565,7 +8331,7 @@
                 </a:tc>
                 <a:tc>
                   <a:txBody>
-                    <a:bodyPr wrap="square"/>
+                    <a:bodyPr/>
                     <a:lstStyle/>
                     <a:p>
                       <a:pPr algn="ctr"/>
@@ -8588,7 +8354,7 @@
                 </a:tc>
                 <a:tc>
                   <a:txBody>
-                    <a:bodyPr wrap="square"/>
+                    <a:bodyPr/>
                     <a:lstStyle/>
                     <a:p>
                       <a:pPr algn="ctr"/>
@@ -8611,7 +8377,7 @@
                 </a:tc>
                 <a:tc>
                   <a:txBody>
-                    <a:bodyPr wrap="square"/>
+                    <a:bodyPr/>
                     <a:lstStyle/>
                     <a:p>
                       <a:pPr algn="ctr"/>
@@ -8634,7 +8400,7 @@
                 </a:tc>
                 <a:tc>
                   <a:txBody>
-                    <a:bodyPr wrap="square"/>
+                    <a:bodyPr/>
                     <a:lstStyle/>
                     <a:p>
                       <a:pPr algn="ctr"/>
@@ -8659,7 +8425,7 @@
               <a:tr h="292608">
                 <a:tc>
                   <a:txBody>
-                    <a:bodyPr wrap="square"/>
+                    <a:bodyPr/>
                     <a:lstStyle/>
                     <a:p>
                       <a:pPr algn="l"/>
@@ -8682,7 +8448,7 @@
                 </a:tc>
                 <a:tc>
                   <a:txBody>
-                    <a:bodyPr wrap="square"/>
+                    <a:bodyPr/>
                     <a:lstStyle/>
                     <a:p>
                       <a:pPr algn="l"/>
@@ -8705,18 +8471,18 @@
                 </a:tc>
                 <a:tc>
                   <a:txBody>
-                    <a:bodyPr wrap="square"/>
-                    <a:lstStyle/>
-                    <a:p>
-                      <a:pPr algn="l"/>
-                      <a:r>
-                        <a:rPr sz="1000" b="0">
-                          <a:solidFill>
-                            <a:srgbClr val="1D1B43"/>
-                          </a:solidFill>
-                          <a:latin typeface="Calibri"/>
-                        </a:rPr>
-                        <a:t>44</a:t>
+                    <a:bodyPr/>
+                    <a:lstStyle/>
+                    <a:p>
+                      <a:pPr algn="l"/>
+                      <a:r>
+                        <a:rPr sz="1000" b="0">
+                          <a:solidFill>
+                            <a:srgbClr val="1D1B43"/>
+                          </a:solidFill>
+                          <a:latin typeface="Calibri"/>
+                        </a:rPr>
+                        <a:t>37</a:t>
                       </a:r>
                     </a:p>
                   </a:txBody>
@@ -8728,18 +8494,18 @@
                 </a:tc>
                 <a:tc>
                   <a:txBody>
-                    <a:bodyPr wrap="square"/>
-                    <a:lstStyle/>
-                    <a:p>
-                      <a:pPr algn="l"/>
-                      <a:r>
-                        <a:rPr sz="1000" b="0">
-                          <a:solidFill>
-                            <a:srgbClr val="1D1B43"/>
-                          </a:solidFill>
-                          <a:latin typeface="Calibri"/>
-                        </a:rPr>
-                        <a:t>44</a:t>
+                    <a:bodyPr/>
+                    <a:lstStyle/>
+                    <a:p>
+                      <a:pPr algn="l"/>
+                      <a:r>
+                        <a:rPr sz="1000" b="0">
+                          <a:solidFill>
+                            <a:srgbClr val="1D1B43"/>
+                          </a:solidFill>
+                          <a:latin typeface="Calibri"/>
+                        </a:rPr>
+                        <a:t>37</a:t>
                       </a:r>
                     </a:p>
                   </a:txBody>
@@ -8751,7 +8517,7 @@
                 </a:tc>
                 <a:tc>
                   <a:txBody>
-                    <a:bodyPr wrap="square"/>
+                    <a:bodyPr/>
                     <a:lstStyle/>
                     <a:p>
                       <a:pPr algn="l"/>
@@ -8774,7 +8540,7 @@
                 </a:tc>
                 <a:tc>
                   <a:txBody>
-                    <a:bodyPr wrap="square"/>
+                    <a:bodyPr/>
                     <a:lstStyle/>
                     <a:p>
                       <a:pPr algn="l"/>
@@ -8797,7 +8563,7 @@
                 </a:tc>
                 <a:tc>
                   <a:txBody>
-                    <a:bodyPr wrap="square"/>
+                    <a:bodyPr/>
                     <a:lstStyle/>
                     <a:p>
                       <a:pPr algn="l"/>
@@ -8822,7 +8588,7 @@
               <a:tr h="292608">
                 <a:tc>
                   <a:txBody>
-                    <a:bodyPr wrap="square"/>
+                    <a:bodyPr/>
                     <a:lstStyle/>
                     <a:p>
                       <a:pPr algn="l"/>
@@ -8845,7 +8611,7 @@
                 </a:tc>
                 <a:tc>
                   <a:txBody>
-                    <a:bodyPr wrap="square"/>
+                    <a:bodyPr/>
                     <a:lstStyle/>
                     <a:p>
                       <a:pPr algn="l"/>
@@ -8868,7 +8634,7 @@
                 </a:tc>
                 <a:tc>
                   <a:txBody>
-                    <a:bodyPr wrap="square"/>
+                    <a:bodyPr/>
                     <a:lstStyle/>
                     <a:p>
                       <a:pPr algn="l"/>
@@ -8891,7 +8657,7 @@
                 </a:tc>
                 <a:tc>
                   <a:txBody>
-                    <a:bodyPr wrap="square"/>
+                    <a:bodyPr/>
                     <a:lstStyle/>
                     <a:p>
                       <a:pPr algn="l"/>
@@ -8914,7 +8680,7 @@
                 </a:tc>
                 <a:tc>
                   <a:txBody>
-                    <a:bodyPr wrap="square"/>
+                    <a:bodyPr/>
                     <a:lstStyle/>
                     <a:p>
                       <a:pPr algn="l"/>
@@ -8937,7 +8703,7 @@
                 </a:tc>
                 <a:tc>
                   <a:txBody>
-                    <a:bodyPr wrap="square"/>
+                    <a:bodyPr/>
                     <a:lstStyle/>
                     <a:p>
                       <a:pPr algn="l"/>
@@ -8960,7 +8726,7 @@
                 </a:tc>
                 <a:tc>
                   <a:txBody>
-                    <a:bodyPr wrap="square"/>
+                    <a:bodyPr/>
                     <a:lstStyle/>
                     <a:p>
                       <a:pPr algn="l"/>
@@ -8985,7 +8751,7 @@
               <a:tr h="292608">
                 <a:tc>
                   <a:txBody>
-                    <a:bodyPr wrap="square"/>
+                    <a:bodyPr/>
                     <a:lstStyle/>
                     <a:p>
                       <a:pPr algn="l"/>
@@ -9008,7 +8774,7 @@
                 </a:tc>
                 <a:tc>
                   <a:txBody>
-                    <a:bodyPr wrap="square"/>
+                    <a:bodyPr/>
                     <a:lstStyle/>
                     <a:p>
                       <a:pPr algn="l"/>
@@ -9031,7 +8797,7 @@
                 </a:tc>
                 <a:tc>
                   <a:txBody>
-                    <a:bodyPr wrap="square"/>
+                    <a:bodyPr/>
                     <a:lstStyle/>
                     <a:p>
                       <a:pPr algn="l"/>
@@ -9054,7 +8820,7 @@
                 </a:tc>
                 <a:tc>
                   <a:txBody>
-                    <a:bodyPr wrap="square"/>
+                    <a:bodyPr/>
                     <a:lstStyle/>
                     <a:p>
                       <a:pPr algn="l"/>
@@ -9077,7 +8843,7 @@
                 </a:tc>
                 <a:tc>
                   <a:txBody>
-                    <a:bodyPr wrap="square"/>
+                    <a:bodyPr/>
                     <a:lstStyle/>
                     <a:p>
                       <a:pPr algn="l"/>
@@ -9100,7 +8866,7 @@
                 </a:tc>
                 <a:tc>
                   <a:txBody>
-                    <a:bodyPr wrap="square"/>
+                    <a:bodyPr/>
                     <a:lstStyle/>
                     <a:p>
                       <a:pPr algn="l"/>
@@ -9123,7 +8889,7 @@
                 </a:tc>
                 <a:tc>
                   <a:txBody>
-                    <a:bodyPr wrap="square"/>
+                    <a:bodyPr/>
                     <a:lstStyle/>
                     <a:p>
                       <a:pPr algn="l"/>
@@ -9148,7 +8914,7 @@
               <a:tr h="292608">
                 <a:tc>
                   <a:txBody>
-                    <a:bodyPr wrap="square"/>
+                    <a:bodyPr/>
                     <a:lstStyle/>
                     <a:p>
                       <a:pPr algn="l"/>
@@ -9171,18 +8937,18 @@
                 </a:tc>
                 <a:tc>
                   <a:txBody>
-                    <a:bodyPr wrap="square"/>
-                    <a:lstStyle/>
-                    <a:p>
-                      <a:pPr algn="l"/>
-                      <a:r>
-                        <a:rPr sz="1000" b="0">
-                          <a:solidFill>
-                            <a:srgbClr val="1D1B43"/>
-                          </a:solidFill>
-                          <a:latin typeface="Calibri"/>
-                        </a:rPr>
-                        <a:t>NORTEL SUPRIMENTOS I - SERRA / ES</a:t>
+                    <a:bodyPr/>
+                    <a:lstStyle/>
+                    <a:p>
+                      <a:pPr algn="l"/>
+                      <a:r>
+                        <a:rPr sz="1000" b="0">
+                          <a:solidFill>
+                            <a:srgbClr val="1D1B43"/>
+                          </a:solidFill>
+                          <a:latin typeface="Calibri"/>
+                        </a:rPr>
+                        <a:t>FITASSUL COMERCIO DI - ITAJUBA / MG</a:t>
                       </a:r>
                     </a:p>
                   </a:txBody>
@@ -9194,7 +8960,7 @@
                 </a:tc>
                 <a:tc>
                   <a:txBody>
-                    <a:bodyPr wrap="square"/>
+                    <a:bodyPr/>
                     <a:lstStyle/>
                     <a:p>
                       <a:pPr algn="l"/>
@@ -9217,7 +8983,7 @@
                 </a:tc>
                 <a:tc>
                   <a:txBody>
-                    <a:bodyPr wrap="square"/>
+                    <a:bodyPr/>
                     <a:lstStyle/>
                     <a:p>
                       <a:pPr algn="l"/>
@@ -9240,7 +9006,7 @@
                 </a:tc>
                 <a:tc>
                   <a:txBody>
-                    <a:bodyPr wrap="square"/>
+                    <a:bodyPr/>
                     <a:lstStyle/>
                     <a:p>
                       <a:pPr algn="l"/>
@@ -9263,7 +9029,7 @@
                 </a:tc>
                 <a:tc>
                   <a:txBody>
-                    <a:bodyPr wrap="square"/>
+                    <a:bodyPr/>
                     <a:lstStyle/>
                     <a:p>
                       <a:pPr algn="l"/>
@@ -9286,7 +9052,7 @@
                 </a:tc>
                 <a:tc>
                   <a:txBody>
-                    <a:bodyPr wrap="square"/>
+                    <a:bodyPr/>
                     <a:lstStyle/>
                     <a:p>
                       <a:pPr algn="l"/>
@@ -9311,7 +9077,7 @@
               <a:tr h="292608">
                 <a:tc>
                   <a:txBody>
-                    <a:bodyPr wrap="square"/>
+                    <a:bodyPr/>
                     <a:lstStyle/>
                     <a:p>
                       <a:pPr algn="l"/>
@@ -9334,7 +9100,7 @@
                 </a:tc>
                 <a:tc>
                   <a:txBody>
-                    <a:bodyPr wrap="square"/>
+                    <a:bodyPr/>
                     <a:lstStyle/>
                     <a:p>
                       <a:pPr algn="l"/>
@@ -9357,7 +9123,7 @@
                 </a:tc>
                 <a:tc>
                   <a:txBody>
-                    <a:bodyPr wrap="square"/>
+                    <a:bodyPr/>
                     <a:lstStyle/>
                     <a:p>
                       <a:pPr algn="l"/>
@@ -9380,7 +9146,7 @@
                 </a:tc>
                 <a:tc>
                   <a:txBody>
-                    <a:bodyPr wrap="square"/>
+                    <a:bodyPr/>
                     <a:lstStyle/>
                     <a:p>
                       <a:pPr algn="l"/>
@@ -9403,7 +9169,7 @@
                 </a:tc>
                 <a:tc>
                   <a:txBody>
-                    <a:bodyPr wrap="square"/>
+                    <a:bodyPr/>
                     <a:lstStyle/>
                     <a:p>
                       <a:pPr algn="l"/>
@@ -9426,7 +9192,7 @@
                 </a:tc>
                 <a:tc>
                   <a:txBody>
-                    <a:bodyPr wrap="square"/>
+                    <a:bodyPr/>
                     <a:lstStyle/>
                     <a:p>
                       <a:pPr algn="l"/>
@@ -9449,7 +9215,7 @@
                 </a:tc>
                 <a:tc>
                   <a:txBody>
-                    <a:bodyPr wrap="square"/>
+                    <a:bodyPr/>
                     <a:lstStyle/>
                     <a:p>
                       <a:pPr algn="l"/>
@@ -9474,7 +9240,7 @@
               <a:tr h="292608">
                 <a:tc>
                   <a:txBody>
-                    <a:bodyPr wrap="square"/>
+                    <a:bodyPr/>
                     <a:lstStyle/>
                     <a:p>
                       <a:pPr algn="l"/>
@@ -9497,18 +9263,18 @@
                 </a:tc>
                 <a:tc>
                   <a:txBody>
-                    <a:bodyPr wrap="square"/>
-                    <a:lstStyle/>
-                    <a:p>
-                      <a:pPr algn="l"/>
-                      <a:r>
-                        <a:rPr sz="1000" b="0">
-                          <a:solidFill>
-                            <a:srgbClr val="1D1B43"/>
-                          </a:solidFill>
-                          <a:latin typeface="Calibri"/>
-                        </a:rPr>
-                        <a:t>FITASSUL COMERCIO DI - ITAJUBA / MG</a:t>
+                    <a:bodyPr/>
+                    <a:lstStyle/>
+                    <a:p>
+                      <a:pPr algn="l"/>
+                      <a:r>
+                        <a:rPr sz="1000" b="0">
+                          <a:solidFill>
+                            <a:srgbClr val="1D1B43"/>
+                          </a:solidFill>
+                          <a:latin typeface="Calibri"/>
+                        </a:rPr>
+                        <a:t>NORTEL SUPRIMENTOS I - SERRA / ES</a:t>
                       </a:r>
                     </a:p>
                   </a:txBody>
@@ -9520,18 +9286,18 @@
                 </a:tc>
                 <a:tc>
                   <a:txBody>
-                    <a:bodyPr wrap="square"/>
-                    <a:lstStyle/>
-                    <a:p>
-                      <a:pPr algn="l"/>
-                      <a:r>
-                        <a:rPr sz="1000" b="0">
-                          <a:solidFill>
-                            <a:srgbClr val="1D1B43"/>
-                          </a:solidFill>
-                          <a:latin typeface="Calibri"/>
-                        </a:rPr>
-                        <a:t>14</a:t>
+                    <a:bodyPr/>
+                    <a:lstStyle/>
+                    <a:p>
+                      <a:pPr algn="l"/>
+                      <a:r>
+                        <a:rPr sz="1000" b="0">
+                          <a:solidFill>
+                            <a:srgbClr val="1D1B43"/>
+                          </a:solidFill>
+                          <a:latin typeface="Calibri"/>
+                        </a:rPr>
+                        <a:t>11</a:t>
                       </a:r>
                     </a:p>
                   </a:txBody>
@@ -9543,18 +9309,18 @@
                 </a:tc>
                 <a:tc>
                   <a:txBody>
-                    <a:bodyPr wrap="square"/>
-                    <a:lstStyle/>
-                    <a:p>
-                      <a:pPr algn="l"/>
-                      <a:r>
-                        <a:rPr sz="1000" b="0">
-                          <a:solidFill>
-                            <a:srgbClr val="1D1B43"/>
-                          </a:solidFill>
-                          <a:latin typeface="Calibri"/>
-                        </a:rPr>
-                        <a:t>14</a:t>
+                    <a:bodyPr/>
+                    <a:lstStyle/>
+                    <a:p>
+                      <a:pPr algn="l"/>
+                      <a:r>
+                        <a:rPr sz="1000" b="0">
+                          <a:solidFill>
+                            <a:srgbClr val="1D1B43"/>
+                          </a:solidFill>
+                          <a:latin typeface="Calibri"/>
+                        </a:rPr>
+                        <a:t>11</a:t>
                       </a:r>
                     </a:p>
                   </a:txBody>
@@ -9566,7 +9332,7 @@
                 </a:tc>
                 <a:tc>
                   <a:txBody>
-                    <a:bodyPr wrap="square"/>
+                    <a:bodyPr/>
                     <a:lstStyle/>
                     <a:p>
                       <a:pPr algn="l"/>
@@ -9589,7 +9355,7 @@
                 </a:tc>
                 <a:tc>
                   <a:txBody>
-                    <a:bodyPr wrap="square"/>
+                    <a:bodyPr/>
                     <a:lstStyle/>
                     <a:p>
                       <a:pPr algn="l"/>
@@ -9612,7 +9378,7 @@
                 </a:tc>
                 <a:tc>
                   <a:txBody>
-                    <a:bodyPr wrap="square"/>
+                    <a:bodyPr/>
                     <a:lstStyle/>
                     <a:p>
                       <a:pPr algn="l"/>
@@ -9637,7 +9403,7 @@
               <a:tr h="292608">
                 <a:tc>
                   <a:txBody>
-                    <a:bodyPr wrap="square"/>
+                    <a:bodyPr/>
                     <a:lstStyle/>
                     <a:p>
                       <a:pPr algn="l"/>
@@ -9660,7 +9426,7 @@
                 </a:tc>
                 <a:tc>
                   <a:txBody>
-                    <a:bodyPr wrap="square"/>
+                    <a:bodyPr/>
                     <a:lstStyle/>
                     <a:p>
                       <a:pPr algn="l"/>
@@ -9683,7 +9449,7 @@
                 </a:tc>
                 <a:tc>
                   <a:txBody>
-                    <a:bodyPr wrap="square"/>
+                    <a:bodyPr/>
                     <a:lstStyle/>
                     <a:p>
                       <a:pPr algn="l"/>
@@ -9706,7 +9472,7 @@
                 </a:tc>
                 <a:tc>
                   <a:txBody>
-                    <a:bodyPr wrap="square"/>
+                    <a:bodyPr/>
                     <a:lstStyle/>
                     <a:p>
                       <a:pPr algn="l"/>
@@ -9729,7 +9495,7 @@
                 </a:tc>
                 <a:tc>
                   <a:txBody>
-                    <a:bodyPr wrap="square"/>
+                    <a:bodyPr/>
                     <a:lstStyle/>
                     <a:p>
                       <a:pPr algn="l"/>
@@ -9752,7 +9518,7 @@
                 </a:tc>
                 <a:tc>
                   <a:txBody>
-                    <a:bodyPr wrap="square"/>
+                    <a:bodyPr/>
                     <a:lstStyle/>
                     <a:p>
                       <a:pPr algn="l"/>
@@ -9775,7 +9541,7 @@
                 </a:tc>
                 <a:tc>
                   <a:txBody>
-                    <a:bodyPr wrap="square"/>
+                    <a:bodyPr/>
                     <a:lstStyle/>
                     <a:p>
                       <a:pPr algn="l"/>
@@ -9800,7 +9566,7 @@
               <a:tr h="292608">
                 <a:tc>
                   <a:txBody>
-                    <a:bodyPr wrap="square"/>
+                    <a:bodyPr/>
                     <a:lstStyle/>
                     <a:p>
                       <a:pPr algn="l"/>
@@ -9823,7 +9589,7 @@
                 </a:tc>
                 <a:tc>
                   <a:txBody>
-                    <a:bodyPr wrap="square"/>
+                    <a:bodyPr/>
                     <a:lstStyle/>
                     <a:p>
                       <a:pPr algn="l"/>
@@ -9846,7 +9612,7 @@
                 </a:tc>
                 <a:tc>
                   <a:txBody>
-                    <a:bodyPr wrap="square"/>
+                    <a:bodyPr/>
                     <a:lstStyle/>
                     <a:p>
                       <a:pPr algn="l"/>
@@ -9869,7 +9635,7 @@
                 </a:tc>
                 <a:tc>
                   <a:txBody>
-                    <a:bodyPr wrap="square"/>
+                    <a:bodyPr/>
                     <a:lstStyle/>
                     <a:p>
                       <a:pPr algn="l"/>
@@ -9892,7 +9658,7 @@
                 </a:tc>
                 <a:tc>
                   <a:txBody>
-                    <a:bodyPr wrap="square"/>
+                    <a:bodyPr/>
                     <a:lstStyle/>
                     <a:p>
                       <a:pPr algn="l"/>
@@ -9915,7 +9681,7 @@
                 </a:tc>
                 <a:tc>
                   <a:txBody>
-                    <a:bodyPr wrap="square"/>
+                    <a:bodyPr/>
                     <a:lstStyle/>
                     <a:p>
                       <a:pPr algn="l"/>
@@ -9938,7 +9704,7 @@
                 </a:tc>
                 <a:tc>
                   <a:txBody>
-                    <a:bodyPr wrap="square"/>
+                    <a:bodyPr/>
                     <a:lstStyle/>
                     <a:p>
                       <a:pPr algn="l"/>
@@ -9963,7 +9729,7 @@
               <a:tr h="292608">
                 <a:tc>
                   <a:txBody>
-                    <a:bodyPr wrap="square"/>
+                    <a:bodyPr/>
                     <a:lstStyle/>
                     <a:p>
                       <a:pPr algn="l"/>
@@ -9986,7 +9752,7 @@
                 </a:tc>
                 <a:tc>
                   <a:txBody>
-                    <a:bodyPr wrap="square"/>
+                    <a:bodyPr/>
                     <a:lstStyle/>
                     <a:p>
                       <a:pPr algn="l"/>
@@ -10009,7 +9775,7 @@
                 </a:tc>
                 <a:tc>
                   <a:txBody>
-                    <a:bodyPr wrap="square"/>
+                    <a:bodyPr/>
                     <a:lstStyle/>
                     <a:p>
                       <a:pPr algn="l"/>
@@ -10032,7 +9798,7 @@
                 </a:tc>
                 <a:tc>
                   <a:txBody>
-                    <a:bodyPr wrap="square"/>
+                    <a:bodyPr/>
                     <a:lstStyle/>
                     <a:p>
                       <a:pPr algn="l"/>
@@ -10055,7 +9821,7 @@
                 </a:tc>
                 <a:tc>
                   <a:txBody>
-                    <a:bodyPr wrap="square"/>
+                    <a:bodyPr/>
                     <a:lstStyle/>
                     <a:p>
                       <a:pPr algn="l"/>
@@ -10078,7 +9844,7 @@
                 </a:tc>
                 <a:tc>
                   <a:txBody>
-                    <a:bodyPr wrap="square"/>
+                    <a:bodyPr/>
                     <a:lstStyle/>
                     <a:p>
                       <a:pPr algn="l"/>
@@ -10101,7 +9867,7 @@
                 </a:tc>
                 <a:tc>
                   <a:txBody>
-                    <a:bodyPr wrap="square"/>
+                    <a:bodyPr/>
                     <a:lstStyle/>
                     <a:p>
                       <a:pPr algn="l"/>
@@ -10126,7 +9892,7 @@
               <a:tr h="292608">
                 <a:tc>
                   <a:txBody>
-                    <a:bodyPr wrap="square"/>
+                    <a:bodyPr/>
                     <a:lstStyle/>
                     <a:p>
                       <a:pPr algn="l"/>
@@ -10149,7 +9915,7 @@
                 </a:tc>
                 <a:tc>
                   <a:txBody>
-                    <a:bodyPr wrap="square"/>
+                    <a:bodyPr/>
                     <a:lstStyle/>
                     <a:p>
                       <a:pPr algn="l"/>
@@ -10172,7 +9938,7 @@
                 </a:tc>
                 <a:tc>
                   <a:txBody>
-                    <a:bodyPr wrap="square"/>
+                    <a:bodyPr/>
                     <a:lstStyle/>
                     <a:p>
                       <a:pPr algn="l"/>
@@ -10195,7 +9961,7 @@
                 </a:tc>
                 <a:tc>
                   <a:txBody>
-                    <a:bodyPr wrap="square"/>
+                    <a:bodyPr/>
                     <a:lstStyle/>
                     <a:p>
                       <a:pPr algn="l"/>
@@ -10218,7 +9984,7 @@
                 </a:tc>
                 <a:tc>
                   <a:txBody>
-                    <a:bodyPr wrap="square"/>
+                    <a:bodyPr/>
                     <a:lstStyle/>
                     <a:p>
                       <a:pPr algn="l"/>
@@ -10241,7 +10007,7 @@
                 </a:tc>
                 <a:tc>
                   <a:txBody>
-                    <a:bodyPr wrap="square"/>
+                    <a:bodyPr/>
                     <a:lstStyle/>
                     <a:p>
                       <a:pPr algn="l"/>
@@ -10264,7 +10030,7 @@
                 </a:tc>
                 <a:tc>
                   <a:txBody>
-                    <a:bodyPr wrap="square"/>
+                    <a:bodyPr/>
                     <a:lstStyle/>
                     <a:p>
                       <a:pPr algn="l"/>
@@ -10289,7 +10055,7 @@
               <a:tr h="292608">
                 <a:tc>
                   <a:txBody>
-                    <a:bodyPr wrap="square"/>
+                    <a:bodyPr/>
                     <a:lstStyle/>
                     <a:p>
                       <a:pPr algn="l"/>
@@ -10312,7 +10078,7 @@
                 </a:tc>
                 <a:tc>
                   <a:txBody>
-                    <a:bodyPr wrap="square"/>
+                    <a:bodyPr/>
                     <a:lstStyle/>
                     <a:p>
                       <a:pPr algn="l"/>
@@ -10335,7 +10101,7 @@
                 </a:tc>
                 <a:tc>
                   <a:txBody>
-                    <a:bodyPr wrap="square"/>
+                    <a:bodyPr/>
                     <a:lstStyle/>
                     <a:p>
                       <a:pPr algn="l"/>
@@ -10358,7 +10124,7 @@
                 </a:tc>
                 <a:tc>
                   <a:txBody>
-                    <a:bodyPr wrap="square"/>
+                    <a:bodyPr/>
                     <a:lstStyle/>
                     <a:p>
                       <a:pPr algn="l"/>
@@ -10381,7 +10147,7 @@
                 </a:tc>
                 <a:tc>
                   <a:txBody>
-                    <a:bodyPr wrap="square"/>
+                    <a:bodyPr/>
                     <a:lstStyle/>
                     <a:p>
                       <a:pPr algn="l"/>
@@ -10404,7 +10170,7 @@
                 </a:tc>
                 <a:tc>
                   <a:txBody>
-                    <a:bodyPr wrap="square"/>
+                    <a:bodyPr/>
                     <a:lstStyle/>
                     <a:p>
                       <a:pPr algn="l"/>
@@ -10427,7 +10193,7 @@
                 </a:tc>
                 <a:tc>
                   <a:txBody>
-                    <a:bodyPr wrap="square"/>
+                    <a:bodyPr/>
                     <a:lstStyle/>
                     <a:p>
                       <a:pPr algn="l"/>
@@ -10452,7 +10218,7 @@
               <a:tr h="292608">
                 <a:tc>
                   <a:txBody>
-                    <a:bodyPr wrap="square"/>
+                    <a:bodyPr/>
                     <a:lstStyle/>
                     <a:p>
                       <a:pPr algn="l"/>
@@ -10475,7 +10241,7 @@
                 </a:tc>
                 <a:tc>
                   <a:txBody>
-                    <a:bodyPr wrap="square"/>
+                    <a:bodyPr/>
                     <a:lstStyle/>
                     <a:p>
                       <a:pPr algn="l"/>
@@ -10498,7 +10264,7 @@
                 </a:tc>
                 <a:tc>
                   <a:txBody>
-                    <a:bodyPr wrap="square"/>
+                    <a:bodyPr/>
                     <a:lstStyle/>
                     <a:p>
                       <a:pPr algn="l"/>
@@ -10521,7 +10287,7 @@
                 </a:tc>
                 <a:tc>
                   <a:txBody>
-                    <a:bodyPr wrap="square"/>
+                    <a:bodyPr/>
                     <a:lstStyle/>
                     <a:p>
                       <a:pPr algn="l"/>
@@ -10544,7 +10310,7 @@
                 </a:tc>
                 <a:tc>
                   <a:txBody>
-                    <a:bodyPr wrap="square"/>
+                    <a:bodyPr/>
                     <a:lstStyle/>
                     <a:p>
                       <a:pPr algn="l"/>
@@ -10567,7 +10333,7 @@
                 </a:tc>
                 <a:tc>
                   <a:txBody>
-                    <a:bodyPr wrap="square"/>
+                    <a:bodyPr/>
                     <a:lstStyle/>
                     <a:p>
                       <a:pPr algn="l"/>
@@ -10590,7 +10356,7 @@
                 </a:tc>
                 <a:tc>
                   <a:txBody>
-                    <a:bodyPr wrap="square"/>
+                    <a:bodyPr/>
                     <a:lstStyle/>
                     <a:p>
                       <a:pPr algn="l"/>
@@ -10615,7 +10381,7 @@
               <a:tr h="292608">
                 <a:tc>
                   <a:txBody>
-                    <a:bodyPr wrap="square"/>
+                    <a:bodyPr/>
                     <a:lstStyle/>
                     <a:p>
                       <a:pPr algn="l"/>
@@ -10638,7 +10404,7 @@
                 </a:tc>
                 <a:tc>
                   <a:txBody>
-                    <a:bodyPr wrap="square"/>
+                    <a:bodyPr/>
                     <a:lstStyle/>
                     <a:p>
                       <a:pPr algn="l"/>
@@ -10661,7 +10427,7 @@
                 </a:tc>
                 <a:tc>
                   <a:txBody>
-                    <a:bodyPr wrap="square"/>
+                    <a:bodyPr/>
                     <a:lstStyle/>
                     <a:p>
                       <a:pPr algn="l"/>
@@ -10684,7 +10450,7 @@
                 </a:tc>
                 <a:tc>
                   <a:txBody>
-                    <a:bodyPr wrap="square"/>
+                    <a:bodyPr/>
                     <a:lstStyle/>
                     <a:p>
                       <a:pPr algn="l"/>
@@ -10707,7 +10473,7 @@
                 </a:tc>
                 <a:tc>
                   <a:txBody>
-                    <a:bodyPr wrap="square"/>
+                    <a:bodyPr/>
                     <a:lstStyle/>
                     <a:p>
                       <a:pPr algn="l"/>
@@ -10730,7 +10496,7 @@
                 </a:tc>
                 <a:tc>
                   <a:txBody>
-                    <a:bodyPr wrap="square"/>
+                    <a:bodyPr/>
                     <a:lstStyle/>
                     <a:p>
                       <a:pPr algn="l"/>
@@ -10753,7 +10519,7 @@
                 </a:tc>
                 <a:tc>
                   <a:txBody>
-                    <a:bodyPr wrap="square"/>
+                    <a:bodyPr/>
                     <a:lstStyle/>
                     <a:p>
                       <a:pPr algn="l"/>
@@ -10778,7 +10544,7 @@
               <a:tr h="292608">
                 <a:tc>
                   <a:txBody>
-                    <a:bodyPr wrap="square"/>
+                    <a:bodyPr/>
                     <a:lstStyle/>
                     <a:p>
                       <a:pPr algn="l"/>
@@ -10801,7 +10567,7 @@
                 </a:tc>
                 <a:tc>
                   <a:txBody>
-                    <a:bodyPr wrap="square"/>
+                    <a:bodyPr/>
                     <a:lstStyle/>
                     <a:p>
                       <a:pPr algn="l"/>
@@ -10824,7 +10590,7 @@
                 </a:tc>
                 <a:tc>
                   <a:txBody>
-                    <a:bodyPr wrap="square"/>
+                    <a:bodyPr/>
                     <a:lstStyle/>
                     <a:p>
                       <a:pPr algn="l"/>
@@ -10847,7 +10613,7 @@
                 </a:tc>
                 <a:tc>
                   <a:txBody>
-                    <a:bodyPr wrap="square"/>
+                    <a:bodyPr/>
                     <a:lstStyle/>
                     <a:p>
                       <a:pPr algn="l"/>
@@ -10870,7 +10636,7 @@
                 </a:tc>
                 <a:tc>
                   <a:txBody>
-                    <a:bodyPr wrap="square"/>
+                    <a:bodyPr/>
                     <a:lstStyle/>
                     <a:p>
                       <a:pPr algn="l"/>
@@ -10893,7 +10659,7 @@
                 </a:tc>
                 <a:tc>
                   <a:txBody>
-                    <a:bodyPr wrap="square"/>
+                    <a:bodyPr/>
                     <a:lstStyle/>
                     <a:p>
                       <a:pPr algn="l"/>
@@ -10916,7 +10682,7 @@
                 </a:tc>
                 <a:tc>
                   <a:txBody>
-                    <a:bodyPr wrap="square"/>
+                    <a:bodyPr/>
                     <a:lstStyle/>
                     <a:p>
                       <a:pPr algn="l"/>

--- a/HERCULES_EQUIPAMENTOS_DE_PROTE.pptx
+++ b/HERCULES_EQUIPAMENTOS_DE_PROTE.pptx
@@ -147,10 +147,10 @@
               <c:strCache>
                 <c:ptCount val="2"/>
                 <c:pt idx="0">
-                  <c:v>Marco 2026</c:v>
+                  <c:v>Abril 2026</c:v>
                 </c:pt>
                 <c:pt idx="1">
-                  <c:v>Abril 2026</c:v>
+                  <c:v>Maio 2026</c:v>
                 </c:pt>
               </c:strCache>
             </c:strRef>
@@ -162,10 +162,10 @@
                 <c:formatCode>General</c:formatCode>
                 <c:ptCount val="2"/>
                 <c:pt idx="0">
-                  <c:v>1</c:v>
+                  <c:v>260</c:v>
                 </c:pt>
                 <c:pt idx="1">
-                  <c:v>256</c:v>
+                  <c:v>150</c:v>
                 </c:pt>
               </c:numCache>
             </c:numRef>
@@ -196,10 +196,10 @@
               <c:strCache>
                 <c:ptCount val="2"/>
                 <c:pt idx="0">
-                  <c:v>Marco 2026</c:v>
+                  <c:v>Abril 2026</c:v>
                 </c:pt>
                 <c:pt idx="1">
-                  <c:v>Abril 2026</c:v>
+                  <c:v>Maio 2026</c:v>
                 </c:pt>
               </c:strCache>
             </c:strRef>
@@ -211,10 +211,10 @@
                 <c:formatCode>General</c:formatCode>
                 <c:ptCount val="2"/>
                 <c:pt idx="0">
-                  <c:v>0</c:v>
+                  <c:v>4</c:v>
                 </c:pt>
                 <c:pt idx="1">
-                  <c:v>8</c:v>
+                  <c:v>5</c:v>
                 </c:pt>
               </c:numCache>
             </c:numRef>
@@ -3387,7 +3387,7 @@
                 </a:solidFill>
                 <a:latin typeface="Calibri"/>
               </a:rPr>
-              <a:t>INDICADORES ABRIL 2026</a:t>
+              <a:t>INDICADORES MAIO 2026</a:t>
             </a:r>
           </a:p>
         </p:txBody>
@@ -3709,7 +3709,7 @@
                 </a:solidFill>
                 <a:latin typeface="Calibri"/>
               </a:rPr>
-              <a:t>264</a:t>
+              <a:t>155</a:t>
             </a:r>
           </a:p>
         </p:txBody>
@@ -3824,7 +3824,7 @@
                 </a:solidFill>
                 <a:latin typeface="Calibri"/>
               </a:rPr>
-              <a:t>256</a:t>
+              <a:t>150</a:t>
             </a:r>
           </a:p>
         </p:txBody>
@@ -3939,7 +3939,7 @@
                 </a:solidFill>
                 <a:latin typeface="Calibri"/>
               </a:rPr>
-              <a:t>8</a:t>
+              <a:t>5</a:t>
             </a:r>
           </a:p>
         </p:txBody>
@@ -4054,7 +4054,7 @@
                 </a:solidFill>
                 <a:latin typeface="Calibri"/>
               </a:rPr>
-              <a:t>97.0%</a:t>
+              <a:t>96.8%</a:t>
             </a:r>
           </a:p>
         </p:txBody>
@@ -4155,7 +4155,7 @@
                           </a:solidFill>
                           <a:latin typeface="Calibri"/>
                         </a:rPr>
-                        <a:t>Marco 2026</a:t>
+                        <a:t>Abril 2026</a:t>
                       </a:r>
                     </a:p>
                   </a:txBody>
@@ -4178,7 +4178,7 @@
                           </a:solidFill>
                           <a:latin typeface="Calibri"/>
                         </a:rPr>
-                        <a:t>Abril 2026</a:t>
+                        <a:t>Maio 2026</a:t>
                       </a:r>
                     </a:p>
                   </a:txBody>
@@ -4249,7 +4249,7 @@
                           </a:solidFill>
                           <a:latin typeface="Calibri"/>
                         </a:rPr>
-                        <a:t>1</a:t>
+                        <a:t>264</a:t>
                       </a:r>
                     </a:p>
                   </a:txBody>
@@ -4272,7 +4272,7 @@
                           </a:solidFill>
                           <a:latin typeface="Calibri"/>
                         </a:rPr>
-                        <a:t>264</a:t>
+                        <a:t>155</a:t>
                       </a:r>
                     </a:p>
                   </a:txBody>
@@ -4295,7 +4295,7 @@
                           </a:solidFill>
                           <a:latin typeface="Calibri"/>
                         </a:rPr>
-                        <a:t>+ 263</a:t>
+                        <a:t>- 109</a:t>
                       </a:r>
                     </a:p>
                   </a:txBody>
@@ -4343,7 +4343,7 @@
                           </a:solidFill>
                           <a:latin typeface="Calibri"/>
                         </a:rPr>
-                        <a:t>1</a:t>
+                        <a:t>260</a:t>
                       </a:r>
                     </a:p>
                   </a:txBody>
@@ -4366,7 +4366,7 @@
                           </a:solidFill>
                           <a:latin typeface="Calibri"/>
                         </a:rPr>
-                        <a:t>256</a:t>
+                        <a:t>150</a:t>
                       </a:r>
                     </a:p>
                   </a:txBody>
@@ -4389,7 +4389,7 @@
                           </a:solidFill>
                           <a:latin typeface="Calibri"/>
                         </a:rPr>
-                        <a:t>+ 255</a:t>
+                        <a:t>- 110</a:t>
                       </a:r>
                     </a:p>
                   </a:txBody>
@@ -4437,7 +4437,7 @@
                           </a:solidFill>
                           <a:latin typeface="Calibri"/>
                         </a:rPr>
-                        <a:t>0</a:t>
+                        <a:t>4</a:t>
                       </a:r>
                     </a:p>
                   </a:txBody>
@@ -4460,7 +4460,7 @@
                           </a:solidFill>
                           <a:latin typeface="Calibri"/>
                         </a:rPr>
-                        <a:t>8</a:t>
+                        <a:t>5</a:t>
                       </a:r>
                     </a:p>
                   </a:txBody>
@@ -4483,7 +4483,7 @@
                           </a:solidFill>
                           <a:latin typeface="Calibri"/>
                         </a:rPr>
-                        <a:t>+ 8</a:t>
+                        <a:t>+ 1</a:t>
                       </a:r>
                     </a:p>
                   </a:txBody>
@@ -4531,7 +4531,7 @@
                           </a:solidFill>
                           <a:latin typeface="Calibri"/>
                         </a:rPr>
-                        <a:t>100.0%</a:t>
+                        <a:t>98.5%</a:t>
                       </a:r>
                     </a:p>
                   </a:txBody>
@@ -4554,7 +4554,7 @@
                           </a:solidFill>
                           <a:latin typeface="Calibri"/>
                         </a:rPr>
-                        <a:t>97.0%</a:t>
+                        <a:t>96.8%</a:t>
                       </a:r>
                     </a:p>
                   </a:txBody>
@@ -4577,7 +4577,7 @@
                           </a:solidFill>
                           <a:latin typeface="Calibri"/>
                         </a:rPr>
-                        <a:t>- 3.0pp</a:t>
+                        <a:t>- 1.7pp</a:t>
                       </a:r>
                     </a:p>
                   </a:txBody>
@@ -4894,7 +4894,7 @@
                           </a:solidFill>
                           <a:latin typeface="Calibri"/>
                         </a:rPr>
-                        <a:t>Marco 2026</a:t>
+                        <a:t>Abril 2026</a:t>
                       </a:r>
                     </a:p>
                   </a:txBody>
@@ -4917,7 +4917,7 @@
                           </a:solidFill>
                           <a:latin typeface="Calibri"/>
                         </a:rPr>
-                        <a:t>1</a:t>
+                        <a:t>264</a:t>
                       </a:r>
                     </a:p>
                   </a:txBody>
@@ -4940,7 +4940,7 @@
                           </a:solidFill>
                           <a:latin typeface="Calibri"/>
                         </a:rPr>
-                        <a:t>1</a:t>
+                        <a:t>260</a:t>
                       </a:r>
                     </a:p>
                   </a:txBody>
@@ -4963,7 +4963,7 @@
                           </a:solidFill>
                           <a:latin typeface="Calibri"/>
                         </a:rPr>
-                        <a:t>0</a:t>
+                        <a:t>4</a:t>
                       </a:r>
                     </a:p>
                   </a:txBody>
@@ -4986,7 +4986,7 @@
                           </a:solidFill>
                           <a:latin typeface="Calibri"/>
                         </a:rPr>
-                        <a:t>100.0%</a:t>
+                        <a:t>98.5%</a:t>
                       </a:r>
                     </a:p>
                   </a:txBody>
@@ -5011,7 +5011,7 @@
                           </a:solidFill>
                           <a:latin typeface="Calibri"/>
                         </a:rPr>
-                        <a:t>Abril 2026</a:t>
+                        <a:t>Maio 2026</a:t>
                       </a:r>
                     </a:p>
                   </a:txBody>
@@ -5034,7 +5034,7 @@
                           </a:solidFill>
                           <a:latin typeface="Calibri"/>
                         </a:rPr>
-                        <a:t>264</a:t>
+                        <a:t>155</a:t>
                       </a:r>
                     </a:p>
                   </a:txBody>
@@ -5057,7 +5057,7 @@
                           </a:solidFill>
                           <a:latin typeface="Calibri"/>
                         </a:rPr>
-                        <a:t>256</a:t>
+                        <a:t>150</a:t>
                       </a:r>
                     </a:p>
                   </a:txBody>
@@ -5080,7 +5080,7 @@
                           </a:solidFill>
                           <a:latin typeface="Calibri"/>
                         </a:rPr>
-                        <a:t>8</a:t>
+                        <a:t>5</a:t>
                       </a:r>
                     </a:p>
                   </a:txBody>
@@ -5103,7 +5103,7 @@
                           </a:solidFill>
                           <a:latin typeface="Calibri"/>
                         </a:rPr>
-                        <a:t>97.0%</a:t>
+                        <a:t>96.8%</a:t>
                       </a:r>
                     </a:p>
                   </a:txBody>
@@ -5191,7 +5191,7 @@
                 </a:solidFill>
                 <a:latin typeface="Calibri"/>
               </a:rPr>
-              <a:t>PERFORMANCE: 97.0% - EXCELENTE</a:t>
+              <a:t>PERFORMANCE: 96.8% - EXCELENTE</a:t>
             </a:r>
           </a:p>
         </p:txBody>
@@ -5276,7 +5276,7 @@
                 </a:solidFill>
                 <a:latin typeface="Calibri"/>
               </a:rPr>
-              <a:t>OCORRENCIAS FORA DO PRAZO (8)</a:t>
+              <a:t>OCORRENCIAS FORA DO PRAZO (5)</a:t>
             </a:r>
           </a:p>
         </p:txBody>
@@ -5334,7 +5334,7 @@
         </p:nvGraphicFramePr>
         <p:xfrm>
           <a:off x="457200" y="1828800"/>
-          <a:ext cx="11429999" cy="3456432"/>
+          <a:ext cx="11429999" cy="2304288"/>
         </p:xfrm>
         <a:graphic>
           <a:graphicData uri="http://schemas.openxmlformats.org/drawingml/2006/table">
@@ -5480,7 +5480,7 @@
                           </a:solidFill>
                           <a:latin typeface="Calibri"/>
                         </a:rPr>
-                        <a:t>276150</a:t>
+                        <a:t>280039</a:t>
                       </a:r>
                     </a:p>
                   </a:txBody>
@@ -5503,7 +5503,7 @@
                           </a:solidFill>
                           <a:latin typeface="Calibri"/>
                         </a:rPr>
-                        <a:t>WILSON SONS LOGISTIC - SANTO ANDRE / SP</a:t>
+                        <a:t>TECNOLOGIA DA MANUTE - MACEIO / AL</a:t>
                       </a:r>
                     </a:p>
                   </a:txBody>
@@ -5526,7 +5526,7 @@
                           </a:solidFill>
                           <a:latin typeface="Calibri"/>
                         </a:rPr>
-                        <a:t>SANTO ANDRE/SP</a:t>
+                        <a:t>MACEIO/AL</a:t>
                       </a:r>
                     </a:p>
                   </a:txBody>
@@ -5549,7 +5549,7 @@
                           </a:solidFill>
                           <a:latin typeface="Calibri"/>
                         </a:rPr>
-                        <a:t>27/04/2026</a:t>
+                        <a:t>07/05/2026</a:t>
                       </a:r>
                     </a:p>
                   </a:txBody>
@@ -5572,7 +5572,7 @@
                           </a:solidFill>
                           <a:latin typeface="Calibri"/>
                         </a:rPr>
-                        <a:t>FORA DO PRAZO</a:t>
+                        <a:t>ENTREGUE FORA DO PRAZO</a:t>
                       </a:r>
                     </a:p>
                   </a:txBody>
@@ -5597,7 +5597,7 @@
                           </a:solidFill>
                           <a:latin typeface="Calibri"/>
                         </a:rPr>
-                        <a:t>277942</a:t>
+                        <a:t>281685</a:t>
                       </a:r>
                     </a:p>
                   </a:txBody>
@@ -5620,7 +5620,7 @@
                           </a:solidFill>
                           <a:latin typeface="Calibri"/>
                         </a:rPr>
-                        <a:t>CORSUL COMERCIO E RE - JOINVILLE / SC</a:t>
+                        <a:t>WILSON SONS LOGISTIC - SANTO ANDRE / SP</a:t>
                       </a:r>
                     </a:p>
                   </a:txBody>
@@ -5643,7 +5643,7 @@
                           </a:solidFill>
                           <a:latin typeface="Calibri"/>
                         </a:rPr>
-                        <a:t>JOINVILLE/SC</a:t>
+                        <a:t>SANTO ANDRE/SP</a:t>
                       </a:r>
                     </a:p>
                   </a:txBody>
@@ -5666,7 +5666,7 @@
                           </a:solidFill>
                           <a:latin typeface="Calibri"/>
                         </a:rPr>
-                        <a:t>14/04/2026</a:t>
+                        <a:t>05/05/2026</a:t>
                       </a:r>
                     </a:p>
                   </a:txBody>
@@ -5714,7 +5714,7 @@
                           </a:solidFill>
                           <a:latin typeface="Calibri"/>
                         </a:rPr>
-                        <a:t>278080</a:t>
+                        <a:t>281849</a:t>
                       </a:r>
                     </a:p>
                   </a:txBody>
@@ -5737,7 +5737,7 @@
                           </a:solidFill>
                           <a:latin typeface="Calibri"/>
                         </a:rPr>
-                        <a:t>CORSUL COMERCIO E RE - INDAIAL / SC</a:t>
+                        <a:t>CORSUL COMERCIO E RE - SAO JOSE / SC</a:t>
                       </a:r>
                     </a:p>
                   </a:txBody>
@@ -5760,7 +5760,7 @@
                           </a:solidFill>
                           <a:latin typeface="Calibri"/>
                         </a:rPr>
-                        <a:t>INDAIAL/SC</a:t>
+                        <a:t>SAO JOSE/SC</a:t>
                       </a:r>
                     </a:p>
                   </a:txBody>
@@ -5783,7 +5783,7 @@
                           </a:solidFill>
                           <a:latin typeface="Calibri"/>
                         </a:rPr>
-                        <a:t>16/04/2026</a:t>
+                        <a:t>12/05/2026</a:t>
                       </a:r>
                     </a:p>
                   </a:txBody>
@@ -5831,7 +5831,7 @@
                           </a:solidFill>
                           <a:latin typeface="Calibri"/>
                         </a:rPr>
-                        <a:t>278747</a:t>
+                        <a:t>282443</a:t>
                       </a:r>
                     </a:p>
                   </a:txBody>
@@ -5854,7 +5854,7 @@
                           </a:solidFill>
                           <a:latin typeface="Calibri"/>
                         </a:rPr>
-                        <a:t>RF-BRA TRANSPORTES L - GUARULHOS / SP</a:t>
+                        <a:t>EXATA CARGO - GUARULHOS / SP</a:t>
                       </a:r>
                     </a:p>
                   </a:txBody>
@@ -5900,7 +5900,7 @@
                           </a:solidFill>
                           <a:latin typeface="Calibri"/>
                         </a:rPr>
-                        <a:t>14/04/2026</a:t>
+                        <a:t>11/05/2026</a:t>
                       </a:r>
                     </a:p>
                   </a:txBody>
@@ -5948,7 +5948,7 @@
                           </a:solidFill>
                           <a:latin typeface="Calibri"/>
                         </a:rPr>
-                        <a:t>279044</a:t>
+                        <a:t>282599</a:t>
                       </a:r>
                     </a:p>
                   </a:txBody>
@@ -5971,7 +5971,7 @@
                           </a:solidFill>
                           <a:latin typeface="Calibri"/>
                         </a:rPr>
-                        <a:t>IR NEUTZLING &amp; CIA L - PELOTAS / RS</a:t>
+                        <a:t>DIMENSIONAL BRASIL S - GARUVA / SC</a:t>
                       </a:r>
                     </a:p>
                   </a:txBody>
@@ -5994,7 +5994,7 @@
                           </a:solidFill>
                           <a:latin typeface="Calibri"/>
                         </a:rPr>
-                        <a:t>PELOTAS/RS</a:t>
+                        <a:t>GARUVA/SC</a:t>
                       </a:r>
                     </a:p>
                   </a:txBody>
@@ -6017,7 +6017,7 @@
                           </a:solidFill>
                           <a:latin typeface="Calibri"/>
                         </a:rPr>
-                        <a:t>28/04/2026</a:t>
+                        <a:t>19/05/2026</a:t>
                       </a:r>
                     </a:p>
                   </a:txBody>
@@ -6047,357 +6047,6 @@
                   <a:tcPr>
                     <a:solidFill>
                       <a:srgbClr val="FFFFFF"/>
-                    </a:solidFill>
-                  </a:tcPr>
-                </a:tc>
-              </a:tr>
-              <a:tr h="384048">
-                <a:tc>
-                  <a:txBody>
-                    <a:bodyPr/>
-                    <a:lstStyle/>
-                    <a:p>
-                      <a:pPr algn="l"/>
-                      <a:r>
-                        <a:rPr sz="1000" b="0">
-                          <a:solidFill>
-                            <a:srgbClr val="1D1B43"/>
-                          </a:solidFill>
-                          <a:latin typeface="Calibri"/>
-                        </a:rPr>
-                        <a:t>279586</a:t>
-                      </a:r>
-                    </a:p>
-                  </a:txBody>
-                  <a:tcPr>
-                    <a:solidFill>
-                      <a:srgbClr val="F2F2F2"/>
-                    </a:solidFill>
-                  </a:tcPr>
-                </a:tc>
-                <a:tc>
-                  <a:txBody>
-                    <a:bodyPr/>
-                    <a:lstStyle/>
-                    <a:p>
-                      <a:pPr algn="l"/>
-                      <a:r>
-                        <a:rPr sz="1000" b="0">
-                          <a:solidFill>
-                            <a:srgbClr val="1D1B43"/>
-                          </a:solidFill>
-                          <a:latin typeface="Calibri"/>
-                        </a:rPr>
-                        <a:t>BUNZL EQUIPAMENTOS P - CONTAGEM / MG</a:t>
-                      </a:r>
-                    </a:p>
-                  </a:txBody>
-                  <a:tcPr>
-                    <a:solidFill>
-                      <a:srgbClr val="F2F2F2"/>
-                    </a:solidFill>
-                  </a:tcPr>
-                </a:tc>
-                <a:tc>
-                  <a:txBody>
-                    <a:bodyPr/>
-                    <a:lstStyle/>
-                    <a:p>
-                      <a:pPr algn="l"/>
-                      <a:r>
-                        <a:rPr sz="1000" b="0">
-                          <a:solidFill>
-                            <a:srgbClr val="1D1B43"/>
-                          </a:solidFill>
-                          <a:latin typeface="Calibri"/>
-                        </a:rPr>
-                        <a:t>CONTAGEM/MG</a:t>
-                      </a:r>
-                    </a:p>
-                  </a:txBody>
-                  <a:tcPr>
-                    <a:solidFill>
-                      <a:srgbClr val="F2F2F2"/>
-                    </a:solidFill>
-                  </a:tcPr>
-                </a:tc>
-                <a:tc>
-                  <a:txBody>
-                    <a:bodyPr/>
-                    <a:lstStyle/>
-                    <a:p>
-                      <a:pPr algn="l"/>
-                      <a:r>
-                        <a:rPr sz="1000" b="0">
-                          <a:solidFill>
-                            <a:srgbClr val="1D1B43"/>
-                          </a:solidFill>
-                          <a:latin typeface="Calibri"/>
-                        </a:rPr>
-                        <a:t>27/04/2026</a:t>
-                      </a:r>
-                    </a:p>
-                  </a:txBody>
-                  <a:tcPr>
-                    <a:solidFill>
-                      <a:srgbClr val="F2F2F2"/>
-                    </a:solidFill>
-                  </a:tcPr>
-                </a:tc>
-                <a:tc>
-                  <a:txBody>
-                    <a:bodyPr/>
-                    <a:lstStyle/>
-                    <a:p>
-                      <a:pPr algn="l"/>
-                      <a:r>
-                        <a:rPr sz="1000" b="0">
-                          <a:solidFill>
-                            <a:srgbClr val="1D1B43"/>
-                          </a:solidFill>
-                          <a:latin typeface="Calibri"/>
-                        </a:rPr>
-                        <a:t>ENTREGUE FORA DO PRAZO</a:t>
-                      </a:r>
-                    </a:p>
-                  </a:txBody>
-                  <a:tcPr>
-                    <a:solidFill>
-                      <a:srgbClr val="F2F2F2"/>
-                    </a:solidFill>
-                  </a:tcPr>
-                </a:tc>
-              </a:tr>
-              <a:tr h="384048">
-                <a:tc>
-                  <a:txBody>
-                    <a:bodyPr/>
-                    <a:lstStyle/>
-                    <a:p>
-                      <a:pPr algn="l"/>
-                      <a:r>
-                        <a:rPr sz="1000" b="0">
-                          <a:solidFill>
-                            <a:srgbClr val="1D1B43"/>
-                          </a:solidFill>
-                          <a:latin typeface="Calibri"/>
-                        </a:rPr>
-                        <a:t>279599</a:t>
-                      </a:r>
-                    </a:p>
-                  </a:txBody>
-                  <a:tcPr>
-                    <a:solidFill>
-                      <a:srgbClr val="FFFFFF"/>
-                    </a:solidFill>
-                  </a:tcPr>
-                </a:tc>
-                <a:tc>
-                  <a:txBody>
-                    <a:bodyPr/>
-                    <a:lstStyle/>
-                    <a:p>
-                      <a:pPr algn="l"/>
-                      <a:r>
-                        <a:rPr sz="1000" b="0">
-                          <a:solidFill>
-                            <a:srgbClr val="1D1B43"/>
-                          </a:solidFill>
-                          <a:latin typeface="Calibri"/>
-                        </a:rPr>
-                        <a:t>BUNZL EQUIPAMENTOS P - CONTAGEM / MG</a:t>
-                      </a:r>
-                    </a:p>
-                  </a:txBody>
-                  <a:tcPr>
-                    <a:solidFill>
-                      <a:srgbClr val="FFFFFF"/>
-                    </a:solidFill>
-                  </a:tcPr>
-                </a:tc>
-                <a:tc>
-                  <a:txBody>
-                    <a:bodyPr/>
-                    <a:lstStyle/>
-                    <a:p>
-                      <a:pPr algn="l"/>
-                      <a:r>
-                        <a:rPr sz="1000" b="0">
-                          <a:solidFill>
-                            <a:srgbClr val="1D1B43"/>
-                          </a:solidFill>
-                          <a:latin typeface="Calibri"/>
-                        </a:rPr>
-                        <a:t>CONTAGEM/MG</a:t>
-                      </a:r>
-                    </a:p>
-                  </a:txBody>
-                  <a:tcPr>
-                    <a:solidFill>
-                      <a:srgbClr val="FFFFFF"/>
-                    </a:solidFill>
-                  </a:tcPr>
-                </a:tc>
-                <a:tc>
-                  <a:txBody>
-                    <a:bodyPr/>
-                    <a:lstStyle/>
-                    <a:p>
-                      <a:pPr algn="l"/>
-                      <a:r>
-                        <a:rPr sz="1000" b="0">
-                          <a:solidFill>
-                            <a:srgbClr val="1D1B43"/>
-                          </a:solidFill>
-                          <a:latin typeface="Calibri"/>
-                        </a:rPr>
-                        <a:t>27/04/2026</a:t>
-                      </a:r>
-                    </a:p>
-                  </a:txBody>
-                  <a:tcPr>
-                    <a:solidFill>
-                      <a:srgbClr val="FFFFFF"/>
-                    </a:solidFill>
-                  </a:tcPr>
-                </a:tc>
-                <a:tc>
-                  <a:txBody>
-                    <a:bodyPr/>
-                    <a:lstStyle/>
-                    <a:p>
-                      <a:pPr algn="l"/>
-                      <a:r>
-                        <a:rPr sz="1000" b="0">
-                          <a:solidFill>
-                            <a:srgbClr val="1D1B43"/>
-                          </a:solidFill>
-                          <a:latin typeface="Calibri"/>
-                        </a:rPr>
-                        <a:t>ENTREGUE FORA DO PRAZO</a:t>
-                      </a:r>
-                    </a:p>
-                  </a:txBody>
-                  <a:tcPr>
-                    <a:solidFill>
-                      <a:srgbClr val="FFFFFF"/>
-                    </a:solidFill>
-                  </a:tcPr>
-                </a:tc>
-              </a:tr>
-              <a:tr h="384048">
-                <a:tc>
-                  <a:txBody>
-                    <a:bodyPr/>
-                    <a:lstStyle/>
-                    <a:p>
-                      <a:pPr algn="l"/>
-                      <a:r>
-                        <a:rPr sz="1000" b="0">
-                          <a:solidFill>
-                            <a:srgbClr val="1D1B43"/>
-                          </a:solidFill>
-                          <a:latin typeface="Calibri"/>
-                        </a:rPr>
-                        <a:t>280019</a:t>
-                      </a:r>
-                    </a:p>
-                  </a:txBody>
-                  <a:tcPr>
-                    <a:solidFill>
-                      <a:srgbClr val="F2F2F2"/>
-                    </a:solidFill>
-                  </a:tcPr>
-                </a:tc>
-                <a:tc>
-                  <a:txBody>
-                    <a:bodyPr/>
-                    <a:lstStyle/>
-                    <a:p>
-                      <a:pPr algn="l"/>
-                      <a:r>
-                        <a:rPr sz="1000" b="0">
-                          <a:solidFill>
-                            <a:srgbClr val="1D1B43"/>
-                          </a:solidFill>
-                          <a:latin typeface="Calibri"/>
-                        </a:rPr>
-                        <a:t>1000 MARCAS SAFETY B - ARACARIGUAMA / SP</a:t>
-                      </a:r>
-                    </a:p>
-                  </a:txBody>
-                  <a:tcPr>
-                    <a:solidFill>
-                      <a:srgbClr val="F2F2F2"/>
-                    </a:solidFill>
-                  </a:tcPr>
-                </a:tc>
-                <a:tc>
-                  <a:txBody>
-                    <a:bodyPr/>
-                    <a:lstStyle/>
-                    <a:p>
-                      <a:pPr algn="l"/>
-                      <a:r>
-                        <a:rPr sz="1000" b="0">
-                          <a:solidFill>
-                            <a:srgbClr val="1D1B43"/>
-                          </a:solidFill>
-                          <a:latin typeface="Calibri"/>
-                        </a:rPr>
-                        <a:t>ARACARIGUAMA/SP</a:t>
-                      </a:r>
-                    </a:p>
-                  </a:txBody>
-                  <a:tcPr>
-                    <a:solidFill>
-                      <a:srgbClr val="F2F2F2"/>
-                    </a:solidFill>
-                  </a:tcPr>
-                </a:tc>
-                <a:tc>
-                  <a:txBody>
-                    <a:bodyPr/>
-                    <a:lstStyle/>
-                    <a:p>
-                      <a:pPr algn="l"/>
-                      <a:r>
-                        <a:rPr sz="1000" b="0">
-                          <a:solidFill>
-                            <a:srgbClr val="1D1B43"/>
-                          </a:solidFill>
-                          <a:latin typeface="Calibri"/>
-                        </a:rPr>
-                        <a:t>24/04/2026</a:t>
-                      </a:r>
-                    </a:p>
-                  </a:txBody>
-                  <a:tcPr>
-                    <a:solidFill>
-                      <a:srgbClr val="F2F2F2"/>
-                    </a:solidFill>
-                  </a:tcPr>
-                </a:tc>
-                <a:tc>
-                  <a:txBody>
-                    <a:bodyPr/>
-                    <a:lstStyle/>
-                    <a:p>
-                      <a:pPr algn="l"/>
-                      <a:r>
-                        <a:rPr sz="1000" b="0">
-                          <a:solidFill>
-                            <a:srgbClr val="1D1B43"/>
-                          </a:solidFill>
-                          <a:latin typeface="Calibri"/>
-                        </a:rPr>
-                        <a:t>ENTREGUE FORA DO PRAZO</a:t>
-                      </a:r>
-                    </a:p>
-                  </a:txBody>
-                  <a:tcPr>
-                    <a:solidFill>
-                      <a:srgbClr val="F2F2F2"/>
                     </a:solidFill>
                   </a:tcPr>
                 </a:tc>
@@ -6737,7 +6386,7 @@
                           </a:solidFill>
                           <a:latin typeface="Calibri"/>
                         </a:rPr>
-                        <a:t>145</a:t>
+                        <a:t>87</a:t>
                       </a:r>
                     </a:p>
                   </a:txBody>
@@ -6760,7 +6409,7 @@
                           </a:solidFill>
                           <a:latin typeface="Calibri"/>
                         </a:rPr>
-                        <a:t>142</a:t>
+                        <a:t>85</a:t>
                       </a:r>
                     </a:p>
                   </a:txBody>
@@ -6783,7 +6432,7 @@
                           </a:solidFill>
                           <a:latin typeface="Calibri"/>
                         </a:rPr>
-                        <a:t>3</a:t>
+                        <a:t>2</a:t>
                       </a:r>
                     </a:p>
                   </a:txBody>
@@ -6806,7 +6455,7 @@
                           </a:solidFill>
                           <a:latin typeface="Calibri"/>
                         </a:rPr>
-                        <a:t>97.9%</a:t>
+                        <a:t>97.7%</a:t>
                       </a:r>
                     </a:p>
                   </a:txBody>
@@ -6877,7 +6526,7 @@
                           </a:solidFill>
                           <a:latin typeface="Calibri"/>
                         </a:rPr>
-                        <a:t>34</a:t>
+                        <a:t>18</a:t>
                       </a:r>
                     </a:p>
                   </a:txBody>
@@ -6900,7 +6549,7 @@
                           </a:solidFill>
                           <a:latin typeface="Calibri"/>
                         </a:rPr>
-                        <a:t>32</a:t>
+                        <a:t>16</a:t>
                       </a:r>
                     </a:p>
                   </a:txBody>
@@ -6946,7 +6595,7 @@
                           </a:solidFill>
                           <a:latin typeface="Calibri"/>
                         </a:rPr>
-                        <a:t>94.1%</a:t>
+                        <a:t>88.9%</a:t>
                       </a:r>
                     </a:p>
                   </a:txBody>
@@ -7017,7 +6666,7 @@
                           </a:solidFill>
                           <a:latin typeface="Calibri"/>
                         </a:rPr>
-                        <a:t>23</a:t>
+                        <a:t>13</a:t>
                       </a:r>
                     </a:p>
                   </a:txBody>
@@ -7040,7 +6689,7 @@
                           </a:solidFill>
                           <a:latin typeface="Calibri"/>
                         </a:rPr>
-                        <a:t>23</a:t>
+                        <a:t>13</a:t>
                       </a:r>
                     </a:p>
                   </a:txBody>
@@ -7134,7 +6783,7 @@
                           </a:solidFill>
                           <a:latin typeface="Calibri"/>
                         </a:rPr>
-                        <a:t>MG</a:t>
+                        <a:t>RS</a:t>
                       </a:r>
                     </a:p>
                   </a:txBody>
@@ -7157,7 +6806,7 @@
                           </a:solidFill>
                           <a:latin typeface="Calibri"/>
                         </a:rPr>
-                        <a:t>23</a:t>
+                        <a:t>10</a:t>
                       </a:r>
                     </a:p>
                   </a:txBody>
@@ -7180,7 +6829,7 @@
                           </a:solidFill>
                           <a:latin typeface="Calibri"/>
                         </a:rPr>
-                        <a:t>21</a:t>
+                        <a:t>10</a:t>
                       </a:r>
                     </a:p>
                   </a:txBody>
@@ -7203,7 +6852,7 @@
                           </a:solidFill>
                           <a:latin typeface="Calibri"/>
                         </a:rPr>
-                        <a:t>2</a:t>
+                        <a:t>0</a:t>
                       </a:r>
                     </a:p>
                   </a:txBody>
@@ -7226,7 +6875,7 @@
                           </a:solidFill>
                           <a:latin typeface="Calibri"/>
                         </a:rPr>
-                        <a:t>91.3%</a:t>
+                        <a:t>100.0%</a:t>
                       </a:r>
                     </a:p>
                   </a:txBody>
@@ -7249,7 +6898,7 @@
                           </a:solidFill>
                           <a:latin typeface="Calibri"/>
                         </a:rPr>
-                        <a:t>Regular</a:t>
+                        <a:t>Excelente</a:t>
                       </a:r>
                     </a:p>
                   </a:txBody>
@@ -7274,7 +6923,7 @@
                           </a:solidFill>
                           <a:latin typeface="Calibri"/>
                         </a:rPr>
-                        <a:t>BA</a:t>
+                        <a:t>PR</a:t>
                       </a:r>
                     </a:p>
                   </a:txBody>
@@ -7297,7 +6946,7 @@
                           </a:solidFill>
                           <a:latin typeface="Calibri"/>
                         </a:rPr>
-                        <a:t>9</a:t>
+                        <a:t>7</a:t>
                       </a:r>
                     </a:p>
                   </a:txBody>
@@ -7320,7 +6969,7 @@
                           </a:solidFill>
                           <a:latin typeface="Calibri"/>
                         </a:rPr>
-                        <a:t>9</a:t>
+                        <a:t>7</a:t>
                       </a:r>
                     </a:p>
                   </a:txBody>
@@ -7414,7 +7063,7 @@
                           </a:solidFill>
                           <a:latin typeface="Calibri"/>
                         </a:rPr>
-                        <a:t>PR</a:t>
+                        <a:t>MG</a:t>
                       </a:r>
                     </a:p>
                   </a:txBody>
@@ -7437,7 +7086,7 @@
                           </a:solidFill>
                           <a:latin typeface="Calibri"/>
                         </a:rPr>
-                        <a:t>8</a:t>
+                        <a:t>7</a:t>
                       </a:r>
                     </a:p>
                   </a:txBody>
@@ -7460,7 +7109,7 @@
                           </a:solidFill>
                           <a:latin typeface="Calibri"/>
                         </a:rPr>
-                        <a:t>8</a:t>
+                        <a:t>7</a:t>
                       </a:r>
                     </a:p>
                   </a:txBody>
@@ -7554,7 +7203,7 @@
                           </a:solidFill>
                           <a:latin typeface="Calibri"/>
                         </a:rPr>
-                        <a:t>RS</a:t>
+                        <a:t>GO</a:t>
                       </a:r>
                     </a:p>
                   </a:txBody>
@@ -7577,7 +7226,7 @@
                           </a:solidFill>
                           <a:latin typeface="Calibri"/>
                         </a:rPr>
-                        <a:t>7</a:t>
+                        <a:t>4</a:t>
                       </a:r>
                     </a:p>
                   </a:txBody>
@@ -7600,7 +7249,7 @@
                           </a:solidFill>
                           <a:latin typeface="Calibri"/>
                         </a:rPr>
-                        <a:t>6</a:t>
+                        <a:t>4</a:t>
                       </a:r>
                     </a:p>
                   </a:txBody>
@@ -7623,7 +7272,7 @@
                           </a:solidFill>
                           <a:latin typeface="Calibri"/>
                         </a:rPr>
-                        <a:t>1</a:t>
+                        <a:t>0</a:t>
                       </a:r>
                     </a:p>
                   </a:txBody>
@@ -7646,7 +7295,7 @@
                           </a:solidFill>
                           <a:latin typeface="Calibri"/>
                         </a:rPr>
-                        <a:t>85.7%</a:t>
+                        <a:t>100.0%</a:t>
                       </a:r>
                     </a:p>
                   </a:txBody>
@@ -7669,7 +7318,7 @@
                           </a:solidFill>
                           <a:latin typeface="Calibri"/>
                         </a:rPr>
-                        <a:t>Regular</a:t>
+                        <a:t>Excelente</a:t>
                       </a:r>
                     </a:p>
                   </a:txBody>
@@ -7694,7 +7343,7 @@
                           </a:solidFill>
                           <a:latin typeface="Calibri"/>
                         </a:rPr>
-                        <a:t>GO</a:t>
+                        <a:t>PA</a:t>
                       </a:r>
                     </a:p>
                   </a:txBody>
@@ -7834,7 +7483,7 @@
                           </a:solidFill>
                           <a:latin typeface="Calibri"/>
                         </a:rPr>
-                        <a:t>MA</a:t>
+                        <a:t>BA</a:t>
                       </a:r>
                     </a:p>
                   </a:txBody>
@@ -7857,7 +7506,7 @@
                           </a:solidFill>
                           <a:latin typeface="Calibri"/>
                         </a:rPr>
-                        <a:t>3</a:t>
+                        <a:t>2</a:t>
                       </a:r>
                     </a:p>
                   </a:txBody>
@@ -7880,7 +7529,7 @@
                           </a:solidFill>
                           <a:latin typeface="Calibri"/>
                         </a:rPr>
-                        <a:t>3</a:t>
+                        <a:t>2</a:t>
                       </a:r>
                     </a:p>
                   </a:txBody>
@@ -7974,7 +7623,7 @@
                           </a:solidFill>
                           <a:latin typeface="Calibri"/>
                         </a:rPr>
-                        <a:t>PA</a:t>
+                        <a:t>AL</a:t>
                       </a:r>
                     </a:p>
                   </a:txBody>
@@ -7997,7 +7646,7 @@
                           </a:solidFill>
                           <a:latin typeface="Calibri"/>
                         </a:rPr>
-                        <a:t>3</a:t>
+                        <a:t>1</a:t>
                       </a:r>
                     </a:p>
                   </a:txBody>
@@ -8020,7 +7669,7 @@
                           </a:solidFill>
                           <a:latin typeface="Calibri"/>
                         </a:rPr>
-                        <a:t>3</a:t>
+                        <a:t>0</a:t>
                       </a:r>
                     </a:p>
                   </a:txBody>
@@ -8043,7 +7692,7 @@
                           </a:solidFill>
                           <a:latin typeface="Calibri"/>
                         </a:rPr>
-                        <a:t>0</a:t>
+                        <a:t>1</a:t>
                       </a:r>
                     </a:p>
                   </a:txBody>
@@ -8066,7 +7715,7 @@
                           </a:solidFill>
                           <a:latin typeface="Calibri"/>
                         </a:rPr>
-                        <a:t>100.0%</a:t>
+                        <a:t>0.0%</a:t>
                       </a:r>
                     </a:p>
                   </a:txBody>
@@ -8089,7 +7738,7 @@
                           </a:solidFill>
                           <a:latin typeface="Calibri"/>
                         </a:rPr>
-                        <a:t>Excelente</a:t>
+                        <a:t>Atencao</a:t>
                       </a:r>
                     </a:p>
                   </a:txBody>
@@ -8184,7 +7833,7 @@
                 </a:solidFill>
                 <a:latin typeface="Calibri"/>
               </a:rPr>
-              <a:t>TOP DESTINATARIOS (51 pontos)</a:t>
+              <a:t>TOP DESTINATARIOS (41 pontos)</a:t>
             </a:r>
           </a:p>
         </p:txBody>
@@ -8459,7 +8108,7 @@
                           </a:solidFill>
                           <a:latin typeface="Calibri"/>
                         </a:rPr>
-                        <a:t>BUNZL EQUIPAMENTOS P - GUARULHOS / SP</a:t>
+                        <a:t>WILSON SONS LOGISTIC - SANTO ANDRE / SP</a:t>
                       </a:r>
                     </a:p>
                   </a:txBody>
@@ -8482,7 +8131,7 @@
                           </a:solidFill>
                           <a:latin typeface="Calibri"/>
                         </a:rPr>
-                        <a:t>37</a:t>
+                        <a:t>17</a:t>
                       </a:r>
                     </a:p>
                   </a:txBody>
@@ -8505,7 +8154,7 @@
                           </a:solidFill>
                           <a:latin typeface="Calibri"/>
                         </a:rPr>
-                        <a:t>37</a:t>
+                        <a:t>16</a:t>
                       </a:r>
                     </a:p>
                   </a:txBody>
@@ -8528,7 +8177,7 @@
                           </a:solidFill>
                           <a:latin typeface="Calibri"/>
                         </a:rPr>
-                        <a:t>0</a:t>
+                        <a:t>1</a:t>
                       </a:r>
                     </a:p>
                   </a:txBody>
@@ -8551,7 +8200,7 @@
                           </a:solidFill>
                           <a:latin typeface="Calibri"/>
                         </a:rPr>
-                        <a:t>100.0%</a:t>
+                        <a:t>94.1%</a:t>
                       </a:r>
                     </a:p>
                   </a:txBody>
@@ -8574,7 +8223,7 @@
                           </a:solidFill>
                           <a:latin typeface="Calibri"/>
                         </a:rPr>
-                        <a:t>Excelente</a:t>
+                        <a:t>Regular</a:t>
                       </a:r>
                     </a:p>
                   </a:txBody>
@@ -8645,7 +8294,7 @@
                           </a:solidFill>
                           <a:latin typeface="Calibri"/>
                         </a:rPr>
-                        <a:t>21</a:t>
+                        <a:t>15</a:t>
                       </a:r>
                     </a:p>
                   </a:txBody>
@@ -8668,7 +8317,7 @@
                           </a:solidFill>
                           <a:latin typeface="Calibri"/>
                         </a:rPr>
-                        <a:t>21</a:t>
+                        <a:t>14</a:t>
                       </a:r>
                     </a:p>
                   </a:txBody>
@@ -8691,7 +8340,7 @@
                           </a:solidFill>
                           <a:latin typeface="Calibri"/>
                         </a:rPr>
-                        <a:t>0</a:t>
+                        <a:t>1</a:t>
                       </a:r>
                     </a:p>
                   </a:txBody>
@@ -8714,7 +8363,7 @@
                           </a:solidFill>
                           <a:latin typeface="Calibri"/>
                         </a:rPr>
-                        <a:t>100.0%</a:t>
+                        <a:t>93.3%</a:t>
                       </a:r>
                     </a:p>
                   </a:txBody>
@@ -8737,7 +8386,7 @@
                           </a:solidFill>
                           <a:latin typeface="Calibri"/>
                         </a:rPr>
-                        <a:t>Excelente</a:t>
+                        <a:t>Regular</a:t>
                       </a:r>
                     </a:p>
                   </a:txBody>
@@ -8785,7 +8434,7 @@
                           </a:solidFill>
                           <a:latin typeface="Calibri"/>
                         </a:rPr>
-                        <a:t>EXATA CARGO - GUARULHOS / SP</a:t>
+                        <a:t>NORTEL SUPRIMENTOS I - CAMPINAS / SP</a:t>
                       </a:r>
                     </a:p>
                   </a:txBody>
@@ -8808,7 +8457,7 @@
                           </a:solidFill>
                           <a:latin typeface="Calibri"/>
                         </a:rPr>
-                        <a:t>17</a:t>
+                        <a:t>10</a:t>
                       </a:r>
                     </a:p>
                   </a:txBody>
@@ -8831,7 +8480,7 @@
                           </a:solidFill>
                           <a:latin typeface="Calibri"/>
                         </a:rPr>
-                        <a:t>17</a:t>
+                        <a:t>10</a:t>
                       </a:r>
                     </a:p>
                   </a:txBody>
@@ -8948,7 +8597,7 @@
                           </a:solidFill>
                           <a:latin typeface="Calibri"/>
                         </a:rPr>
-                        <a:t>FITASSUL COMERCIO DI - ITAJUBA / MG</a:t>
+                        <a:t>BUNZL EQUIPAMENTOS P - GUARULHOS / SP</a:t>
                       </a:r>
                     </a:p>
                   </a:txBody>
@@ -8971,7 +8620,7 @@
                           </a:solidFill>
                           <a:latin typeface="Calibri"/>
                         </a:rPr>
-                        <a:t>14</a:t>
+                        <a:t>10</a:t>
                       </a:r>
                     </a:p>
                   </a:txBody>
@@ -8994,7 +8643,7 @@
                           </a:solidFill>
                           <a:latin typeface="Calibri"/>
                         </a:rPr>
-                        <a:t>14</a:t>
+                        <a:t>10</a:t>
                       </a:r>
                     </a:p>
                   </a:txBody>
@@ -9111,7 +8760,7 @@
                           </a:solidFill>
                           <a:latin typeface="Calibri"/>
                         </a:rPr>
-                        <a:t>SP EQUIPAMENTOS DE P - GUARULHOS / SP</a:t>
+                        <a:t>LUZ TRANSPORTES - GUARULHOS / SP</a:t>
                       </a:r>
                     </a:p>
                   </a:txBody>
@@ -9134,7 +8783,7 @@
                           </a:solidFill>
                           <a:latin typeface="Calibri"/>
                         </a:rPr>
-                        <a:t>14</a:t>
+                        <a:t>9</a:t>
                       </a:r>
                     </a:p>
                   </a:txBody>
@@ -9157,7 +8806,7 @@
                           </a:solidFill>
                           <a:latin typeface="Calibri"/>
                         </a:rPr>
-                        <a:t>14</a:t>
+                        <a:t>9</a:t>
                       </a:r>
                     </a:p>
                   </a:txBody>
@@ -9274,7 +8923,7 @@
                           </a:solidFill>
                           <a:latin typeface="Calibri"/>
                         </a:rPr>
-                        <a:t>NORTEL SUPRIMENTOS I - SERRA / ES</a:t>
+                        <a:t>DIMENSIONAL BRASIL S - SERRA / ES</a:t>
                       </a:r>
                     </a:p>
                   </a:txBody>
@@ -9297,7 +8946,7 @@
                           </a:solidFill>
                           <a:latin typeface="Calibri"/>
                         </a:rPr>
-                        <a:t>11</a:t>
+                        <a:t>8</a:t>
                       </a:r>
                     </a:p>
                   </a:txBody>
@@ -9320,7 +8969,7 @@
                           </a:solidFill>
                           <a:latin typeface="Calibri"/>
                         </a:rPr>
-                        <a:t>11</a:t>
+                        <a:t>8</a:t>
                       </a:r>
                     </a:p>
                   </a:txBody>
@@ -9437,7 +9086,7 @@
                           </a:solidFill>
                           <a:latin typeface="Calibri"/>
                         </a:rPr>
-                        <a:t>DIMENSIONAL BRASIL S - SERRA / ES</a:t>
+                        <a:t>EXATA CARGO - GUARULHOS / SP</a:t>
                       </a:r>
                     </a:p>
                   </a:txBody>
@@ -9460,7 +9109,7 @@
                           </a:solidFill>
                           <a:latin typeface="Calibri"/>
                         </a:rPr>
-                        <a:t>10</a:t>
+                        <a:t>7</a:t>
                       </a:r>
                     </a:p>
                   </a:txBody>
@@ -9483,7 +9132,7 @@
                           </a:solidFill>
                           <a:latin typeface="Calibri"/>
                         </a:rPr>
-                        <a:t>10</a:t>
+                        <a:t>6</a:t>
                       </a:r>
                     </a:p>
                   </a:txBody>
@@ -9506,7 +9155,7 @@
                           </a:solidFill>
                           <a:latin typeface="Calibri"/>
                         </a:rPr>
-                        <a:t>0</a:t>
+                        <a:t>1</a:t>
                       </a:r>
                     </a:p>
                   </a:txBody>
@@ -9529,7 +9178,7 @@
                           </a:solidFill>
                           <a:latin typeface="Calibri"/>
                         </a:rPr>
-                        <a:t>100.0%</a:t>
+                        <a:t>85.7%</a:t>
                       </a:r>
                     </a:p>
                   </a:txBody>
@@ -9552,7 +9201,7 @@
                           </a:solidFill>
                           <a:latin typeface="Calibri"/>
                         </a:rPr>
-                        <a:t>Excelente</a:t>
+                        <a:t>Regular</a:t>
                       </a:r>
                     </a:p>
                   </a:txBody>
@@ -9600,7 +9249,7 @@
                           </a:solidFill>
                           <a:latin typeface="Calibri"/>
                         </a:rPr>
-                        <a:t>ATIVA DISTRIBUICAO E - SAO PAULO / SP</a:t>
+                        <a:t>RF-BRA TRANSPORTES L - GUARULHOS / SP</a:t>
                       </a:r>
                     </a:p>
                   </a:txBody>
@@ -9623,7 +9272,7 @@
                           </a:solidFill>
                           <a:latin typeface="Calibri"/>
                         </a:rPr>
-                        <a:t>9</a:t>
+                        <a:t>5</a:t>
                       </a:r>
                     </a:p>
                   </a:txBody>
@@ -9646,7 +9295,7 @@
                           </a:solidFill>
                           <a:latin typeface="Calibri"/>
                         </a:rPr>
-                        <a:t>9</a:t>
+                        <a:t>5</a:t>
                       </a:r>
                     </a:p>
                   </a:txBody>
@@ -9763,7 +9412,7 @@
                           </a:solidFill>
                           <a:latin typeface="Calibri"/>
                         </a:rPr>
-                        <a:t>LUZ TRANSPORTES - GUARULHOS / SP</a:t>
+                        <a:t>ELETRONOR - DISTRIBU - CAXIAS DO SUL / RS</a:t>
                       </a:r>
                     </a:p>
                   </a:txBody>
@@ -9786,7 +9435,7 @@
                           </a:solidFill>
                           <a:latin typeface="Calibri"/>
                         </a:rPr>
-                        <a:t>9</a:t>
+                        <a:t>5</a:t>
                       </a:r>
                     </a:p>
                   </a:txBody>
@@ -9809,7 +9458,7 @@
                           </a:solidFill>
                           <a:latin typeface="Calibri"/>
                         </a:rPr>
-                        <a:t>9</a:t>
+                        <a:t>5</a:t>
                       </a:r>
                     </a:p>
                   </a:txBody>
@@ -9926,7 +9575,7 @@
                           </a:solidFill>
                           <a:latin typeface="Calibri"/>
                         </a:rPr>
-                        <a:t>WILSON SONS LOGISTIC - SANTO ANDRE / SP</a:t>
+                        <a:t>NORTEL SUPRIMENTOS I - SERRA / ES</a:t>
                       </a:r>
                     </a:p>
                   </a:txBody>
@@ -9949,7 +9598,7 @@
                           </a:solidFill>
                           <a:latin typeface="Calibri"/>
                         </a:rPr>
-                        <a:t>9</a:t>
+                        <a:t>5</a:t>
                       </a:r>
                     </a:p>
                   </a:txBody>
@@ -9972,7 +9621,7 @@
                           </a:solidFill>
                           <a:latin typeface="Calibri"/>
                         </a:rPr>
-                        <a:t>8</a:t>
+                        <a:t>5</a:t>
                       </a:r>
                     </a:p>
                   </a:txBody>
@@ -9995,7 +9644,7 @@
                           </a:solidFill>
                           <a:latin typeface="Calibri"/>
                         </a:rPr>
-                        <a:t>1</a:t>
+                        <a:t>0</a:t>
                       </a:r>
                     </a:p>
                   </a:txBody>
@@ -10018,7 +9667,7 @@
                           </a:solidFill>
                           <a:latin typeface="Calibri"/>
                         </a:rPr>
-                        <a:t>88.9%</a:t>
+                        <a:t>100.0%</a:t>
                       </a:r>
                     </a:p>
                   </a:txBody>
@@ -10041,7 +9690,7 @@
                           </a:solidFill>
                           <a:latin typeface="Calibri"/>
                         </a:rPr>
-                        <a:t>Regular</a:t>
+                        <a:t>Excelente</a:t>
                       </a:r>
                     </a:p>
                   </a:txBody>
@@ -10089,7 +9738,7 @@
                           </a:solidFill>
                           <a:latin typeface="Calibri"/>
                         </a:rPr>
-                        <a:t>1000 MARCAS SAFETY B - ARACARIGUAMA / SP</a:t>
+                        <a:t>IR NEUTZLING &amp; C - PELOTAS / RS</a:t>
                       </a:r>
                     </a:p>
                   </a:txBody>
@@ -10112,7 +9761,7 @@
                           </a:solidFill>
                           <a:latin typeface="Calibri"/>
                         </a:rPr>
-                        <a:t>8</a:t>
+                        <a:t>4</a:t>
                       </a:r>
                     </a:p>
                   </a:txBody>
@@ -10135,7 +9784,7 @@
                           </a:solidFill>
                           <a:latin typeface="Calibri"/>
                         </a:rPr>
-                        <a:t>7</a:t>
+                        <a:t>4</a:t>
                       </a:r>
                     </a:p>
                   </a:txBody>
@@ -10158,7 +9807,7 @@
                           </a:solidFill>
                           <a:latin typeface="Calibri"/>
                         </a:rPr>
-                        <a:t>1</a:t>
+                        <a:t>0</a:t>
                       </a:r>
                     </a:p>
                   </a:txBody>
@@ -10181,7 +9830,7 @@
                           </a:solidFill>
                           <a:latin typeface="Calibri"/>
                         </a:rPr>
-                        <a:t>87.5%</a:t>
+                        <a:t>100.0%</a:t>
                       </a:r>
                     </a:p>
                   </a:txBody>
@@ -10204,7 +9853,7 @@
                           </a:solidFill>
                           <a:latin typeface="Calibri"/>
                         </a:rPr>
-                        <a:t>Regular</a:t>
+                        <a:t>Excelente</a:t>
                       </a:r>
                     </a:p>
                   </a:txBody>
@@ -10252,7 +9901,7 @@
                           </a:solidFill>
                           <a:latin typeface="Calibri"/>
                         </a:rPr>
-                        <a:t>BUNZL EQUIPAMENTOS P - CONTAGEM / MG</a:t>
+                        <a:t>FITASSUL COMERCIO DI - ITAJUBA / MG</a:t>
                       </a:r>
                     </a:p>
                   </a:txBody>
@@ -10275,7 +9924,7 @@
                           </a:solidFill>
                           <a:latin typeface="Calibri"/>
                         </a:rPr>
-                        <a:t>8</a:t>
+                        <a:t>4</a:t>
                       </a:r>
                     </a:p>
                   </a:txBody>
@@ -10298,7 +9947,7 @@
                           </a:solidFill>
                           <a:latin typeface="Calibri"/>
                         </a:rPr>
-                        <a:t>6</a:t>
+                        <a:t>4</a:t>
                       </a:r>
                     </a:p>
                   </a:txBody>
@@ -10321,7 +9970,7 @@
                           </a:solidFill>
                           <a:latin typeface="Calibri"/>
                         </a:rPr>
-                        <a:t>2</a:t>
+                        <a:t>0</a:t>
                       </a:r>
                     </a:p>
                   </a:txBody>
@@ -10344,7 +9993,7 @@
                           </a:solidFill>
                           <a:latin typeface="Calibri"/>
                         </a:rPr>
-                        <a:t>75.0%</a:t>
+                        <a:t>100.0%</a:t>
                       </a:r>
                     </a:p>
                   </a:txBody>
@@ -10367,7 +10016,7 @@
                           </a:solidFill>
                           <a:latin typeface="Calibri"/>
                         </a:rPr>
-                        <a:t>Atencao</a:t>
+                        <a:t>Excelente</a:t>
                       </a:r>
                     </a:p>
                   </a:txBody>
@@ -10415,7 +10064,7 @@
                           </a:solidFill>
                           <a:latin typeface="Calibri"/>
                         </a:rPr>
-                        <a:t>NORTEL SUPRIMENTOS I - CAMPINAS / SP</a:t>
+                        <a:t>NORTEL SUPRIMENTOS I - PARAUAPEBAS / PA</a:t>
                       </a:r>
                     </a:p>
                   </a:txBody>
@@ -10438,7 +10087,7 @@
                           </a:solidFill>
                           <a:latin typeface="Calibri"/>
                         </a:rPr>
-                        <a:t>8</a:t>
+                        <a:t>4</a:t>
                       </a:r>
                     </a:p>
                   </a:txBody>
@@ -10461,7 +10110,7 @@
                           </a:solidFill>
                           <a:latin typeface="Calibri"/>
                         </a:rPr>
-                        <a:t>8</a:t>
+                        <a:t>4</a:t>
                       </a:r>
                     </a:p>
                   </a:txBody>
@@ -10578,7 +10227,7 @@
                           </a:solidFill>
                           <a:latin typeface="Calibri"/>
                         </a:rPr>
-                        <a:t>RF-BRA TRANSPORTES L - GUARULHOS / SP</a:t>
+                        <a:t>ATIVA DISTRIBUICAO E - SAO PAULO / SP</a:t>
                       </a:r>
                     </a:p>
                   </a:txBody>
@@ -10601,7 +10250,7 @@
                           </a:solidFill>
                           <a:latin typeface="Calibri"/>
                         </a:rPr>
-                        <a:t>7</a:t>
+                        <a:t>4</a:t>
                       </a:r>
                     </a:p>
                   </a:txBody>
@@ -10624,7 +10273,7 @@
                           </a:solidFill>
                           <a:latin typeface="Calibri"/>
                         </a:rPr>
-                        <a:t>6</a:t>
+                        <a:t>4</a:t>
                       </a:r>
                     </a:p>
                   </a:txBody>
@@ -10647,7 +10296,7 @@
                           </a:solidFill>
                           <a:latin typeface="Calibri"/>
                         </a:rPr>
-                        <a:t>1</a:t>
+                        <a:t>0</a:t>
                       </a:r>
                     </a:p>
                   </a:txBody>
@@ -10670,7 +10319,7 @@
                           </a:solidFill>
                           <a:latin typeface="Calibri"/>
                         </a:rPr>
-                        <a:t>85.7%</a:t>
+                        <a:t>100.0%</a:t>
                       </a:r>
                     </a:p>
                   </a:txBody>
@@ -10693,7 +10342,7 @@
                           </a:solidFill>
                           <a:latin typeface="Calibri"/>
                         </a:rPr>
-                        <a:t>Regular</a:t>
+                        <a:t>Excelente</a:t>
                       </a:r>
                     </a:p>
                   </a:txBody>

--- a/HERCULES_EQUIPAMENTOS_DE_PROTE.pptx
+++ b/HERCULES_EQUIPAMENTOS_DE_PROTE.pptx
@@ -143,29 +143,23 @@
           </c:spPr>
           <c:cat>
             <c:strRef>
-              <c:f>Sheet1!$A$2:$A$3</c:f>
+              <c:f>Sheet1!$A$2:$A$2</c:f>
               <c:strCache>
-                <c:ptCount val="2"/>
+                <c:ptCount val="1"/>
                 <c:pt idx="0">
                   <c:v>Abril 2026</c:v>
-                </c:pt>
-                <c:pt idx="1">
-                  <c:v>Maio 2026</c:v>
                 </c:pt>
               </c:strCache>
             </c:strRef>
           </c:cat>
           <c:val>
             <c:numRef>
-              <c:f>Sheet1!$B$2:$B$3</c:f>
+              <c:f>Sheet1!$B$2:$B$2</c:f>
               <c:numCache>
                 <c:formatCode>General</c:formatCode>
-                <c:ptCount val="2"/>
+                <c:ptCount val="1"/>
                 <c:pt idx="0">
-                  <c:v>260</c:v>
-                </c:pt>
-                <c:pt idx="1">
-                  <c:v>150</c:v>
+                  <c:v>265</c:v>
                 </c:pt>
               </c:numCache>
             </c:numRef>
@@ -192,29 +186,23 @@
           </c:spPr>
           <c:cat>
             <c:strRef>
-              <c:f>Sheet1!$A$2:$A$3</c:f>
+              <c:f>Sheet1!$A$2:$A$2</c:f>
               <c:strCache>
-                <c:ptCount val="2"/>
+                <c:ptCount val="1"/>
                 <c:pt idx="0">
                   <c:v>Abril 2026</c:v>
-                </c:pt>
-                <c:pt idx="1">
-                  <c:v>Maio 2026</c:v>
                 </c:pt>
               </c:strCache>
             </c:strRef>
           </c:cat>
           <c:val>
             <c:numRef>
-              <c:f>Sheet1!$C$2:$C$3</c:f>
+              <c:f>Sheet1!$C$2:$C$2</c:f>
               <c:numCache>
                 <c:formatCode>General</c:formatCode>
-                <c:ptCount val="2"/>
+                <c:ptCount val="1"/>
                 <c:pt idx="0">
                   <c:v>4</c:v>
-                </c:pt>
-                <c:pt idx="1">
-                  <c:v>5</c:v>
                 </c:pt>
               </c:numCache>
             </c:numRef>
@@ -3387,7 +3375,7 @@
                 </a:solidFill>
                 <a:latin typeface="Calibri"/>
               </a:rPr>
-              <a:t>INDICADORES MAIO 2026</a:t>
+              <a:t>INDICADORES ABRIL 2026</a:t>
             </a:r>
           </a:p>
         </p:txBody>
@@ -3494,14 +3482,13 @@
           <a:p>
             <a:pPr algn="ctr"/>
             <a:r>
-              <a:rPr sz="1600" b="1">
+              <a:rPr sz="1400" b="1">
                 <a:solidFill>
                   <a:srgbClr val="FFFFFF"/>
                 </a:solidFill>
                 <a:latin typeface="Calibri"/>
               </a:rPr>
-              <a:t>Nossa rota e ir alem das
-entregas!</a:t>
+              <a:t>Nossa rota e ir alem das entregas!</a:t>
             </a:r>
           </a:p>
         </p:txBody>
@@ -3709,7 +3696,7 @@
                 </a:solidFill>
                 <a:latin typeface="Calibri"/>
               </a:rPr>
-              <a:t>155</a:t>
+              <a:t>269</a:t>
             </a:r>
           </a:p>
         </p:txBody>
@@ -3824,7 +3811,7 @@
                 </a:solidFill>
                 <a:latin typeface="Calibri"/>
               </a:rPr>
-              <a:t>150</a:t>
+              <a:t>265</a:t>
             </a:r>
           </a:p>
         </p:txBody>
@@ -3939,7 +3926,7 @@
                 </a:solidFill>
                 <a:latin typeface="Calibri"/>
               </a:rPr>
-              <a:t>5</a:t>
+              <a:t>4</a:t>
             </a:r>
           </a:p>
         </p:txBody>
@@ -4054,7 +4041,7 @@
                 </a:solidFill>
                 <a:latin typeface="Calibri"/>
               </a:rPr>
-              <a:t>96.8%</a:t>
+              <a:t>98.5%</a:t>
             </a:r>
           </a:p>
         </p:txBody>
@@ -4155,30 +4142,30 @@
                           </a:solidFill>
                           <a:latin typeface="Calibri"/>
                         </a:rPr>
+                        <a:t>Marco 2026</a:t>
+                      </a:r>
+                    </a:p>
+                  </a:txBody>
+                  <a:tcPr>
+                    <a:solidFill>
+                      <a:srgbClr val="1D1B43"/>
+                    </a:solidFill>
+                  </a:tcPr>
+                </a:tc>
+                <a:tc>
+                  <a:txBody>
+                    <a:bodyPr/>
+                    <a:lstStyle/>
+                    <a:p>
+                      <a:pPr algn="ctr"/>
+                      <a:r>
+                        <a:rPr sz="1100" b="1">
+                          <a:solidFill>
+                            <a:srgbClr val="FFFFFF"/>
+                          </a:solidFill>
+                          <a:latin typeface="Calibri"/>
+                        </a:rPr>
                         <a:t>Abril 2026</a:t>
-                      </a:r>
-                    </a:p>
-                  </a:txBody>
-                  <a:tcPr>
-                    <a:solidFill>
-                      <a:srgbClr val="1D1B43"/>
-                    </a:solidFill>
-                  </a:tcPr>
-                </a:tc>
-                <a:tc>
-                  <a:txBody>
-                    <a:bodyPr/>
-                    <a:lstStyle/>
-                    <a:p>
-                      <a:pPr algn="ctr"/>
-                      <a:r>
-                        <a:rPr sz="1100" b="1">
-                          <a:solidFill>
-                            <a:srgbClr val="FFFFFF"/>
-                          </a:solidFill>
-                          <a:latin typeface="Calibri"/>
-                        </a:rPr>
-                        <a:t>Maio 2026</a:t>
                       </a:r>
                     </a:p>
                   </a:txBody>
@@ -4249,7 +4236,7 @@
                           </a:solidFill>
                           <a:latin typeface="Calibri"/>
                         </a:rPr>
-                        <a:t>264</a:t>
+                        <a:t>-</a:t>
                       </a:r>
                     </a:p>
                   </a:txBody>
@@ -4272,7 +4259,7 @@
                           </a:solidFill>
                           <a:latin typeface="Calibri"/>
                         </a:rPr>
-                        <a:t>155</a:t>
+                        <a:t>269</a:t>
                       </a:r>
                     </a:p>
                   </a:txBody>
@@ -4295,7 +4282,7 @@
                           </a:solidFill>
                           <a:latin typeface="Calibri"/>
                         </a:rPr>
-                        <a:t>- 109</a:t>
+                        <a:t>-</a:t>
                       </a:r>
                     </a:p>
                   </a:txBody>
@@ -4343,7 +4330,7 @@
                           </a:solidFill>
                           <a:latin typeface="Calibri"/>
                         </a:rPr>
-                        <a:t>260</a:t>
+                        <a:t>-</a:t>
                       </a:r>
                     </a:p>
                   </a:txBody>
@@ -4366,7 +4353,7 @@
                           </a:solidFill>
                           <a:latin typeface="Calibri"/>
                         </a:rPr>
-                        <a:t>150</a:t>
+                        <a:t>265</a:t>
                       </a:r>
                     </a:p>
                   </a:txBody>
@@ -4389,7 +4376,7 @@
                           </a:solidFill>
                           <a:latin typeface="Calibri"/>
                         </a:rPr>
-                        <a:t>- 110</a:t>
+                        <a:t>-</a:t>
                       </a:r>
                     </a:p>
                   </a:txBody>
@@ -4437,6 +4424,29 @@
                           </a:solidFill>
                           <a:latin typeface="Calibri"/>
                         </a:rPr>
+                        <a:t>-</a:t>
+                      </a:r>
+                    </a:p>
+                  </a:txBody>
+                  <a:tcPr>
+                    <a:solidFill>
+                      <a:srgbClr val="FFFFFF"/>
+                    </a:solidFill>
+                  </a:tcPr>
+                </a:tc>
+                <a:tc>
+                  <a:txBody>
+                    <a:bodyPr/>
+                    <a:lstStyle/>
+                    <a:p>
+                      <a:pPr algn="l"/>
+                      <a:r>
+                        <a:rPr sz="1000" b="0">
+                          <a:solidFill>
+                            <a:srgbClr val="1D1B43"/>
+                          </a:solidFill>
+                          <a:latin typeface="Calibri"/>
+                        </a:rPr>
                         <a:t>4</a:t>
                       </a:r>
                     </a:p>
@@ -4460,30 +4470,7 @@
                           </a:solidFill>
                           <a:latin typeface="Calibri"/>
                         </a:rPr>
-                        <a:t>5</a:t>
-                      </a:r>
-                    </a:p>
-                  </a:txBody>
-                  <a:tcPr>
-                    <a:solidFill>
-                      <a:srgbClr val="FFFFFF"/>
-                    </a:solidFill>
-                  </a:tcPr>
-                </a:tc>
-                <a:tc>
-                  <a:txBody>
-                    <a:bodyPr/>
-                    <a:lstStyle/>
-                    <a:p>
-                      <a:pPr algn="l"/>
-                      <a:r>
-                        <a:rPr sz="1000" b="0">
-                          <a:solidFill>
-                            <a:srgbClr val="1D1B43"/>
-                          </a:solidFill>
-                          <a:latin typeface="Calibri"/>
-                        </a:rPr>
-                        <a:t>+ 1</a:t>
+                        <a:t>-</a:t>
                       </a:r>
                     </a:p>
                   </a:txBody>
@@ -4531,6 +4518,29 @@
                           </a:solidFill>
                           <a:latin typeface="Calibri"/>
                         </a:rPr>
+                        <a:t>-</a:t>
+                      </a:r>
+                    </a:p>
+                  </a:txBody>
+                  <a:tcPr>
+                    <a:solidFill>
+                      <a:srgbClr val="F2F2F2"/>
+                    </a:solidFill>
+                  </a:tcPr>
+                </a:tc>
+                <a:tc>
+                  <a:txBody>
+                    <a:bodyPr/>
+                    <a:lstStyle/>
+                    <a:p>
+                      <a:pPr algn="l"/>
+                      <a:r>
+                        <a:rPr sz="1000" b="0">
+                          <a:solidFill>
+                            <a:srgbClr val="1D1B43"/>
+                          </a:solidFill>
+                          <a:latin typeface="Calibri"/>
+                        </a:rPr>
                         <a:t>98.5%</a:t>
                       </a:r>
                     </a:p>
@@ -4554,30 +4564,7 @@
                           </a:solidFill>
                           <a:latin typeface="Calibri"/>
                         </a:rPr>
-                        <a:t>96.8%</a:t>
-                      </a:r>
-                    </a:p>
-                  </a:txBody>
-                  <a:tcPr>
-                    <a:solidFill>
-                      <a:srgbClr val="F2F2F2"/>
-                    </a:solidFill>
-                  </a:tcPr>
-                </a:tc>
-                <a:tc>
-                  <a:txBody>
-                    <a:bodyPr/>
-                    <a:lstStyle/>
-                    <a:p>
-                      <a:pPr algn="l"/>
-                      <a:r>
-                        <a:rPr sz="1000" b="0">
-                          <a:solidFill>
-                            <a:srgbClr val="1D1B43"/>
-                          </a:solidFill>
-                          <a:latin typeface="Calibri"/>
-                        </a:rPr>
-                        <a:t>- 1.7pp</a:t>
+                        <a:t>-</a:t>
                       </a:r>
                     </a:p>
                   </a:txBody>
@@ -4748,7 +4735,7 @@
         </p:nvGraphicFramePr>
         <p:xfrm>
           <a:off x="7955279" y="2286000"/>
-          <a:ext cx="4480560" cy="1316736"/>
+          <a:ext cx="4480560" cy="877824"/>
         </p:xfrm>
         <a:graphic>
           <a:graphicData uri="http://schemas.openxmlformats.org/drawingml/2006/table">
@@ -4917,7 +4904,7 @@
                           </a:solidFill>
                           <a:latin typeface="Calibri"/>
                         </a:rPr>
-                        <a:t>264</a:t>
+                        <a:t>269</a:t>
                       </a:r>
                     </a:p>
                   </a:txBody>
@@ -4940,7 +4927,7 @@
                           </a:solidFill>
                           <a:latin typeface="Calibri"/>
                         </a:rPr>
-                        <a:t>260</a:t>
+                        <a:t>265</a:t>
                       </a:r>
                     </a:p>
                   </a:txBody>
@@ -4993,123 +4980,6 @@
                   <a:tcPr>
                     <a:solidFill>
                       <a:srgbClr val="FFFFFF"/>
-                    </a:solidFill>
-                  </a:tcPr>
-                </a:tc>
-              </a:tr>
-              <a:tr h="438912">
-                <a:tc>
-                  <a:txBody>
-                    <a:bodyPr/>
-                    <a:lstStyle/>
-                    <a:p>
-                      <a:pPr algn="l"/>
-                      <a:r>
-                        <a:rPr sz="1000" b="0">
-                          <a:solidFill>
-                            <a:srgbClr val="1D1B43"/>
-                          </a:solidFill>
-                          <a:latin typeface="Calibri"/>
-                        </a:rPr>
-                        <a:t>Maio 2026</a:t>
-                      </a:r>
-                    </a:p>
-                  </a:txBody>
-                  <a:tcPr>
-                    <a:solidFill>
-                      <a:srgbClr val="F2F2F2"/>
-                    </a:solidFill>
-                  </a:tcPr>
-                </a:tc>
-                <a:tc>
-                  <a:txBody>
-                    <a:bodyPr/>
-                    <a:lstStyle/>
-                    <a:p>
-                      <a:pPr algn="l"/>
-                      <a:r>
-                        <a:rPr sz="1000" b="0">
-                          <a:solidFill>
-                            <a:srgbClr val="1D1B43"/>
-                          </a:solidFill>
-                          <a:latin typeface="Calibri"/>
-                        </a:rPr>
-                        <a:t>155</a:t>
-                      </a:r>
-                    </a:p>
-                  </a:txBody>
-                  <a:tcPr>
-                    <a:solidFill>
-                      <a:srgbClr val="F2F2F2"/>
-                    </a:solidFill>
-                  </a:tcPr>
-                </a:tc>
-                <a:tc>
-                  <a:txBody>
-                    <a:bodyPr/>
-                    <a:lstStyle/>
-                    <a:p>
-                      <a:pPr algn="l"/>
-                      <a:r>
-                        <a:rPr sz="1000" b="0">
-                          <a:solidFill>
-                            <a:srgbClr val="1D1B43"/>
-                          </a:solidFill>
-                          <a:latin typeface="Calibri"/>
-                        </a:rPr>
-                        <a:t>150</a:t>
-                      </a:r>
-                    </a:p>
-                  </a:txBody>
-                  <a:tcPr>
-                    <a:solidFill>
-                      <a:srgbClr val="F2F2F2"/>
-                    </a:solidFill>
-                  </a:tcPr>
-                </a:tc>
-                <a:tc>
-                  <a:txBody>
-                    <a:bodyPr/>
-                    <a:lstStyle/>
-                    <a:p>
-                      <a:pPr algn="l"/>
-                      <a:r>
-                        <a:rPr sz="1000" b="0">
-                          <a:solidFill>
-                            <a:srgbClr val="1D1B43"/>
-                          </a:solidFill>
-                          <a:latin typeface="Calibri"/>
-                        </a:rPr>
-                        <a:t>5</a:t>
-                      </a:r>
-                    </a:p>
-                  </a:txBody>
-                  <a:tcPr>
-                    <a:solidFill>
-                      <a:srgbClr val="F2F2F2"/>
-                    </a:solidFill>
-                  </a:tcPr>
-                </a:tc>
-                <a:tc>
-                  <a:txBody>
-                    <a:bodyPr/>
-                    <a:lstStyle/>
-                    <a:p>
-                      <a:pPr algn="l"/>
-                      <a:r>
-                        <a:rPr sz="1000" b="0">
-                          <a:solidFill>
-                            <a:srgbClr val="1D1B43"/>
-                          </a:solidFill>
-                          <a:latin typeface="Calibri"/>
-                        </a:rPr>
-                        <a:t>96.8%</a:t>
-                      </a:r>
-                    </a:p>
-                  </a:txBody>
-                  <a:tcPr>
-                    <a:solidFill>
-                      <a:srgbClr val="F2F2F2"/>
                     </a:solidFill>
                   </a:tcPr>
                 </a:tc>
@@ -5191,7 +5061,7 @@
                 </a:solidFill>
                 <a:latin typeface="Calibri"/>
               </a:rPr>
-              <a:t>PERFORMANCE: 96.8% - EXCELENTE</a:t>
+              <a:t>PERFORMANCE: 98.5% - EXCELENTE</a:t>
             </a:r>
           </a:p>
         </p:txBody>
@@ -5276,7 +5146,7 @@
                 </a:solidFill>
                 <a:latin typeface="Calibri"/>
               </a:rPr>
-              <a:t>OCORRENCIAS FORA DO PRAZO (5)</a:t>
+              <a:t>OCORRENCIAS FORA DO PRAZO (4)</a:t>
             </a:r>
           </a:p>
         </p:txBody>
@@ -5334,7 +5204,7 @@
         </p:nvGraphicFramePr>
         <p:xfrm>
           <a:off x="457200" y="1828800"/>
-          <a:ext cx="11429999" cy="2304288"/>
+          <a:ext cx="11429999" cy="1920240"/>
         </p:xfrm>
         <a:graphic>
           <a:graphicData uri="http://schemas.openxmlformats.org/drawingml/2006/table">
@@ -5480,7 +5350,7 @@
                           </a:solidFill>
                           <a:latin typeface="Calibri"/>
                         </a:rPr>
-                        <a:t>280039</a:t>
+                        <a:t>276150</a:t>
                       </a:r>
                     </a:p>
                   </a:txBody>
@@ -5503,7 +5373,7 @@
                           </a:solidFill>
                           <a:latin typeface="Calibri"/>
                         </a:rPr>
-                        <a:t>TECNOLOGIA DA MANUTE - MACEIO / AL</a:t>
+                        <a:t>WILSON SONS LOGISTIC - SANTO ANDRE / SP</a:t>
                       </a:r>
                     </a:p>
                   </a:txBody>
@@ -5526,7 +5396,7 @@
                           </a:solidFill>
                           <a:latin typeface="Calibri"/>
                         </a:rPr>
-                        <a:t>MACEIO/AL</a:t>
+                        <a:t>SANTO ANDRE/SP</a:t>
                       </a:r>
                     </a:p>
                   </a:txBody>
@@ -5549,7 +5419,7 @@
                           </a:solidFill>
                           <a:latin typeface="Calibri"/>
                         </a:rPr>
-                        <a:t>07/05/2026</a:t>
+                        <a:t>27/04/2026</a:t>
                       </a:r>
                     </a:p>
                   </a:txBody>
@@ -5572,7 +5442,7 @@
                           </a:solidFill>
                           <a:latin typeface="Calibri"/>
                         </a:rPr>
-                        <a:t>ENTREGUE FORA DO PRAZO</a:t>
+                        <a:t>FORA DO PRAZO</a:t>
                       </a:r>
                     </a:p>
                   </a:txBody>
@@ -5597,7 +5467,7 @@
                           </a:solidFill>
                           <a:latin typeface="Calibri"/>
                         </a:rPr>
-                        <a:t>281685</a:t>
+                        <a:t>277942</a:t>
                       </a:r>
                     </a:p>
                   </a:txBody>
@@ -5620,7 +5490,7 @@
                           </a:solidFill>
                           <a:latin typeface="Calibri"/>
                         </a:rPr>
-                        <a:t>WILSON SONS LOGISTIC - SANTO ANDRE / SP</a:t>
+                        <a:t>CORSUL COMERCIO E RE - JOINVILLE / SC</a:t>
                       </a:r>
                     </a:p>
                   </a:txBody>
@@ -5643,7 +5513,7 @@
                           </a:solidFill>
                           <a:latin typeface="Calibri"/>
                         </a:rPr>
-                        <a:t>SANTO ANDRE/SP</a:t>
+                        <a:t>JOINVILLE/SC</a:t>
                       </a:r>
                     </a:p>
                   </a:txBody>
@@ -5666,7 +5536,7 @@
                           </a:solidFill>
                           <a:latin typeface="Calibri"/>
                         </a:rPr>
-                        <a:t>05/05/2026</a:t>
+                        <a:t>14/04/2026</a:t>
                       </a:r>
                     </a:p>
                   </a:txBody>
@@ -5714,7 +5584,7 @@
                           </a:solidFill>
                           <a:latin typeface="Calibri"/>
                         </a:rPr>
-                        <a:t>281849</a:t>
+                        <a:t>278080</a:t>
                       </a:r>
                     </a:p>
                   </a:txBody>
@@ -5737,7 +5607,7 @@
                           </a:solidFill>
                           <a:latin typeface="Calibri"/>
                         </a:rPr>
-                        <a:t>CORSUL COMERCIO E RE - SAO JOSE / SC</a:t>
+                        <a:t>CORSUL COMERCIO E RE - INDAIAL / SC</a:t>
                       </a:r>
                     </a:p>
                   </a:txBody>
@@ -5760,7 +5630,7 @@
                           </a:solidFill>
                           <a:latin typeface="Calibri"/>
                         </a:rPr>
-                        <a:t>SAO JOSE/SC</a:t>
+                        <a:t>INDAIAL/SC</a:t>
                       </a:r>
                     </a:p>
                   </a:txBody>
@@ -5783,7 +5653,7 @@
                           </a:solidFill>
                           <a:latin typeface="Calibri"/>
                         </a:rPr>
-                        <a:t>12/05/2026</a:t>
+                        <a:t>16/04/2026</a:t>
                       </a:r>
                     </a:p>
                   </a:txBody>
@@ -5831,7 +5701,7 @@
                           </a:solidFill>
                           <a:latin typeface="Calibri"/>
                         </a:rPr>
-                        <a:t>282443</a:t>
+                        <a:t>280019</a:t>
                       </a:r>
                     </a:p>
                   </a:txBody>
@@ -5854,7 +5724,7 @@
                           </a:solidFill>
                           <a:latin typeface="Calibri"/>
                         </a:rPr>
-                        <a:t>EXATA CARGO - GUARULHOS / SP</a:t>
+                        <a:t>1000 MARCAS SAFETY B - ARACARIGUAMA / SP</a:t>
                       </a:r>
                     </a:p>
                   </a:txBody>
@@ -5877,7 +5747,7 @@
                           </a:solidFill>
                           <a:latin typeface="Calibri"/>
                         </a:rPr>
-                        <a:t>GUARULHOS/SP</a:t>
+                        <a:t>ARACARIGUAMA/SP</a:t>
                       </a:r>
                     </a:p>
                   </a:txBody>
@@ -5900,7 +5770,7 @@
                           </a:solidFill>
                           <a:latin typeface="Calibri"/>
                         </a:rPr>
-                        <a:t>11/05/2026</a:t>
+                        <a:t>24/04/2026</a:t>
                       </a:r>
                     </a:p>
                   </a:txBody>
@@ -5930,123 +5800,6 @@
                   <a:tcPr>
                     <a:solidFill>
                       <a:srgbClr val="F2F2F2"/>
-                    </a:solidFill>
-                  </a:tcPr>
-                </a:tc>
-              </a:tr>
-              <a:tr h="384048">
-                <a:tc>
-                  <a:txBody>
-                    <a:bodyPr/>
-                    <a:lstStyle/>
-                    <a:p>
-                      <a:pPr algn="l"/>
-                      <a:r>
-                        <a:rPr sz="1000" b="0">
-                          <a:solidFill>
-                            <a:srgbClr val="1D1B43"/>
-                          </a:solidFill>
-                          <a:latin typeface="Calibri"/>
-                        </a:rPr>
-                        <a:t>282599</a:t>
-                      </a:r>
-                    </a:p>
-                  </a:txBody>
-                  <a:tcPr>
-                    <a:solidFill>
-                      <a:srgbClr val="FFFFFF"/>
-                    </a:solidFill>
-                  </a:tcPr>
-                </a:tc>
-                <a:tc>
-                  <a:txBody>
-                    <a:bodyPr/>
-                    <a:lstStyle/>
-                    <a:p>
-                      <a:pPr algn="l"/>
-                      <a:r>
-                        <a:rPr sz="1000" b="0">
-                          <a:solidFill>
-                            <a:srgbClr val="1D1B43"/>
-                          </a:solidFill>
-                          <a:latin typeface="Calibri"/>
-                        </a:rPr>
-                        <a:t>DIMENSIONAL BRASIL S - GARUVA / SC</a:t>
-                      </a:r>
-                    </a:p>
-                  </a:txBody>
-                  <a:tcPr>
-                    <a:solidFill>
-                      <a:srgbClr val="FFFFFF"/>
-                    </a:solidFill>
-                  </a:tcPr>
-                </a:tc>
-                <a:tc>
-                  <a:txBody>
-                    <a:bodyPr/>
-                    <a:lstStyle/>
-                    <a:p>
-                      <a:pPr algn="l"/>
-                      <a:r>
-                        <a:rPr sz="1000" b="0">
-                          <a:solidFill>
-                            <a:srgbClr val="1D1B43"/>
-                          </a:solidFill>
-                          <a:latin typeface="Calibri"/>
-                        </a:rPr>
-                        <a:t>GARUVA/SC</a:t>
-                      </a:r>
-                    </a:p>
-                  </a:txBody>
-                  <a:tcPr>
-                    <a:solidFill>
-                      <a:srgbClr val="FFFFFF"/>
-                    </a:solidFill>
-                  </a:tcPr>
-                </a:tc>
-                <a:tc>
-                  <a:txBody>
-                    <a:bodyPr/>
-                    <a:lstStyle/>
-                    <a:p>
-                      <a:pPr algn="l"/>
-                      <a:r>
-                        <a:rPr sz="1000" b="0">
-                          <a:solidFill>
-                            <a:srgbClr val="1D1B43"/>
-                          </a:solidFill>
-                          <a:latin typeface="Calibri"/>
-                        </a:rPr>
-                        <a:t>19/05/2026</a:t>
-                      </a:r>
-                    </a:p>
-                  </a:txBody>
-                  <a:tcPr>
-                    <a:solidFill>
-                      <a:srgbClr val="FFFFFF"/>
-                    </a:solidFill>
-                  </a:tcPr>
-                </a:tc>
-                <a:tc>
-                  <a:txBody>
-                    <a:bodyPr/>
-                    <a:lstStyle/>
-                    <a:p>
-                      <a:pPr algn="l"/>
-                      <a:r>
-                        <a:rPr sz="1000" b="0">
-                          <a:solidFill>
-                            <a:srgbClr val="1D1B43"/>
-                          </a:solidFill>
-                          <a:latin typeface="Calibri"/>
-                        </a:rPr>
-                        <a:t>FORA DO PRAZO</a:t>
-                      </a:r>
-                    </a:p>
-                  </a:txBody>
-                  <a:tcPr>
-                    <a:solidFill>
-                      <a:srgbClr val="FFFFFF"/>
                     </a:solidFill>
                   </a:tcPr>
                 </a:tc>
@@ -6386,7 +6139,7 @@
                           </a:solidFill>
                           <a:latin typeface="Calibri"/>
                         </a:rPr>
-                        <a:t>87</a:t>
+                        <a:t>149</a:t>
                       </a:r>
                     </a:p>
                   </a:txBody>
@@ -6409,7 +6162,7 @@
                           </a:solidFill>
                           <a:latin typeface="Calibri"/>
                         </a:rPr>
-                        <a:t>85</a:t>
+                        <a:t>147</a:t>
                       </a:r>
                     </a:p>
                   </a:txBody>
@@ -6455,7 +6208,7 @@
                           </a:solidFill>
                           <a:latin typeface="Calibri"/>
                         </a:rPr>
-                        <a:t>97.7%</a:t>
+                        <a:t>98.7%</a:t>
                       </a:r>
                     </a:p>
                   </a:txBody>
@@ -6526,7 +6279,7 @@
                           </a:solidFill>
                           <a:latin typeface="Calibri"/>
                         </a:rPr>
-                        <a:t>18</a:t>
+                        <a:t>34</a:t>
                       </a:r>
                     </a:p>
                   </a:txBody>
@@ -6549,7 +6302,7 @@
                           </a:solidFill>
                           <a:latin typeface="Calibri"/>
                         </a:rPr>
-                        <a:t>16</a:t>
+                        <a:t>32</a:t>
                       </a:r>
                     </a:p>
                   </a:txBody>
@@ -6595,7 +6348,7 @@
                           </a:solidFill>
                           <a:latin typeface="Calibri"/>
                         </a:rPr>
-                        <a:t>88.9%</a:t>
+                        <a:t>94.1%</a:t>
                       </a:r>
                     </a:p>
                   </a:txBody>
@@ -6643,7 +6396,7 @@
                           </a:solidFill>
                           <a:latin typeface="Calibri"/>
                         </a:rPr>
-                        <a:t>ES</a:t>
+                        <a:t>MG</a:t>
                       </a:r>
                     </a:p>
                   </a:txBody>
@@ -6666,7 +6419,7 @@
                           </a:solidFill>
                           <a:latin typeface="Calibri"/>
                         </a:rPr>
-                        <a:t>13</a:t>
+                        <a:t>24</a:t>
                       </a:r>
                     </a:p>
                   </a:txBody>
@@ -6689,7 +6442,7 @@
                           </a:solidFill>
                           <a:latin typeface="Calibri"/>
                         </a:rPr>
-                        <a:t>13</a:t>
+                        <a:t>24</a:t>
                       </a:r>
                     </a:p>
                   </a:txBody>
@@ -6783,7 +6536,7 @@
                           </a:solidFill>
                           <a:latin typeface="Calibri"/>
                         </a:rPr>
-                        <a:t>RS</a:t>
+                        <a:t>ES</a:t>
                       </a:r>
                     </a:p>
                   </a:txBody>
@@ -6806,7 +6559,7 @@
                           </a:solidFill>
                           <a:latin typeface="Calibri"/>
                         </a:rPr>
-                        <a:t>10</a:t>
+                        <a:t>23</a:t>
                       </a:r>
                     </a:p>
                   </a:txBody>
@@ -6829,7 +6582,7 @@
                           </a:solidFill>
                           <a:latin typeface="Calibri"/>
                         </a:rPr>
-                        <a:t>10</a:t>
+                        <a:t>23</a:t>
                       </a:r>
                     </a:p>
                   </a:txBody>
@@ -6923,7 +6676,7 @@
                           </a:solidFill>
                           <a:latin typeface="Calibri"/>
                         </a:rPr>
-                        <a:t>PR</a:t>
+                        <a:t>BA</a:t>
                       </a:r>
                     </a:p>
                   </a:txBody>
@@ -6946,7 +6699,7 @@
                           </a:solidFill>
                           <a:latin typeface="Calibri"/>
                         </a:rPr>
-                        <a:t>7</a:t>
+                        <a:t>9</a:t>
                       </a:r>
                     </a:p>
                   </a:txBody>
@@ -6969,7 +6722,7 @@
                           </a:solidFill>
                           <a:latin typeface="Calibri"/>
                         </a:rPr>
-                        <a:t>7</a:t>
+                        <a:t>9</a:t>
                       </a:r>
                     </a:p>
                   </a:txBody>
@@ -7063,7 +6816,7 @@
                           </a:solidFill>
                           <a:latin typeface="Calibri"/>
                         </a:rPr>
-                        <a:t>MG</a:t>
+                        <a:t>PR</a:t>
                       </a:r>
                     </a:p>
                   </a:txBody>
@@ -7086,7 +6839,7 @@
                           </a:solidFill>
                           <a:latin typeface="Calibri"/>
                         </a:rPr>
-                        <a:t>7</a:t>
+                        <a:t>8</a:t>
                       </a:r>
                     </a:p>
                   </a:txBody>
@@ -7109,7 +6862,7 @@
                           </a:solidFill>
                           <a:latin typeface="Calibri"/>
                         </a:rPr>
-                        <a:t>7</a:t>
+                        <a:t>8</a:t>
                       </a:r>
                     </a:p>
                   </a:txBody>
@@ -7203,7 +6956,7 @@
                           </a:solidFill>
                           <a:latin typeface="Calibri"/>
                         </a:rPr>
-                        <a:t>GO</a:t>
+                        <a:t>RS</a:t>
                       </a:r>
                     </a:p>
                   </a:txBody>
@@ -7226,7 +6979,7 @@
                           </a:solidFill>
                           <a:latin typeface="Calibri"/>
                         </a:rPr>
-                        <a:t>4</a:t>
+                        <a:t>7</a:t>
                       </a:r>
                     </a:p>
                   </a:txBody>
@@ -7249,7 +7002,7 @@
                           </a:solidFill>
                           <a:latin typeface="Calibri"/>
                         </a:rPr>
-                        <a:t>4</a:t>
+                        <a:t>7</a:t>
                       </a:r>
                     </a:p>
                   </a:txBody>
@@ -7343,7 +7096,7 @@
                           </a:solidFill>
                           <a:latin typeface="Calibri"/>
                         </a:rPr>
-                        <a:t>PA</a:t>
+                        <a:t>GO</a:t>
                       </a:r>
                     </a:p>
                   </a:txBody>
@@ -7483,7 +7236,7 @@
                           </a:solidFill>
                           <a:latin typeface="Calibri"/>
                         </a:rPr>
-                        <a:t>BA</a:t>
+                        <a:t>MA</a:t>
                       </a:r>
                     </a:p>
                   </a:txBody>
@@ -7506,7 +7259,7 @@
                           </a:solidFill>
                           <a:latin typeface="Calibri"/>
                         </a:rPr>
-                        <a:t>2</a:t>
+                        <a:t>3</a:t>
                       </a:r>
                     </a:p>
                   </a:txBody>
@@ -7529,7 +7282,7 @@
                           </a:solidFill>
                           <a:latin typeface="Calibri"/>
                         </a:rPr>
-                        <a:t>2</a:t>
+                        <a:t>3</a:t>
                       </a:r>
                     </a:p>
                   </a:txBody>
@@ -7623,7 +7376,7 @@
                           </a:solidFill>
                           <a:latin typeface="Calibri"/>
                         </a:rPr>
-                        <a:t>AL</a:t>
+                        <a:t>PA</a:t>
                       </a:r>
                     </a:p>
                   </a:txBody>
@@ -7646,7 +7399,7 @@
                           </a:solidFill>
                           <a:latin typeface="Calibri"/>
                         </a:rPr>
-                        <a:t>1</a:t>
+                        <a:t>3</a:t>
                       </a:r>
                     </a:p>
                   </a:txBody>
@@ -7669,6 +7422,29 @@
                           </a:solidFill>
                           <a:latin typeface="Calibri"/>
                         </a:rPr>
+                        <a:t>3</a:t>
+                      </a:r>
+                    </a:p>
+                  </a:txBody>
+                  <a:tcPr>
+                    <a:solidFill>
+                      <a:srgbClr val="F2F2F2"/>
+                    </a:solidFill>
+                  </a:tcPr>
+                </a:tc>
+                <a:tc>
+                  <a:txBody>
+                    <a:bodyPr/>
+                    <a:lstStyle/>
+                    <a:p>
+                      <a:pPr algn="l"/>
+                      <a:r>
+                        <a:rPr sz="1000" b="0">
+                          <a:solidFill>
+                            <a:srgbClr val="1D1B43"/>
+                          </a:solidFill>
+                          <a:latin typeface="Calibri"/>
+                        </a:rPr>
                         <a:t>0</a:t>
                       </a:r>
                     </a:p>
@@ -7692,7 +7468,7 @@
                           </a:solidFill>
                           <a:latin typeface="Calibri"/>
                         </a:rPr>
-                        <a:t>1</a:t>
+                        <a:t>100.0%</a:t>
                       </a:r>
                     </a:p>
                   </a:txBody>
@@ -7715,30 +7491,7 @@
                           </a:solidFill>
                           <a:latin typeface="Calibri"/>
                         </a:rPr>
-                        <a:t>0.0%</a:t>
-                      </a:r>
-                    </a:p>
-                  </a:txBody>
-                  <a:tcPr>
-                    <a:solidFill>
-                      <a:srgbClr val="F2F2F2"/>
-                    </a:solidFill>
-                  </a:tcPr>
-                </a:tc>
-                <a:tc>
-                  <a:txBody>
-                    <a:bodyPr/>
-                    <a:lstStyle/>
-                    <a:p>
-                      <a:pPr algn="l"/>
-                      <a:r>
-                        <a:rPr sz="1000" b="0">
-                          <a:solidFill>
-                            <a:srgbClr val="1D1B43"/>
-                          </a:solidFill>
-                          <a:latin typeface="Calibri"/>
-                        </a:rPr>
-                        <a:t>Atencao</a:t>
+                        <a:t>Excelente</a:t>
                       </a:r>
                     </a:p>
                   </a:txBody>
@@ -7833,7 +7586,7 @@
                 </a:solidFill>
                 <a:latin typeface="Calibri"/>
               </a:rPr>
-              <a:t>TOP DESTINATARIOS (41 pontos)</a:t>
+              <a:t>TOP DESTINATARIOS (51 pontos)</a:t>
             </a:r>
           </a:p>
         </p:txBody>
@@ -8108,7 +7861,7 @@
                           </a:solidFill>
                           <a:latin typeface="Calibri"/>
                         </a:rPr>
-                        <a:t>WILSON SONS LOGISTIC - SANTO ANDRE / SP</a:t>
+                        <a:t>BUNZL EQUIPAMENTOS P - GUARULHOS / SP</a:t>
                       </a:r>
                     </a:p>
                   </a:txBody>
@@ -8131,7 +7884,7 @@
                           </a:solidFill>
                           <a:latin typeface="Calibri"/>
                         </a:rPr>
-                        <a:t>17</a:t>
+                        <a:t>40</a:t>
                       </a:r>
                     </a:p>
                   </a:txBody>
@@ -8154,7 +7907,7 @@
                           </a:solidFill>
                           <a:latin typeface="Calibri"/>
                         </a:rPr>
-                        <a:t>16</a:t>
+                        <a:t>40</a:t>
                       </a:r>
                     </a:p>
                   </a:txBody>
@@ -8177,7 +7930,7 @@
                           </a:solidFill>
                           <a:latin typeface="Calibri"/>
                         </a:rPr>
-                        <a:t>1</a:t>
+                        <a:t>0</a:t>
                       </a:r>
                     </a:p>
                   </a:txBody>
@@ -8200,7 +7953,7 @@
                           </a:solidFill>
                           <a:latin typeface="Calibri"/>
                         </a:rPr>
-                        <a:t>94.1%</a:t>
+                        <a:t>100.0%</a:t>
                       </a:r>
                     </a:p>
                   </a:txBody>
@@ -8223,7 +7976,7 @@
                           </a:solidFill>
                           <a:latin typeface="Calibri"/>
                         </a:rPr>
-                        <a:t>Regular</a:t>
+                        <a:t>Excelente</a:t>
                       </a:r>
                     </a:p>
                   </a:txBody>
@@ -8294,7 +8047,7 @@
                           </a:solidFill>
                           <a:latin typeface="Calibri"/>
                         </a:rPr>
-                        <a:t>15</a:t>
+                        <a:t>21</a:t>
                       </a:r>
                     </a:p>
                   </a:txBody>
@@ -8317,7 +8070,7 @@
                           </a:solidFill>
                           <a:latin typeface="Calibri"/>
                         </a:rPr>
-                        <a:t>14</a:t>
+                        <a:t>21</a:t>
                       </a:r>
                     </a:p>
                   </a:txBody>
@@ -8340,7 +8093,7 @@
                           </a:solidFill>
                           <a:latin typeface="Calibri"/>
                         </a:rPr>
-                        <a:t>1</a:t>
+                        <a:t>0</a:t>
                       </a:r>
                     </a:p>
                   </a:txBody>
@@ -8363,7 +8116,7 @@
                           </a:solidFill>
                           <a:latin typeface="Calibri"/>
                         </a:rPr>
-                        <a:t>93.3%</a:t>
+                        <a:t>100.0%</a:t>
                       </a:r>
                     </a:p>
                   </a:txBody>
@@ -8386,7 +8139,7 @@
                           </a:solidFill>
                           <a:latin typeface="Calibri"/>
                         </a:rPr>
-                        <a:t>Regular</a:t>
+                        <a:t>Excelente</a:t>
                       </a:r>
                     </a:p>
                   </a:txBody>
@@ -8434,7 +8187,7 @@
                           </a:solidFill>
                           <a:latin typeface="Calibri"/>
                         </a:rPr>
-                        <a:t>NORTEL SUPRIMENTOS I - CAMPINAS / SP</a:t>
+                        <a:t>EXATA CARGO - GUARULHOS / SP</a:t>
                       </a:r>
                     </a:p>
                   </a:txBody>
@@ -8457,7 +8210,7 @@
                           </a:solidFill>
                           <a:latin typeface="Calibri"/>
                         </a:rPr>
-                        <a:t>10</a:t>
+                        <a:t>17</a:t>
                       </a:r>
                     </a:p>
                   </a:txBody>
@@ -8480,7 +8233,7 @@
                           </a:solidFill>
                           <a:latin typeface="Calibri"/>
                         </a:rPr>
-                        <a:t>10</a:t>
+                        <a:t>17</a:t>
                       </a:r>
                     </a:p>
                   </a:txBody>
@@ -8597,7 +8350,7 @@
                           </a:solidFill>
                           <a:latin typeface="Calibri"/>
                         </a:rPr>
-                        <a:t>BUNZL EQUIPAMENTOS P - GUARULHOS / SP</a:t>
+                        <a:t>FITASSUL COMERCIO DI - ITAJUBA / MG</a:t>
                       </a:r>
                     </a:p>
                   </a:txBody>
@@ -8620,7 +8373,7 @@
                           </a:solidFill>
                           <a:latin typeface="Calibri"/>
                         </a:rPr>
-                        <a:t>10</a:t>
+                        <a:t>14</a:t>
                       </a:r>
                     </a:p>
                   </a:txBody>
@@ -8643,7 +8396,7 @@
                           </a:solidFill>
                           <a:latin typeface="Calibri"/>
                         </a:rPr>
-                        <a:t>10</a:t>
+                        <a:t>14</a:t>
                       </a:r>
                     </a:p>
                   </a:txBody>
@@ -8760,7 +8513,7 @@
                           </a:solidFill>
                           <a:latin typeface="Calibri"/>
                         </a:rPr>
-                        <a:t>LUZ TRANSPORTES - GUARULHOS / SP</a:t>
+                        <a:t>SP EQUIPAMENTOS DE P - GUARULHOS / SP</a:t>
                       </a:r>
                     </a:p>
                   </a:txBody>
@@ -8783,7 +8536,7 @@
                           </a:solidFill>
                           <a:latin typeface="Calibri"/>
                         </a:rPr>
-                        <a:t>9</a:t>
+                        <a:t>14</a:t>
                       </a:r>
                     </a:p>
                   </a:txBody>
@@ -8806,7 +8559,7 @@
                           </a:solidFill>
                           <a:latin typeface="Calibri"/>
                         </a:rPr>
-                        <a:t>9</a:t>
+                        <a:t>14</a:t>
                       </a:r>
                     </a:p>
                   </a:txBody>
@@ -8923,7 +8676,7 @@
                           </a:solidFill>
                           <a:latin typeface="Calibri"/>
                         </a:rPr>
-                        <a:t>DIMENSIONAL BRASIL S - SERRA / ES</a:t>
+                        <a:t>NORTEL SUPRIMENTOS I - SERRA / ES</a:t>
                       </a:r>
                     </a:p>
                   </a:txBody>
@@ -8946,7 +8699,7 @@
                           </a:solidFill>
                           <a:latin typeface="Calibri"/>
                         </a:rPr>
-                        <a:t>8</a:t>
+                        <a:t>11</a:t>
                       </a:r>
                     </a:p>
                   </a:txBody>
@@ -8969,7 +8722,7 @@
                           </a:solidFill>
                           <a:latin typeface="Calibri"/>
                         </a:rPr>
-                        <a:t>8</a:t>
+                        <a:t>11</a:t>
                       </a:r>
                     </a:p>
                   </a:txBody>
@@ -9086,7 +8839,7 @@
                           </a:solidFill>
                           <a:latin typeface="Calibri"/>
                         </a:rPr>
-                        <a:t>EXATA CARGO - GUARULHOS / SP</a:t>
+                        <a:t>DIMENSIONAL BRASIL S - SERRA / ES</a:t>
                       </a:r>
                     </a:p>
                   </a:txBody>
@@ -9109,7 +8862,7 @@
                           </a:solidFill>
                           <a:latin typeface="Calibri"/>
                         </a:rPr>
-                        <a:t>7</a:t>
+                        <a:t>10</a:t>
                       </a:r>
                     </a:p>
                   </a:txBody>
@@ -9132,7 +8885,7 @@
                           </a:solidFill>
                           <a:latin typeface="Calibri"/>
                         </a:rPr>
-                        <a:t>6</a:t>
+                        <a:t>10</a:t>
                       </a:r>
                     </a:p>
                   </a:txBody>
@@ -9155,7 +8908,7 @@
                           </a:solidFill>
                           <a:latin typeface="Calibri"/>
                         </a:rPr>
-                        <a:t>1</a:t>
+                        <a:t>0</a:t>
                       </a:r>
                     </a:p>
                   </a:txBody>
@@ -9178,7 +8931,7 @@
                           </a:solidFill>
                           <a:latin typeface="Calibri"/>
                         </a:rPr>
-                        <a:t>85.7%</a:t>
+                        <a:t>100.0%</a:t>
                       </a:r>
                     </a:p>
                   </a:txBody>
@@ -9201,7 +8954,7 @@
                           </a:solidFill>
                           <a:latin typeface="Calibri"/>
                         </a:rPr>
-                        <a:t>Regular</a:t>
+                        <a:t>Excelente</a:t>
                       </a:r>
                     </a:p>
                   </a:txBody>
@@ -9249,7 +9002,7 @@
                           </a:solidFill>
                           <a:latin typeface="Calibri"/>
                         </a:rPr>
-                        <a:t>RF-BRA TRANSPORTES L - GUARULHOS / SP</a:t>
+                        <a:t>ATIVA DISTRIBUICAO E - SAO PAULO / SP</a:t>
                       </a:r>
                     </a:p>
                   </a:txBody>
@@ -9272,7 +9025,7 @@
                           </a:solidFill>
                           <a:latin typeface="Calibri"/>
                         </a:rPr>
-                        <a:t>5</a:t>
+                        <a:t>9</a:t>
                       </a:r>
                     </a:p>
                   </a:txBody>
@@ -9295,7 +9048,7 @@
                           </a:solidFill>
                           <a:latin typeface="Calibri"/>
                         </a:rPr>
-                        <a:t>5</a:t>
+                        <a:t>9</a:t>
                       </a:r>
                     </a:p>
                   </a:txBody>
@@ -9412,7 +9165,7 @@
                           </a:solidFill>
                           <a:latin typeface="Calibri"/>
                         </a:rPr>
-                        <a:t>ELETRONOR - DISTRIBU - CAXIAS DO SUL / RS</a:t>
+                        <a:t>BUNZL EQUIPAMENTOS P - CONTAGEM / MG</a:t>
                       </a:r>
                     </a:p>
                   </a:txBody>
@@ -9435,7 +9188,7 @@
                           </a:solidFill>
                           <a:latin typeface="Calibri"/>
                         </a:rPr>
-                        <a:t>5</a:t>
+                        <a:t>9</a:t>
                       </a:r>
                     </a:p>
                   </a:txBody>
@@ -9458,7 +9211,7 @@
                           </a:solidFill>
                           <a:latin typeface="Calibri"/>
                         </a:rPr>
-                        <a:t>5</a:t>
+                        <a:t>9</a:t>
                       </a:r>
                     </a:p>
                   </a:txBody>
@@ -9575,7 +9328,7 @@
                           </a:solidFill>
                           <a:latin typeface="Calibri"/>
                         </a:rPr>
-                        <a:t>NORTEL SUPRIMENTOS I - SERRA / ES</a:t>
+                        <a:t>WILSON SONS LOGISTIC - SANTO ANDRE / SP</a:t>
                       </a:r>
                     </a:p>
                   </a:txBody>
@@ -9598,7 +9351,7 @@
                           </a:solidFill>
                           <a:latin typeface="Calibri"/>
                         </a:rPr>
-                        <a:t>5</a:t>
+                        <a:t>9</a:t>
                       </a:r>
                     </a:p>
                   </a:txBody>
@@ -9621,7 +9374,7 @@
                           </a:solidFill>
                           <a:latin typeface="Calibri"/>
                         </a:rPr>
-                        <a:t>5</a:t>
+                        <a:t>8</a:t>
                       </a:r>
                     </a:p>
                   </a:txBody>
@@ -9644,7 +9397,7 @@
                           </a:solidFill>
                           <a:latin typeface="Calibri"/>
                         </a:rPr>
-                        <a:t>0</a:t>
+                        <a:t>1</a:t>
                       </a:r>
                     </a:p>
                   </a:txBody>
@@ -9667,7 +9420,7 @@
                           </a:solidFill>
                           <a:latin typeface="Calibri"/>
                         </a:rPr>
-                        <a:t>100.0%</a:t>
+                        <a:t>88.9%</a:t>
                       </a:r>
                     </a:p>
                   </a:txBody>
@@ -9690,7 +9443,7 @@
                           </a:solidFill>
                           <a:latin typeface="Calibri"/>
                         </a:rPr>
-                        <a:t>Excelente</a:t>
+                        <a:t>Regular</a:t>
                       </a:r>
                     </a:p>
                   </a:txBody>
@@ -9738,7 +9491,7 @@
                           </a:solidFill>
                           <a:latin typeface="Calibri"/>
                         </a:rPr>
-                        <a:t>IR NEUTZLING &amp; C - PELOTAS / RS</a:t>
+                        <a:t>LUZ TRANSPORTES - GUARULHOS / SP</a:t>
                       </a:r>
                     </a:p>
                   </a:txBody>
@@ -9761,7 +9514,7 @@
                           </a:solidFill>
                           <a:latin typeface="Calibri"/>
                         </a:rPr>
-                        <a:t>4</a:t>
+                        <a:t>9</a:t>
                       </a:r>
                     </a:p>
                   </a:txBody>
@@ -9784,7 +9537,7 @@
                           </a:solidFill>
                           <a:latin typeface="Calibri"/>
                         </a:rPr>
-                        <a:t>4</a:t>
+                        <a:t>9</a:t>
                       </a:r>
                     </a:p>
                   </a:txBody>
@@ -9901,7 +9654,7 @@
                           </a:solidFill>
                           <a:latin typeface="Calibri"/>
                         </a:rPr>
-                        <a:t>FITASSUL COMERCIO DI - ITAJUBA / MG</a:t>
+                        <a:t>1000 MARCAS SAFETY B - ARACARIGUAMA / SP</a:t>
                       </a:r>
                     </a:p>
                   </a:txBody>
@@ -9924,7 +9677,7 @@
                           </a:solidFill>
                           <a:latin typeface="Calibri"/>
                         </a:rPr>
-                        <a:t>4</a:t>
+                        <a:t>8</a:t>
                       </a:r>
                     </a:p>
                   </a:txBody>
@@ -9947,7 +9700,7 @@
                           </a:solidFill>
                           <a:latin typeface="Calibri"/>
                         </a:rPr>
-                        <a:t>4</a:t>
+                        <a:t>7</a:t>
                       </a:r>
                     </a:p>
                   </a:txBody>
@@ -9970,7 +9723,7 @@
                           </a:solidFill>
                           <a:latin typeface="Calibri"/>
                         </a:rPr>
-                        <a:t>0</a:t>
+                        <a:t>1</a:t>
                       </a:r>
                     </a:p>
                   </a:txBody>
@@ -9993,7 +9746,7 @@
                           </a:solidFill>
                           <a:latin typeface="Calibri"/>
                         </a:rPr>
-                        <a:t>100.0%</a:t>
+                        <a:t>87.5%</a:t>
                       </a:r>
                     </a:p>
                   </a:txBody>
@@ -10016,7 +9769,7 @@
                           </a:solidFill>
                           <a:latin typeface="Calibri"/>
                         </a:rPr>
-                        <a:t>Excelente</a:t>
+                        <a:t>Regular</a:t>
                       </a:r>
                     </a:p>
                   </a:txBody>
@@ -10064,7 +9817,7 @@
                           </a:solidFill>
                           <a:latin typeface="Calibri"/>
                         </a:rPr>
-                        <a:t>NORTEL SUPRIMENTOS I - PARAUAPEBAS / PA</a:t>
+                        <a:t>NORTEL SUPRIMENTOS I - CAMPINAS / SP</a:t>
                       </a:r>
                     </a:p>
                   </a:txBody>
@@ -10087,7 +9840,7 @@
                           </a:solidFill>
                           <a:latin typeface="Calibri"/>
                         </a:rPr>
-                        <a:t>4</a:t>
+                        <a:t>8</a:t>
                       </a:r>
                     </a:p>
                   </a:txBody>
@@ -10110,7 +9863,7 @@
                           </a:solidFill>
                           <a:latin typeface="Calibri"/>
                         </a:rPr>
-                        <a:t>4</a:t>
+                        <a:t>8</a:t>
                       </a:r>
                     </a:p>
                   </a:txBody>
@@ -10227,7 +9980,7 @@
                           </a:solidFill>
                           <a:latin typeface="Calibri"/>
                         </a:rPr>
-                        <a:t>ATIVA DISTRIBUICAO E - SAO PAULO / SP</a:t>
+                        <a:t>RF-BRA TRANSPORTES L - GUARULHOS / SP</a:t>
                       </a:r>
                     </a:p>
                   </a:txBody>
@@ -10250,7 +10003,7 @@
                           </a:solidFill>
                           <a:latin typeface="Calibri"/>
                         </a:rPr>
-                        <a:t>4</a:t>
+                        <a:t>7</a:t>
                       </a:r>
                     </a:p>
                   </a:txBody>
@@ -10273,7 +10026,7 @@
                           </a:solidFill>
                           <a:latin typeface="Calibri"/>
                         </a:rPr>
-                        <a:t>4</a:t>
+                        <a:t>7</a:t>
                       </a:r>
                     </a:p>
                   </a:txBody>

--- a/HERCULES_EQUIPAMENTOS_DE_PROTE.pptx
+++ b/HERCULES_EQUIPAMENTOS_DE_PROTE.pptx
@@ -143,10 +143,13 @@
           </c:spPr>
           <c:cat>
             <c:strRef>
-              <c:f>Sheet1!$A$2:$A$2</c:f>
+              <c:f>Sheet1!$A$2:$A$3</c:f>
               <c:strCache>
-                <c:ptCount val="1"/>
+                <c:ptCount val="2"/>
                 <c:pt idx="0">
+                  <c:v>Maio 2026</c:v>
+                </c:pt>
+                <c:pt idx="1">
                   <c:v>Abril 2026</c:v>
                 </c:pt>
               </c:strCache>
@@ -154,11 +157,14 @@
           </c:cat>
           <c:val>
             <c:numRef>
-              <c:f>Sheet1!$B$2:$B$2</c:f>
+              <c:f>Sheet1!$B$2:$B$3</c:f>
               <c:numCache>
                 <c:formatCode>General</c:formatCode>
-                <c:ptCount val="1"/>
+                <c:ptCount val="2"/>
                 <c:pt idx="0">
+                  <c:v>146</c:v>
+                </c:pt>
+                <c:pt idx="1">
                   <c:v>265</c:v>
                 </c:pt>
               </c:numCache>
@@ -186,10 +192,13 @@
           </c:spPr>
           <c:cat>
             <c:strRef>
-              <c:f>Sheet1!$A$2:$A$2</c:f>
+              <c:f>Sheet1!$A$2:$A$3</c:f>
               <c:strCache>
-                <c:ptCount val="1"/>
+                <c:ptCount val="2"/>
                 <c:pt idx="0">
+                  <c:v>Maio 2026</c:v>
+                </c:pt>
+                <c:pt idx="1">
                   <c:v>Abril 2026</c:v>
                 </c:pt>
               </c:strCache>
@@ -197,11 +206,14 @@
           </c:cat>
           <c:val>
             <c:numRef>
-              <c:f>Sheet1!$C$2:$C$2</c:f>
+              <c:f>Sheet1!$C$2:$C$3</c:f>
               <c:numCache>
                 <c:formatCode>General</c:formatCode>
-                <c:ptCount val="1"/>
+                <c:ptCount val="2"/>
                 <c:pt idx="0">
+                  <c:v>5</c:v>
+                </c:pt>
+                <c:pt idx="1">
                   <c:v>4</c:v>
                 </c:pt>
               </c:numCache>
@@ -4142,7 +4154,7 @@
                           </a:solidFill>
                           <a:latin typeface="Calibri"/>
                         </a:rPr>
-                        <a:t>Marco 2026</a:t>
+                        <a:t>Maio 2026</a:t>
                       </a:r>
                     </a:p>
                   </a:txBody>
@@ -4236,7 +4248,7 @@
                           </a:solidFill>
                           <a:latin typeface="Calibri"/>
                         </a:rPr>
-                        <a:t>-</a:t>
+                        <a:t>151</a:t>
                       </a:r>
                     </a:p>
                   </a:txBody>
@@ -4282,7 +4294,7 @@
                           </a:solidFill>
                           <a:latin typeface="Calibri"/>
                         </a:rPr>
-                        <a:t>-</a:t>
+                        <a:t>+ 118</a:t>
                       </a:r>
                     </a:p>
                   </a:txBody>
@@ -4330,7 +4342,7 @@
                           </a:solidFill>
                           <a:latin typeface="Calibri"/>
                         </a:rPr>
-                        <a:t>-</a:t>
+                        <a:t>146</a:t>
                       </a:r>
                     </a:p>
                   </a:txBody>
@@ -4376,7 +4388,7 @@
                           </a:solidFill>
                           <a:latin typeface="Calibri"/>
                         </a:rPr>
-                        <a:t>-</a:t>
+                        <a:t>+ 119</a:t>
                       </a:r>
                     </a:p>
                   </a:txBody>
@@ -4424,7 +4436,7 @@
                           </a:solidFill>
                           <a:latin typeface="Calibri"/>
                         </a:rPr>
-                        <a:t>-</a:t>
+                        <a:t>5</a:t>
                       </a:r>
                     </a:p>
                   </a:txBody>
@@ -4470,7 +4482,7 @@
                           </a:solidFill>
                           <a:latin typeface="Calibri"/>
                         </a:rPr>
-                        <a:t>-</a:t>
+                        <a:t>- 1</a:t>
                       </a:r>
                     </a:p>
                   </a:txBody>
@@ -4518,7 +4530,7 @@
                           </a:solidFill>
                           <a:latin typeface="Calibri"/>
                         </a:rPr>
-                        <a:t>-</a:t>
+                        <a:t>96.7%</a:t>
                       </a:r>
                     </a:p>
                   </a:txBody>
@@ -4564,7 +4576,7 @@
                           </a:solidFill>
                           <a:latin typeface="Calibri"/>
                         </a:rPr>
-                        <a:t>-</a:t>
+                        <a:t>+ 1.8pp</a:t>
                       </a:r>
                     </a:p>
                   </a:txBody>
@@ -4735,7 +4747,7 @@
         </p:nvGraphicFramePr>
         <p:xfrm>
           <a:off x="7955279" y="2286000"/>
-          <a:ext cx="4480560" cy="877824"/>
+          <a:ext cx="4480560" cy="1316736"/>
         </p:xfrm>
         <a:graphic>
           <a:graphicData uri="http://schemas.openxmlformats.org/drawingml/2006/table">
@@ -4881,13 +4893,130 @@
                           </a:solidFill>
                           <a:latin typeface="Calibri"/>
                         </a:rPr>
+                        <a:t>Maio 2026</a:t>
+                      </a:r>
+                    </a:p>
+                  </a:txBody>
+                  <a:tcPr>
+                    <a:solidFill>
+                      <a:srgbClr val="FFFFFF"/>
+                    </a:solidFill>
+                  </a:tcPr>
+                </a:tc>
+                <a:tc>
+                  <a:txBody>
+                    <a:bodyPr/>
+                    <a:lstStyle/>
+                    <a:p>
+                      <a:pPr algn="l"/>
+                      <a:r>
+                        <a:rPr sz="1000" b="0">
+                          <a:solidFill>
+                            <a:srgbClr val="1D1B43"/>
+                          </a:solidFill>
+                          <a:latin typeface="Calibri"/>
+                        </a:rPr>
+                        <a:t>151</a:t>
+                      </a:r>
+                    </a:p>
+                  </a:txBody>
+                  <a:tcPr>
+                    <a:solidFill>
+                      <a:srgbClr val="FFFFFF"/>
+                    </a:solidFill>
+                  </a:tcPr>
+                </a:tc>
+                <a:tc>
+                  <a:txBody>
+                    <a:bodyPr/>
+                    <a:lstStyle/>
+                    <a:p>
+                      <a:pPr algn="l"/>
+                      <a:r>
+                        <a:rPr sz="1000" b="0">
+                          <a:solidFill>
+                            <a:srgbClr val="1D1B43"/>
+                          </a:solidFill>
+                          <a:latin typeface="Calibri"/>
+                        </a:rPr>
+                        <a:t>146</a:t>
+                      </a:r>
+                    </a:p>
+                  </a:txBody>
+                  <a:tcPr>
+                    <a:solidFill>
+                      <a:srgbClr val="FFFFFF"/>
+                    </a:solidFill>
+                  </a:tcPr>
+                </a:tc>
+                <a:tc>
+                  <a:txBody>
+                    <a:bodyPr/>
+                    <a:lstStyle/>
+                    <a:p>
+                      <a:pPr algn="l"/>
+                      <a:r>
+                        <a:rPr sz="1000" b="0">
+                          <a:solidFill>
+                            <a:srgbClr val="1D1B43"/>
+                          </a:solidFill>
+                          <a:latin typeface="Calibri"/>
+                        </a:rPr>
+                        <a:t>5</a:t>
+                      </a:r>
+                    </a:p>
+                  </a:txBody>
+                  <a:tcPr>
+                    <a:solidFill>
+                      <a:srgbClr val="FFFFFF"/>
+                    </a:solidFill>
+                  </a:tcPr>
+                </a:tc>
+                <a:tc>
+                  <a:txBody>
+                    <a:bodyPr/>
+                    <a:lstStyle/>
+                    <a:p>
+                      <a:pPr algn="l"/>
+                      <a:r>
+                        <a:rPr sz="1000" b="0">
+                          <a:solidFill>
+                            <a:srgbClr val="1D1B43"/>
+                          </a:solidFill>
+                          <a:latin typeface="Calibri"/>
+                        </a:rPr>
+                        <a:t>96.7%</a:t>
+                      </a:r>
+                    </a:p>
+                  </a:txBody>
+                  <a:tcPr>
+                    <a:solidFill>
+                      <a:srgbClr val="FFFFFF"/>
+                    </a:solidFill>
+                  </a:tcPr>
+                </a:tc>
+              </a:tr>
+              <a:tr h="438912">
+                <a:tc>
+                  <a:txBody>
+                    <a:bodyPr/>
+                    <a:lstStyle/>
+                    <a:p>
+                      <a:pPr algn="l"/>
+                      <a:r>
+                        <a:rPr sz="1000" b="0">
+                          <a:solidFill>
+                            <a:srgbClr val="1D1B43"/>
+                          </a:solidFill>
+                          <a:latin typeface="Calibri"/>
+                        </a:rPr>
                         <a:t>Abril 2026</a:t>
                       </a:r>
                     </a:p>
                   </a:txBody>
                   <a:tcPr>
                     <a:solidFill>
-                      <a:srgbClr val="FFFFFF"/>
+                      <a:srgbClr val="F2F2F2"/>
                     </a:solidFill>
                   </a:tcPr>
                 </a:tc>
@@ -4910,7 +5039,7 @@
                   </a:txBody>
                   <a:tcPr>
                     <a:solidFill>
-                      <a:srgbClr val="FFFFFF"/>
+                      <a:srgbClr val="F2F2F2"/>
                     </a:solidFill>
                   </a:tcPr>
                 </a:tc>
@@ -4933,7 +5062,7 @@
                   </a:txBody>
                   <a:tcPr>
                     <a:solidFill>
-                      <a:srgbClr val="FFFFFF"/>
+                      <a:srgbClr val="F2F2F2"/>
                     </a:solidFill>
                   </a:tcPr>
                 </a:tc>
@@ -4956,7 +5085,7 @@
                   </a:txBody>
                   <a:tcPr>
                     <a:solidFill>
-                      <a:srgbClr val="FFFFFF"/>
+                      <a:srgbClr val="F2F2F2"/>
                     </a:solidFill>
                   </a:tcPr>
                 </a:tc>
@@ -4979,7 +5108,7 @@
                   </a:txBody>
                   <a:tcPr>
                     <a:solidFill>
-                      <a:srgbClr val="FFFFFF"/>
+                      <a:srgbClr val="F2F2F2"/>
                     </a:solidFill>
                   </a:tcPr>
                 </a:tc>

--- a/HERCULES_EQUIPAMENTOS_DE_PROTE.pptx
+++ b/HERCULES_EQUIPAMENTOS_DE_PROTE.pptx
@@ -162,7 +162,7 @@
                 <c:formatCode>General</c:formatCode>
                 <c:ptCount val="2"/>
                 <c:pt idx="0">
-                  <c:v>146</c:v>
+                  <c:v>210</c:v>
                 </c:pt>
                 <c:pt idx="1">
                   <c:v>265</c:v>
@@ -211,7 +211,7 @@
                 <c:formatCode>General</c:formatCode>
                 <c:ptCount val="2"/>
                 <c:pt idx="0">
-                  <c:v>5</c:v>
+                  <c:v>10</c:v>
                 </c:pt>
                 <c:pt idx="1">
                   <c:v>4</c:v>
@@ -4248,7 +4248,7 @@
                           </a:solidFill>
                           <a:latin typeface="Calibri"/>
                         </a:rPr>
-                        <a:t>151</a:t>
+                        <a:t>220</a:t>
                       </a:r>
                     </a:p>
                   </a:txBody>
@@ -4294,7 +4294,7 @@
                           </a:solidFill>
                           <a:latin typeface="Calibri"/>
                         </a:rPr>
-                        <a:t>+ 118</a:t>
+                        <a:t>+ 49</a:t>
                       </a:r>
                     </a:p>
                   </a:txBody>
@@ -4342,7 +4342,7 @@
                           </a:solidFill>
                           <a:latin typeface="Calibri"/>
                         </a:rPr>
-                        <a:t>146</a:t>
+                        <a:t>210</a:t>
                       </a:r>
                     </a:p>
                   </a:txBody>
@@ -4388,7 +4388,7 @@
                           </a:solidFill>
                           <a:latin typeface="Calibri"/>
                         </a:rPr>
-                        <a:t>+ 119</a:t>
+                        <a:t>+ 55</a:t>
                       </a:r>
                     </a:p>
                   </a:txBody>
@@ -4436,7 +4436,7 @@
                           </a:solidFill>
                           <a:latin typeface="Calibri"/>
                         </a:rPr>
-                        <a:t>5</a:t>
+                        <a:t>10</a:t>
                       </a:r>
                     </a:p>
                   </a:txBody>
@@ -4482,7 +4482,7 @@
                           </a:solidFill>
                           <a:latin typeface="Calibri"/>
                         </a:rPr>
-                        <a:t>- 1</a:t>
+                        <a:t>- 6</a:t>
                       </a:r>
                     </a:p>
                   </a:txBody>
@@ -4530,7 +4530,7 @@
                           </a:solidFill>
                           <a:latin typeface="Calibri"/>
                         </a:rPr>
-                        <a:t>96.7%</a:t>
+                        <a:t>95.5%</a:t>
                       </a:r>
                     </a:p>
                   </a:txBody>
@@ -4576,7 +4576,7 @@
                           </a:solidFill>
                           <a:latin typeface="Calibri"/>
                         </a:rPr>
-                        <a:t>+ 1.8pp</a:t>
+                        <a:t>+ 3.0pp</a:t>
                       </a:r>
                     </a:p>
                   </a:txBody>
@@ -4916,7 +4916,7 @@
                           </a:solidFill>
                           <a:latin typeface="Calibri"/>
                         </a:rPr>
-                        <a:t>151</a:t>
+                        <a:t>220</a:t>
                       </a:r>
                     </a:p>
                   </a:txBody>
@@ -4939,7 +4939,7 @@
                           </a:solidFill>
                           <a:latin typeface="Calibri"/>
                         </a:rPr>
-                        <a:t>146</a:t>
+                        <a:t>210</a:t>
                       </a:r>
                     </a:p>
                   </a:txBody>
@@ -4962,7 +4962,7 @@
                           </a:solidFill>
                           <a:latin typeface="Calibri"/>
                         </a:rPr>
-                        <a:t>5</a:t>
+                        <a:t>10</a:t>
                       </a:r>
                     </a:p>
                   </a:txBody>
@@ -4985,7 +4985,7 @@
                           </a:solidFill>
                           <a:latin typeface="Calibri"/>
                         </a:rPr>
-                        <a:t>96.7%</a:t>
+                        <a:t>95.5%</a:t>
                       </a:r>
                     </a:p>
                   </a:txBody>

--- a/HERCULES_EQUIPAMENTOS_DE_PROTE.pptx
+++ b/HERCULES_EQUIPAMENTOS_DE_PROTE.pptx
@@ -147,10 +147,10 @@
               <c:strCache>
                 <c:ptCount val="2"/>
                 <c:pt idx="0">
-                  <c:v>Maio 2026</c:v>
+                  <c:v>Abril 2026</c:v>
                 </c:pt>
                 <c:pt idx="1">
-                  <c:v>Abril 2026</c:v>
+                  <c:v>Maio 2026</c:v>
                 </c:pt>
               </c:strCache>
             </c:strRef>
@@ -162,10 +162,10 @@
                 <c:formatCode>General</c:formatCode>
                 <c:ptCount val="2"/>
                 <c:pt idx="0">
-                  <c:v>210</c:v>
+                  <c:v>265</c:v>
                 </c:pt>
                 <c:pt idx="1">
-                  <c:v>265</c:v>
+                  <c:v>230</c:v>
                 </c:pt>
               </c:numCache>
             </c:numRef>
@@ -196,10 +196,10 @@
               <c:strCache>
                 <c:ptCount val="2"/>
                 <c:pt idx="0">
-                  <c:v>Maio 2026</c:v>
+                  <c:v>Abril 2026</c:v>
                 </c:pt>
                 <c:pt idx="1">
-                  <c:v>Abril 2026</c:v>
+                  <c:v>Maio 2026</c:v>
                 </c:pt>
               </c:strCache>
             </c:strRef>
@@ -211,10 +211,10 @@
                 <c:formatCode>General</c:formatCode>
                 <c:ptCount val="2"/>
                 <c:pt idx="0">
-                  <c:v>10</c:v>
+                  <c:v>4</c:v>
                 </c:pt>
                 <c:pt idx="1">
-                  <c:v>4</c:v>
+                  <c:v>9</c:v>
                 </c:pt>
               </c:numCache>
             </c:numRef>
@@ -3387,7 +3387,7 @@
                 </a:solidFill>
                 <a:latin typeface="Calibri"/>
               </a:rPr>
-              <a:t>INDICADORES ABRIL 2026</a:t>
+              <a:t>INDICADORES MAIO 2026</a:t>
             </a:r>
           </a:p>
         </p:txBody>
@@ -3708,7 +3708,7 @@
                 </a:solidFill>
                 <a:latin typeface="Calibri"/>
               </a:rPr>
-              <a:t>269</a:t>
+              <a:t>239</a:t>
             </a:r>
           </a:p>
         </p:txBody>
@@ -3823,7 +3823,7 @@
                 </a:solidFill>
                 <a:latin typeface="Calibri"/>
               </a:rPr>
-              <a:t>265</a:t>
+              <a:t>230</a:t>
             </a:r>
           </a:p>
         </p:txBody>
@@ -3938,7 +3938,7 @@
                 </a:solidFill>
                 <a:latin typeface="Calibri"/>
               </a:rPr>
-              <a:t>4</a:t>
+              <a:t>9</a:t>
             </a:r>
           </a:p>
         </p:txBody>
@@ -4053,7 +4053,7 @@
                 </a:solidFill>
                 <a:latin typeface="Calibri"/>
               </a:rPr>
-              <a:t>98.5%</a:t>
+              <a:t>96.2%</a:t>
             </a:r>
           </a:p>
         </p:txBody>
@@ -4154,30 +4154,30 @@
                           </a:solidFill>
                           <a:latin typeface="Calibri"/>
                         </a:rPr>
+                        <a:t>Abril 2026</a:t>
+                      </a:r>
+                    </a:p>
+                  </a:txBody>
+                  <a:tcPr>
+                    <a:solidFill>
+                      <a:srgbClr val="1D1B43"/>
+                    </a:solidFill>
+                  </a:tcPr>
+                </a:tc>
+                <a:tc>
+                  <a:txBody>
+                    <a:bodyPr/>
+                    <a:lstStyle/>
+                    <a:p>
+                      <a:pPr algn="ctr"/>
+                      <a:r>
+                        <a:rPr sz="1100" b="1">
+                          <a:solidFill>
+                            <a:srgbClr val="FFFFFF"/>
+                          </a:solidFill>
+                          <a:latin typeface="Calibri"/>
+                        </a:rPr>
                         <a:t>Maio 2026</a:t>
-                      </a:r>
-                    </a:p>
-                  </a:txBody>
-                  <a:tcPr>
-                    <a:solidFill>
-                      <a:srgbClr val="1D1B43"/>
-                    </a:solidFill>
-                  </a:tcPr>
-                </a:tc>
-                <a:tc>
-                  <a:txBody>
-                    <a:bodyPr/>
-                    <a:lstStyle/>
-                    <a:p>
-                      <a:pPr algn="ctr"/>
-                      <a:r>
-                        <a:rPr sz="1100" b="1">
-                          <a:solidFill>
-                            <a:srgbClr val="FFFFFF"/>
-                          </a:solidFill>
-                          <a:latin typeface="Calibri"/>
-                        </a:rPr>
-                        <a:t>Abril 2026</a:t>
                       </a:r>
                     </a:p>
                   </a:txBody>
@@ -4248,7 +4248,7 @@
                           </a:solidFill>
                           <a:latin typeface="Calibri"/>
                         </a:rPr>
-                        <a:t>220</a:t>
+                        <a:t>269</a:t>
                       </a:r>
                     </a:p>
                   </a:txBody>
@@ -4271,7 +4271,7 @@
                           </a:solidFill>
                           <a:latin typeface="Calibri"/>
                         </a:rPr>
-                        <a:t>269</a:t>
+                        <a:t>239</a:t>
                       </a:r>
                     </a:p>
                   </a:txBody>
@@ -4294,7 +4294,7 @@
                           </a:solidFill>
                           <a:latin typeface="Calibri"/>
                         </a:rPr>
-                        <a:t>+ 49</a:t>
+                        <a:t>- 30</a:t>
                       </a:r>
                     </a:p>
                   </a:txBody>
@@ -4342,7 +4342,7 @@
                           </a:solidFill>
                           <a:latin typeface="Calibri"/>
                         </a:rPr>
-                        <a:t>210</a:t>
+                        <a:t>265</a:t>
                       </a:r>
                     </a:p>
                   </a:txBody>
@@ -4365,7 +4365,7 @@
                           </a:solidFill>
                           <a:latin typeface="Calibri"/>
                         </a:rPr>
-                        <a:t>265</a:t>
+                        <a:t>230</a:t>
                       </a:r>
                     </a:p>
                   </a:txBody>
@@ -4388,7 +4388,7 @@
                           </a:solidFill>
                           <a:latin typeface="Calibri"/>
                         </a:rPr>
-                        <a:t>+ 55</a:t>
+                        <a:t>- 35</a:t>
                       </a:r>
                     </a:p>
                   </a:txBody>
@@ -4436,7 +4436,7 @@
                           </a:solidFill>
                           <a:latin typeface="Calibri"/>
                         </a:rPr>
-                        <a:t>10</a:t>
+                        <a:t>4</a:t>
                       </a:r>
                     </a:p>
                   </a:txBody>
@@ -4459,7 +4459,7 @@
                           </a:solidFill>
                           <a:latin typeface="Calibri"/>
                         </a:rPr>
-                        <a:t>4</a:t>
+                        <a:t>9</a:t>
                       </a:r>
                     </a:p>
                   </a:txBody>
@@ -4482,7 +4482,7 @@
                           </a:solidFill>
                           <a:latin typeface="Calibri"/>
                         </a:rPr>
-                        <a:t>- 6</a:t>
+                        <a:t>+ 5</a:t>
                       </a:r>
                     </a:p>
                   </a:txBody>
@@ -4530,7 +4530,7 @@
                           </a:solidFill>
                           <a:latin typeface="Calibri"/>
                         </a:rPr>
-                        <a:t>95.5%</a:t>
+                        <a:t>98.5%</a:t>
                       </a:r>
                     </a:p>
                   </a:txBody>
@@ -4553,7 +4553,7 @@
                           </a:solidFill>
                           <a:latin typeface="Calibri"/>
                         </a:rPr>
-                        <a:t>98.5%</a:t>
+                        <a:t>96.2%</a:t>
                       </a:r>
                     </a:p>
                   </a:txBody>
@@ -4576,7 +4576,7 @@
                           </a:solidFill>
                           <a:latin typeface="Calibri"/>
                         </a:rPr>
-                        <a:t>+ 3.0pp</a:t>
+                        <a:t>- 2.3pp</a:t>
                       </a:r>
                     </a:p>
                   </a:txBody>
@@ -4893,7 +4893,7 @@
                           </a:solidFill>
                           <a:latin typeface="Calibri"/>
                         </a:rPr>
-                        <a:t>Maio 2026</a:t>
+                        <a:t>Abril 2026</a:t>
                       </a:r>
                     </a:p>
                   </a:txBody>
@@ -4916,7 +4916,7 @@
                           </a:solidFill>
                           <a:latin typeface="Calibri"/>
                         </a:rPr>
-                        <a:t>220</a:t>
+                        <a:t>269</a:t>
                       </a:r>
                     </a:p>
                   </a:txBody>
@@ -4939,7 +4939,7 @@
                           </a:solidFill>
                           <a:latin typeface="Calibri"/>
                         </a:rPr>
-                        <a:t>210</a:t>
+                        <a:t>265</a:t>
                       </a:r>
                     </a:p>
                   </a:txBody>
@@ -4962,7 +4962,7 @@
                           </a:solidFill>
                           <a:latin typeface="Calibri"/>
                         </a:rPr>
-                        <a:t>10</a:t>
+                        <a:t>4</a:t>
                       </a:r>
                     </a:p>
                   </a:txBody>
@@ -4985,7 +4985,7 @@
                           </a:solidFill>
                           <a:latin typeface="Calibri"/>
                         </a:rPr>
-                        <a:t>95.5%</a:t>
+                        <a:t>98.5%</a:t>
                       </a:r>
                     </a:p>
                   </a:txBody>
@@ -5010,7 +5010,7 @@
                           </a:solidFill>
                           <a:latin typeface="Calibri"/>
                         </a:rPr>
-                        <a:t>Abril 2026</a:t>
+                        <a:t>Maio 2026</a:t>
                       </a:r>
                     </a:p>
                   </a:txBody>
@@ -5033,7 +5033,7 @@
                           </a:solidFill>
                           <a:latin typeface="Calibri"/>
                         </a:rPr>
-                        <a:t>269</a:t>
+                        <a:t>239</a:t>
                       </a:r>
                     </a:p>
                   </a:txBody>
@@ -5056,7 +5056,7 @@
                           </a:solidFill>
                           <a:latin typeface="Calibri"/>
                         </a:rPr>
-                        <a:t>265</a:t>
+                        <a:t>230</a:t>
                       </a:r>
                     </a:p>
                   </a:txBody>
@@ -5079,7 +5079,7 @@
                           </a:solidFill>
                           <a:latin typeface="Calibri"/>
                         </a:rPr>
-                        <a:t>4</a:t>
+                        <a:t>9</a:t>
                       </a:r>
                     </a:p>
                   </a:txBody>
@@ -5102,7 +5102,7 @@
                           </a:solidFill>
                           <a:latin typeface="Calibri"/>
                         </a:rPr>
-                        <a:t>98.5%</a:t>
+                        <a:t>96.2%</a:t>
                       </a:r>
                     </a:p>
                   </a:txBody>
@@ -5190,7 +5190,7 @@
                 </a:solidFill>
                 <a:latin typeface="Calibri"/>
               </a:rPr>
-              <a:t>PERFORMANCE: 98.5% - EXCELENTE</a:t>
+              <a:t>PERFORMANCE: 96.2% - EXCELENTE</a:t>
             </a:r>
           </a:p>
         </p:txBody>
@@ -5275,7 +5275,7 @@
                 </a:solidFill>
                 <a:latin typeface="Calibri"/>
               </a:rPr>
-              <a:t>OCORRENCIAS FORA DO PRAZO (4)</a:t>
+              <a:t>OCORRENCIAS FORA DO PRAZO (9)</a:t>
             </a:r>
           </a:p>
         </p:txBody>
@@ -5333,7 +5333,7 @@
         </p:nvGraphicFramePr>
         <p:xfrm>
           <a:off x="457200" y="1828800"/>
-          <a:ext cx="11429999" cy="1920240"/>
+          <a:ext cx="11429999" cy="3840480"/>
         </p:xfrm>
         <a:graphic>
           <a:graphicData uri="http://schemas.openxmlformats.org/drawingml/2006/table">
@@ -5479,7 +5479,7 @@
                           </a:solidFill>
                           <a:latin typeface="Calibri"/>
                         </a:rPr>
-                        <a:t>276150</a:t>
+                        <a:t>280039</a:t>
                       </a:r>
                     </a:p>
                   </a:txBody>
@@ -5502,7 +5502,7 @@
                           </a:solidFill>
                           <a:latin typeface="Calibri"/>
                         </a:rPr>
-                        <a:t>WILSON SONS LOGISTIC - SANTO ANDRE / SP</a:t>
+                        <a:t>TECNOLOGIA DA MANUTE - MACEIO / AL</a:t>
                       </a:r>
                     </a:p>
                   </a:txBody>
@@ -5525,7 +5525,7 @@
                           </a:solidFill>
                           <a:latin typeface="Calibri"/>
                         </a:rPr>
-                        <a:t>SANTO ANDRE/SP</a:t>
+                        <a:t>MACEIO/AL</a:t>
                       </a:r>
                     </a:p>
                   </a:txBody>
@@ -5548,7 +5548,7 @@
                           </a:solidFill>
                           <a:latin typeface="Calibri"/>
                         </a:rPr>
-                        <a:t>27/04/2026</a:t>
+                        <a:t>07/05/2026</a:t>
                       </a:r>
                     </a:p>
                   </a:txBody>
@@ -5571,7 +5571,7 @@
                           </a:solidFill>
                           <a:latin typeface="Calibri"/>
                         </a:rPr>
-                        <a:t>FORA DO PRAZO</a:t>
+                        <a:t>ENTREGUE FORA DO PRAZO</a:t>
                       </a:r>
                     </a:p>
                   </a:txBody>
@@ -5596,7 +5596,7 @@
                           </a:solidFill>
                           <a:latin typeface="Calibri"/>
                         </a:rPr>
-                        <a:t>277942</a:t>
+                        <a:t>281685</a:t>
                       </a:r>
                     </a:p>
                   </a:txBody>
@@ -5619,7 +5619,7 @@
                           </a:solidFill>
                           <a:latin typeface="Calibri"/>
                         </a:rPr>
-                        <a:t>CORSUL COMERCIO E RE - JOINVILLE / SC</a:t>
+                        <a:t>WILSON SONS LOGISTIC - SANTO ANDRE / SP</a:t>
                       </a:r>
                     </a:p>
                   </a:txBody>
@@ -5642,7 +5642,7 @@
                           </a:solidFill>
                           <a:latin typeface="Calibri"/>
                         </a:rPr>
-                        <a:t>JOINVILLE/SC</a:t>
+                        <a:t>SANTO ANDRE/SP</a:t>
                       </a:r>
                     </a:p>
                   </a:txBody>
@@ -5665,7 +5665,7 @@
                           </a:solidFill>
                           <a:latin typeface="Calibri"/>
                         </a:rPr>
-                        <a:t>14/04/2026</a:t>
+                        <a:t>05/05/2026</a:t>
                       </a:r>
                     </a:p>
                   </a:txBody>
@@ -5713,7 +5713,7 @@
                           </a:solidFill>
                           <a:latin typeface="Calibri"/>
                         </a:rPr>
-                        <a:t>278080</a:t>
+                        <a:t>281849</a:t>
                       </a:r>
                     </a:p>
                   </a:txBody>
@@ -5736,7 +5736,7 @@
                           </a:solidFill>
                           <a:latin typeface="Calibri"/>
                         </a:rPr>
-                        <a:t>CORSUL COMERCIO E RE - INDAIAL / SC</a:t>
+                        <a:t>CORSUL COMERCIO E RE - SAO JOSE / SC</a:t>
                       </a:r>
                     </a:p>
                   </a:txBody>
@@ -5759,7 +5759,7 @@
                           </a:solidFill>
                           <a:latin typeface="Calibri"/>
                         </a:rPr>
-                        <a:t>INDAIAL/SC</a:t>
+                        <a:t>SAO JOSE/SC</a:t>
                       </a:r>
                     </a:p>
                   </a:txBody>
@@ -5782,7 +5782,7 @@
                           </a:solidFill>
                           <a:latin typeface="Calibri"/>
                         </a:rPr>
-                        <a:t>16/04/2026</a:t>
+                        <a:t>12/05/2026</a:t>
                       </a:r>
                     </a:p>
                   </a:txBody>
@@ -5830,7 +5830,7 @@
                           </a:solidFill>
                           <a:latin typeface="Calibri"/>
                         </a:rPr>
-                        <a:t>280019</a:t>
+                        <a:t>282443</a:t>
                       </a:r>
                     </a:p>
                   </a:txBody>
@@ -5853,7 +5853,7 @@
                           </a:solidFill>
                           <a:latin typeface="Calibri"/>
                         </a:rPr>
-                        <a:t>1000 MARCAS SAFETY B - ARACARIGUAMA / SP</a:t>
+                        <a:t>EXATA CARGO - GUARULHOS / SP</a:t>
                       </a:r>
                     </a:p>
                   </a:txBody>
@@ -5876,7 +5876,7 @@
                           </a:solidFill>
                           <a:latin typeface="Calibri"/>
                         </a:rPr>
-                        <a:t>ARACARIGUAMA/SP</a:t>
+                        <a:t>GUARULHOS/SP</a:t>
                       </a:r>
                     </a:p>
                   </a:txBody>
@@ -5899,7 +5899,7 @@
                           </a:solidFill>
                           <a:latin typeface="Calibri"/>
                         </a:rPr>
-                        <a:t>24/04/2026</a:t>
+                        <a:t>11/05/2026</a:t>
                       </a:r>
                     </a:p>
                   </a:txBody>
@@ -5929,6 +5929,591 @@
                   <a:tcPr>
                     <a:solidFill>
                       <a:srgbClr val="F2F2F2"/>
+                    </a:solidFill>
+                  </a:tcPr>
+                </a:tc>
+              </a:tr>
+              <a:tr h="384048">
+                <a:tc>
+                  <a:txBody>
+                    <a:bodyPr/>
+                    <a:lstStyle/>
+                    <a:p>
+                      <a:pPr algn="l"/>
+                      <a:r>
+                        <a:rPr sz="1000" b="0">
+                          <a:solidFill>
+                            <a:srgbClr val="1D1B43"/>
+                          </a:solidFill>
+                          <a:latin typeface="Calibri"/>
+                        </a:rPr>
+                        <a:t>283502</a:t>
+                      </a:r>
+                    </a:p>
+                  </a:txBody>
+                  <a:tcPr>
+                    <a:solidFill>
+                      <a:srgbClr val="FFFFFF"/>
+                    </a:solidFill>
+                  </a:tcPr>
+                </a:tc>
+                <a:tc>
+                  <a:txBody>
+                    <a:bodyPr/>
+                    <a:lstStyle/>
+                    <a:p>
+                      <a:pPr algn="l"/>
+                      <a:r>
+                        <a:rPr sz="1000" b="0">
+                          <a:solidFill>
+                            <a:srgbClr val="1D1B43"/>
+                          </a:solidFill>
+                          <a:latin typeface="Calibri"/>
+                        </a:rPr>
+                        <a:t>WILSON SONS LOGISTIC - SANTO ANDRE / SP</a:t>
+                      </a:r>
+                    </a:p>
+                  </a:txBody>
+                  <a:tcPr>
+                    <a:solidFill>
+                      <a:srgbClr val="FFFFFF"/>
+                    </a:solidFill>
+                  </a:tcPr>
+                </a:tc>
+                <a:tc>
+                  <a:txBody>
+                    <a:bodyPr/>
+                    <a:lstStyle/>
+                    <a:p>
+                      <a:pPr algn="l"/>
+                      <a:r>
+                        <a:rPr sz="1000" b="0">
+                          <a:solidFill>
+                            <a:srgbClr val="1D1B43"/>
+                          </a:solidFill>
+                          <a:latin typeface="Calibri"/>
+                        </a:rPr>
+                        <a:t>SANTO ANDRE/SP</a:t>
+                      </a:r>
+                    </a:p>
+                  </a:txBody>
+                  <a:tcPr>
+                    <a:solidFill>
+                      <a:srgbClr val="FFFFFF"/>
+                    </a:solidFill>
+                  </a:tcPr>
+                </a:tc>
+                <a:tc>
+                  <a:txBody>
+                    <a:bodyPr/>
+                    <a:lstStyle/>
+                    <a:p>
+                      <a:pPr algn="l"/>
+                      <a:r>
+                        <a:rPr sz="1000" b="0">
+                          <a:solidFill>
+                            <a:srgbClr val="1D1B43"/>
+                          </a:solidFill>
+                          <a:latin typeface="Calibri"/>
+                        </a:rPr>
+                        <a:t>28/05/2026</a:t>
+                      </a:r>
+                    </a:p>
+                  </a:txBody>
+                  <a:tcPr>
+                    <a:solidFill>
+                      <a:srgbClr val="FFFFFF"/>
+                    </a:solidFill>
+                  </a:tcPr>
+                </a:tc>
+                <a:tc>
+                  <a:txBody>
+                    <a:bodyPr/>
+                    <a:lstStyle/>
+                    <a:p>
+                      <a:pPr algn="l"/>
+                      <a:r>
+                        <a:rPr sz="1000" b="0">
+                          <a:solidFill>
+                            <a:srgbClr val="1D1B43"/>
+                          </a:solidFill>
+                          <a:latin typeface="Calibri"/>
+                        </a:rPr>
+                        <a:t>FORA DO PRAZO</a:t>
+                      </a:r>
+                    </a:p>
+                  </a:txBody>
+                  <a:tcPr>
+                    <a:solidFill>
+                      <a:srgbClr val="FFFFFF"/>
+                    </a:solidFill>
+                  </a:tcPr>
+                </a:tc>
+              </a:tr>
+              <a:tr h="384048">
+                <a:tc>
+                  <a:txBody>
+                    <a:bodyPr/>
+                    <a:lstStyle/>
+                    <a:p>
+                      <a:pPr algn="l"/>
+                      <a:r>
+                        <a:rPr sz="1000" b="0">
+                          <a:solidFill>
+                            <a:srgbClr val="1D1B43"/>
+                          </a:solidFill>
+                          <a:latin typeface="Calibri"/>
+                        </a:rPr>
+                        <a:t>283837</a:t>
+                      </a:r>
+                    </a:p>
+                  </a:txBody>
+                  <a:tcPr>
+                    <a:solidFill>
+                      <a:srgbClr val="F2F2F2"/>
+                    </a:solidFill>
+                  </a:tcPr>
+                </a:tc>
+                <a:tc>
+                  <a:txBody>
+                    <a:bodyPr/>
+                    <a:lstStyle/>
+                    <a:p>
+                      <a:pPr algn="l"/>
+                      <a:r>
+                        <a:rPr sz="1000" b="0">
+                          <a:solidFill>
+                            <a:srgbClr val="1D1B43"/>
+                          </a:solidFill>
+                          <a:latin typeface="Calibri"/>
+                        </a:rPr>
+                        <a:t>ELETRONOR - DISTRIBU - CAXIAS DO SUL / RS</a:t>
+                      </a:r>
+                    </a:p>
+                  </a:txBody>
+                  <a:tcPr>
+                    <a:solidFill>
+                      <a:srgbClr val="F2F2F2"/>
+                    </a:solidFill>
+                  </a:tcPr>
+                </a:tc>
+                <a:tc>
+                  <a:txBody>
+                    <a:bodyPr/>
+                    <a:lstStyle/>
+                    <a:p>
+                      <a:pPr algn="l"/>
+                      <a:r>
+                        <a:rPr sz="1000" b="0">
+                          <a:solidFill>
+                            <a:srgbClr val="1D1B43"/>
+                          </a:solidFill>
+                          <a:latin typeface="Calibri"/>
+                        </a:rPr>
+                        <a:t>CAXIAS DO SUL/RS</a:t>
+                      </a:r>
+                    </a:p>
+                  </a:txBody>
+                  <a:tcPr>
+                    <a:solidFill>
+                      <a:srgbClr val="F2F2F2"/>
+                    </a:solidFill>
+                  </a:tcPr>
+                </a:tc>
+                <a:tc>
+                  <a:txBody>
+                    <a:bodyPr/>
+                    <a:lstStyle/>
+                    <a:p>
+                      <a:pPr algn="l"/>
+                      <a:r>
+                        <a:rPr sz="1000" b="0">
+                          <a:solidFill>
+                            <a:srgbClr val="1D1B43"/>
+                          </a:solidFill>
+                          <a:latin typeface="Calibri"/>
+                        </a:rPr>
+                        <a:t>29/05/2026</a:t>
+                      </a:r>
+                    </a:p>
+                  </a:txBody>
+                  <a:tcPr>
+                    <a:solidFill>
+                      <a:srgbClr val="F2F2F2"/>
+                    </a:solidFill>
+                  </a:tcPr>
+                </a:tc>
+                <a:tc>
+                  <a:txBody>
+                    <a:bodyPr/>
+                    <a:lstStyle/>
+                    <a:p>
+                      <a:pPr algn="l"/>
+                      <a:r>
+                        <a:rPr sz="1000" b="0">
+                          <a:solidFill>
+                            <a:srgbClr val="1D1B43"/>
+                          </a:solidFill>
+                          <a:latin typeface="Calibri"/>
+                        </a:rPr>
+                        <a:t>FORA DO PRAZO</a:t>
+                      </a:r>
+                    </a:p>
+                  </a:txBody>
+                  <a:tcPr>
+                    <a:solidFill>
+                      <a:srgbClr val="F2F2F2"/>
+                    </a:solidFill>
+                  </a:tcPr>
+                </a:tc>
+              </a:tr>
+              <a:tr h="384048">
+                <a:tc>
+                  <a:txBody>
+                    <a:bodyPr/>
+                    <a:lstStyle/>
+                    <a:p>
+                      <a:pPr algn="l"/>
+                      <a:r>
+                        <a:rPr sz="1000" b="0">
+                          <a:solidFill>
+                            <a:srgbClr val="1D1B43"/>
+                          </a:solidFill>
+                          <a:latin typeface="Calibri"/>
+                        </a:rPr>
+                        <a:t>284370</a:t>
+                      </a:r>
+                    </a:p>
+                  </a:txBody>
+                  <a:tcPr>
+                    <a:solidFill>
+                      <a:srgbClr val="FFFFFF"/>
+                    </a:solidFill>
+                  </a:tcPr>
+                </a:tc>
+                <a:tc>
+                  <a:txBody>
+                    <a:bodyPr/>
+                    <a:lstStyle/>
+                    <a:p>
+                      <a:pPr algn="l"/>
+                      <a:r>
+                        <a:rPr sz="1000" b="0">
+                          <a:solidFill>
+                            <a:srgbClr val="1D1B43"/>
+                          </a:solidFill>
+                          <a:latin typeface="Calibri"/>
+                        </a:rPr>
+                        <a:t>CORPO DE BOMBEIROS M - RIO DE JANEIRO / RJ</a:t>
+                      </a:r>
+                    </a:p>
+                  </a:txBody>
+                  <a:tcPr>
+                    <a:solidFill>
+                      <a:srgbClr val="FFFFFF"/>
+                    </a:solidFill>
+                  </a:tcPr>
+                </a:tc>
+                <a:tc>
+                  <a:txBody>
+                    <a:bodyPr/>
+                    <a:lstStyle/>
+                    <a:p>
+                      <a:pPr algn="l"/>
+                      <a:r>
+                        <a:rPr sz="1000" b="0">
+                          <a:solidFill>
+                            <a:srgbClr val="1D1B43"/>
+                          </a:solidFill>
+                          <a:latin typeface="Calibri"/>
+                        </a:rPr>
+                        <a:t>RIO DE JANEIRO/RJ</a:t>
+                      </a:r>
+                    </a:p>
+                  </a:txBody>
+                  <a:tcPr>
+                    <a:solidFill>
+                      <a:srgbClr val="FFFFFF"/>
+                    </a:solidFill>
+                  </a:tcPr>
+                </a:tc>
+                <a:tc>
+                  <a:txBody>
+                    <a:bodyPr/>
+                    <a:lstStyle/>
+                    <a:p>
+                      <a:pPr algn="l"/>
+                      <a:r>
+                        <a:rPr sz="1000" b="0">
+                          <a:solidFill>
+                            <a:srgbClr val="1D1B43"/>
+                          </a:solidFill>
+                          <a:latin typeface="Calibri"/>
+                        </a:rPr>
+                        <a:t>21/05/2026</a:t>
+                      </a:r>
+                    </a:p>
+                  </a:txBody>
+                  <a:tcPr>
+                    <a:solidFill>
+                      <a:srgbClr val="FFFFFF"/>
+                    </a:solidFill>
+                  </a:tcPr>
+                </a:tc>
+                <a:tc>
+                  <a:txBody>
+                    <a:bodyPr/>
+                    <a:lstStyle/>
+                    <a:p>
+                      <a:pPr algn="l"/>
+                      <a:r>
+                        <a:rPr sz="1000" b="0">
+                          <a:solidFill>
+                            <a:srgbClr val="1D1B43"/>
+                          </a:solidFill>
+                          <a:latin typeface="Calibri"/>
+                        </a:rPr>
+                        <a:t>ENTREGUE FORA DO PRAZO</a:t>
+                      </a:r>
+                    </a:p>
+                  </a:txBody>
+                  <a:tcPr>
+                    <a:solidFill>
+                      <a:srgbClr val="FFFFFF"/>
+                    </a:solidFill>
+                  </a:tcPr>
+                </a:tc>
+              </a:tr>
+              <a:tr h="384048">
+                <a:tc>
+                  <a:txBody>
+                    <a:bodyPr/>
+                    <a:lstStyle/>
+                    <a:p>
+                      <a:pPr algn="l"/>
+                      <a:r>
+                        <a:rPr sz="1000" b="0">
+                          <a:solidFill>
+                            <a:srgbClr val="1D1B43"/>
+                          </a:solidFill>
+                          <a:latin typeface="Calibri"/>
+                        </a:rPr>
+                        <a:t>284510</a:t>
+                      </a:r>
+                    </a:p>
+                  </a:txBody>
+                  <a:tcPr>
+                    <a:solidFill>
+                      <a:srgbClr val="F2F2F2"/>
+                    </a:solidFill>
+                  </a:tcPr>
+                </a:tc>
+                <a:tc>
+                  <a:txBody>
+                    <a:bodyPr/>
+                    <a:lstStyle/>
+                    <a:p>
+                      <a:pPr algn="l"/>
+                      <a:r>
+                        <a:rPr sz="1000" b="0">
+                          <a:solidFill>
+                            <a:srgbClr val="1D1B43"/>
+                          </a:solidFill>
+                          <a:latin typeface="Calibri"/>
+                        </a:rPr>
+                        <a:t>SP EQUIPAMENTOS DE P - GUARULHOS / SP</a:t>
+                      </a:r>
+                    </a:p>
+                  </a:txBody>
+                  <a:tcPr>
+                    <a:solidFill>
+                      <a:srgbClr val="F2F2F2"/>
+                    </a:solidFill>
+                  </a:tcPr>
+                </a:tc>
+                <a:tc>
+                  <a:txBody>
+                    <a:bodyPr/>
+                    <a:lstStyle/>
+                    <a:p>
+                      <a:pPr algn="l"/>
+                      <a:r>
+                        <a:rPr sz="1000" b="0">
+                          <a:solidFill>
+                            <a:srgbClr val="1D1B43"/>
+                          </a:solidFill>
+                          <a:latin typeface="Calibri"/>
+                        </a:rPr>
+                        <a:t>GUARULHOS/SP</a:t>
+                      </a:r>
+                    </a:p>
+                  </a:txBody>
+                  <a:tcPr>
+                    <a:solidFill>
+                      <a:srgbClr val="F2F2F2"/>
+                    </a:solidFill>
+                  </a:tcPr>
+                </a:tc>
+                <a:tc>
+                  <a:txBody>
+                    <a:bodyPr/>
+                    <a:lstStyle/>
+                    <a:p>
+                      <a:pPr algn="l"/>
+                      <a:r>
+                        <a:rPr sz="1000" b="0">
+                          <a:solidFill>
+                            <a:srgbClr val="1D1B43"/>
+                          </a:solidFill>
+                          <a:latin typeface="Calibri"/>
+                        </a:rPr>
+                        <a:t>27/05/2026</a:t>
+                      </a:r>
+                    </a:p>
+                  </a:txBody>
+                  <a:tcPr>
+                    <a:solidFill>
+                      <a:srgbClr val="F2F2F2"/>
+                    </a:solidFill>
+                  </a:tcPr>
+                </a:tc>
+                <a:tc>
+                  <a:txBody>
+                    <a:bodyPr/>
+                    <a:lstStyle/>
+                    <a:p>
+                      <a:pPr algn="l"/>
+                      <a:r>
+                        <a:rPr sz="1000" b="0">
+                          <a:solidFill>
+                            <a:srgbClr val="1D1B43"/>
+                          </a:solidFill>
+                          <a:latin typeface="Calibri"/>
+                        </a:rPr>
+                        <a:t>FORA DO PRAZO</a:t>
+                      </a:r>
+                    </a:p>
+                  </a:txBody>
+                  <a:tcPr>
+                    <a:solidFill>
+                      <a:srgbClr val="F2F2F2"/>
+                    </a:solidFill>
+                  </a:tcPr>
+                </a:tc>
+              </a:tr>
+              <a:tr h="384048">
+                <a:tc>
+                  <a:txBody>
+                    <a:bodyPr/>
+                    <a:lstStyle/>
+                    <a:p>
+                      <a:pPr algn="l"/>
+                      <a:r>
+                        <a:rPr sz="1000" b="0">
+                          <a:solidFill>
+                            <a:srgbClr val="1D1B43"/>
+                          </a:solidFill>
+                          <a:latin typeface="Calibri"/>
+                        </a:rPr>
+                        <a:t>285137</a:t>
+                      </a:r>
+                    </a:p>
+                  </a:txBody>
+                  <a:tcPr>
+                    <a:solidFill>
+                      <a:srgbClr val="FFFFFF"/>
+                    </a:solidFill>
+                  </a:tcPr>
+                </a:tc>
+                <a:tc>
+                  <a:txBody>
+                    <a:bodyPr/>
+                    <a:lstStyle/>
+                    <a:p>
+                      <a:pPr algn="l"/>
+                      <a:r>
+                        <a:rPr sz="1000" b="0">
+                          <a:solidFill>
+                            <a:srgbClr val="1D1B43"/>
+                          </a:solidFill>
+                          <a:latin typeface="Calibri"/>
+                        </a:rPr>
+                        <a:t>ATIVA DISTRIBUICAO E - SAO PAULO / SP</a:t>
+                      </a:r>
+                    </a:p>
+                  </a:txBody>
+                  <a:tcPr>
+                    <a:solidFill>
+                      <a:srgbClr val="FFFFFF"/>
+                    </a:solidFill>
+                  </a:tcPr>
+                </a:tc>
+                <a:tc>
+                  <a:txBody>
+                    <a:bodyPr/>
+                    <a:lstStyle/>
+                    <a:p>
+                      <a:pPr algn="l"/>
+                      <a:r>
+                        <a:rPr sz="1000" b="0">
+                          <a:solidFill>
+                            <a:srgbClr val="1D1B43"/>
+                          </a:solidFill>
+                          <a:latin typeface="Calibri"/>
+                        </a:rPr>
+                        <a:t>SAO PAULO/SP</a:t>
+                      </a:r>
+                    </a:p>
+                  </a:txBody>
+                  <a:tcPr>
+                    <a:solidFill>
+                      <a:srgbClr val="FFFFFF"/>
+                    </a:solidFill>
+                  </a:tcPr>
+                </a:tc>
+                <a:tc>
+                  <a:txBody>
+                    <a:bodyPr/>
+                    <a:lstStyle/>
+                    <a:p>
+                      <a:pPr algn="l"/>
+                      <a:r>
+                        <a:rPr sz="1000" b="0">
+                          <a:solidFill>
+                            <a:srgbClr val="1D1B43"/>
+                          </a:solidFill>
+                          <a:latin typeface="Calibri"/>
+                        </a:rPr>
+                        <a:t>28/05/2026</a:t>
+                      </a:r>
+                    </a:p>
+                  </a:txBody>
+                  <a:tcPr>
+                    <a:solidFill>
+                      <a:srgbClr val="FFFFFF"/>
+                    </a:solidFill>
+                  </a:tcPr>
+                </a:tc>
+                <a:tc>
+                  <a:txBody>
+                    <a:bodyPr/>
+                    <a:lstStyle/>
+                    <a:p>
+                      <a:pPr algn="l"/>
+                      <a:r>
+                        <a:rPr sz="1000" b="0">
+                          <a:solidFill>
+                            <a:srgbClr val="1D1B43"/>
+                          </a:solidFill>
+                          <a:latin typeface="Calibri"/>
+                        </a:rPr>
+                        <a:t>FORA DO PRAZO</a:t>
+                      </a:r>
+                    </a:p>
+                  </a:txBody>
+                  <a:tcPr>
+                    <a:solidFill>
+                      <a:srgbClr val="FFFFFF"/>
                     </a:solidFill>
                   </a:tcPr>
                 </a:tc>
@@ -6268,7 +6853,7 @@
                           </a:solidFill>
                           <a:latin typeface="Calibri"/>
                         </a:rPr>
-                        <a:t>149</a:t>
+                        <a:t>137</a:t>
                       </a:r>
                     </a:p>
                   </a:txBody>
@@ -6291,7 +6876,7 @@
                           </a:solidFill>
                           <a:latin typeface="Calibri"/>
                         </a:rPr>
-                        <a:t>147</a:t>
+                        <a:t>132</a:t>
                       </a:r>
                     </a:p>
                   </a:txBody>
@@ -6314,7 +6899,7 @@
                           </a:solidFill>
                           <a:latin typeface="Calibri"/>
                         </a:rPr>
-                        <a:t>2</a:t>
+                        <a:t>5</a:t>
                       </a:r>
                     </a:p>
                   </a:txBody>
@@ -6337,7 +6922,7 @@
                           </a:solidFill>
                           <a:latin typeface="Calibri"/>
                         </a:rPr>
-                        <a:t>98.7%</a:t>
+                        <a:t>96.4%</a:t>
                       </a:r>
                     </a:p>
                   </a:txBody>
@@ -6408,7 +6993,7 @@
                           </a:solidFill>
                           <a:latin typeface="Calibri"/>
                         </a:rPr>
-                        <a:t>34</a:t>
+                        <a:t>24</a:t>
                       </a:r>
                     </a:p>
                   </a:txBody>
@@ -6431,7 +7016,7 @@
                           </a:solidFill>
                           <a:latin typeface="Calibri"/>
                         </a:rPr>
-                        <a:t>32</a:t>
+                        <a:t>23</a:t>
                       </a:r>
                     </a:p>
                   </a:txBody>
@@ -6454,7 +7039,7 @@
                           </a:solidFill>
                           <a:latin typeface="Calibri"/>
                         </a:rPr>
-                        <a:t>2</a:t>
+                        <a:t>1</a:t>
                       </a:r>
                     </a:p>
                   </a:txBody>
@@ -6477,7 +7062,7 @@
                           </a:solidFill>
                           <a:latin typeface="Calibri"/>
                         </a:rPr>
-                        <a:t>94.1%</a:t>
+                        <a:t>95.8%</a:t>
                       </a:r>
                     </a:p>
                   </a:txBody>
@@ -6525,7 +7110,7 @@
                           </a:solidFill>
                           <a:latin typeface="Calibri"/>
                         </a:rPr>
-                        <a:t>MG</a:t>
+                        <a:t>ES</a:t>
                       </a:r>
                     </a:p>
                   </a:txBody>
@@ -6548,7 +7133,7 @@
                           </a:solidFill>
                           <a:latin typeface="Calibri"/>
                         </a:rPr>
-                        <a:t>24</a:t>
+                        <a:t>20</a:t>
                       </a:r>
                     </a:p>
                   </a:txBody>
@@ -6571,7 +7156,7 @@
                           </a:solidFill>
                           <a:latin typeface="Calibri"/>
                         </a:rPr>
-                        <a:t>24</a:t>
+                        <a:t>20</a:t>
                       </a:r>
                     </a:p>
                   </a:txBody>
@@ -6665,7 +7250,7 @@
                           </a:solidFill>
                           <a:latin typeface="Calibri"/>
                         </a:rPr>
-                        <a:t>ES</a:t>
+                        <a:t>GO</a:t>
                       </a:r>
                     </a:p>
                   </a:txBody>
@@ -6688,7 +7273,7 @@
                           </a:solidFill>
                           <a:latin typeface="Calibri"/>
                         </a:rPr>
-                        <a:t>23</a:t>
+                        <a:t>12</a:t>
                       </a:r>
                     </a:p>
                   </a:txBody>
@@ -6711,7 +7296,7 @@
                           </a:solidFill>
                           <a:latin typeface="Calibri"/>
                         </a:rPr>
-                        <a:t>23</a:t>
+                        <a:t>12</a:t>
                       </a:r>
                     </a:p>
                   </a:txBody>
@@ -6805,7 +7390,7 @@
                           </a:solidFill>
                           <a:latin typeface="Calibri"/>
                         </a:rPr>
-                        <a:t>BA</a:t>
+                        <a:t>RS</a:t>
                       </a:r>
                     </a:p>
                   </a:txBody>
@@ -6828,7 +7413,7 @@
                           </a:solidFill>
                           <a:latin typeface="Calibri"/>
                         </a:rPr>
-                        <a:t>9</a:t>
+                        <a:t>12</a:t>
                       </a:r>
                     </a:p>
                   </a:txBody>
@@ -6851,7 +7436,7 @@
                           </a:solidFill>
                           <a:latin typeface="Calibri"/>
                         </a:rPr>
-                        <a:t>9</a:t>
+                        <a:t>11</a:t>
                       </a:r>
                     </a:p>
                   </a:txBody>
@@ -6874,7 +7459,7 @@
                           </a:solidFill>
                           <a:latin typeface="Calibri"/>
                         </a:rPr>
-                        <a:t>0</a:t>
+                        <a:t>1</a:t>
                       </a:r>
                     </a:p>
                   </a:txBody>
@@ -6897,7 +7482,7 @@
                           </a:solidFill>
                           <a:latin typeface="Calibri"/>
                         </a:rPr>
-                        <a:t>100.0%</a:t>
+                        <a:t>91.7%</a:t>
                       </a:r>
                     </a:p>
                   </a:txBody>
@@ -6920,7 +7505,7 @@
                           </a:solidFill>
                           <a:latin typeface="Calibri"/>
                         </a:rPr>
-                        <a:t>Excelente</a:t>
+                        <a:t>Regular</a:t>
                       </a:r>
                     </a:p>
                   </a:txBody>
@@ -6945,7 +7530,7 @@
                           </a:solidFill>
                           <a:latin typeface="Calibri"/>
                         </a:rPr>
-                        <a:t>PR</a:t>
+                        <a:t>MG</a:t>
                       </a:r>
                     </a:p>
                   </a:txBody>
@@ -6968,7 +7553,7 @@
                           </a:solidFill>
                           <a:latin typeface="Calibri"/>
                         </a:rPr>
-                        <a:t>8</a:t>
+                        <a:t>10</a:t>
                       </a:r>
                     </a:p>
                   </a:txBody>
@@ -6991,7 +7576,7 @@
                           </a:solidFill>
                           <a:latin typeface="Calibri"/>
                         </a:rPr>
-                        <a:t>8</a:t>
+                        <a:t>10</a:t>
                       </a:r>
                     </a:p>
                   </a:txBody>
@@ -7085,7 +7670,7 @@
                           </a:solidFill>
                           <a:latin typeface="Calibri"/>
                         </a:rPr>
-                        <a:t>RS</a:t>
+                        <a:t>PR</a:t>
                       </a:r>
                     </a:p>
                   </a:txBody>
@@ -7108,7 +7693,7 @@
                           </a:solidFill>
                           <a:latin typeface="Calibri"/>
                         </a:rPr>
-                        <a:t>7</a:t>
+                        <a:t>8</a:t>
                       </a:r>
                     </a:p>
                   </a:txBody>
@@ -7131,7 +7716,7 @@
                           </a:solidFill>
                           <a:latin typeface="Calibri"/>
                         </a:rPr>
-                        <a:t>7</a:t>
+                        <a:t>8</a:t>
                       </a:r>
                     </a:p>
                   </a:txBody>
@@ -7225,7 +7810,7 @@
                           </a:solidFill>
                           <a:latin typeface="Calibri"/>
                         </a:rPr>
-                        <a:t>GO</a:t>
+                        <a:t>PA</a:t>
                       </a:r>
                     </a:p>
                   </a:txBody>
@@ -7248,7 +7833,7 @@
                           </a:solidFill>
                           <a:latin typeface="Calibri"/>
                         </a:rPr>
-                        <a:t>4</a:t>
+                        <a:t>7</a:t>
                       </a:r>
                     </a:p>
                   </a:txBody>
@@ -7271,7 +7856,7 @@
                           </a:solidFill>
                           <a:latin typeface="Calibri"/>
                         </a:rPr>
-                        <a:t>4</a:t>
+                        <a:t>7</a:t>
                       </a:r>
                     </a:p>
                   </a:txBody>
@@ -7365,7 +7950,7 @@
                           </a:solidFill>
                           <a:latin typeface="Calibri"/>
                         </a:rPr>
-                        <a:t>MA</a:t>
+                        <a:t>BA</a:t>
                       </a:r>
                     </a:p>
                   </a:txBody>
@@ -7505,7 +8090,7 @@
                           </a:solidFill>
                           <a:latin typeface="Calibri"/>
                         </a:rPr>
-                        <a:t>PA</a:t>
+                        <a:t>PE</a:t>
                       </a:r>
                     </a:p>
                   </a:txBody>
@@ -7715,7 +8300,7 @@
                 </a:solidFill>
                 <a:latin typeface="Calibri"/>
               </a:rPr>
-              <a:t>TOP DESTINATARIOS (51 pontos)</a:t>
+              <a:t>TOP DESTINATARIOS (43 pontos)</a:t>
             </a:r>
           </a:p>
         </p:txBody>
@@ -7990,7 +8575,7 @@
                           </a:solidFill>
                           <a:latin typeface="Calibri"/>
                         </a:rPr>
-                        <a:t>BUNZL EQUIPAMENTOS P - GUARULHOS / SP</a:t>
+                        <a:t>DIMENSIONAL BRASIL S - GARUVA / SC</a:t>
                       </a:r>
                     </a:p>
                   </a:txBody>
@@ -8013,7 +8598,7 @@
                           </a:solidFill>
                           <a:latin typeface="Calibri"/>
                         </a:rPr>
-                        <a:t>40</a:t>
+                        <a:t>20</a:t>
                       </a:r>
                     </a:p>
                   </a:txBody>
@@ -8036,7 +8621,7 @@
                           </a:solidFill>
                           <a:latin typeface="Calibri"/>
                         </a:rPr>
-                        <a:t>40</a:t>
+                        <a:t>20</a:t>
                       </a:r>
                     </a:p>
                   </a:txBody>
@@ -8153,7 +8738,7 @@
                           </a:solidFill>
                           <a:latin typeface="Calibri"/>
                         </a:rPr>
-                        <a:t>DIMENSIONAL BRASIL S - GARUVA / SC</a:t>
+                        <a:t>WILSON SONS LOGISTIC - SANTO ANDRE / SP</a:t>
                       </a:r>
                     </a:p>
                   </a:txBody>
@@ -8176,7 +8761,7 @@
                           </a:solidFill>
                           <a:latin typeface="Calibri"/>
                         </a:rPr>
-                        <a:t>21</a:t>
+                        <a:t>20</a:t>
                       </a:r>
                     </a:p>
                   </a:txBody>
@@ -8199,7 +8784,7 @@
                           </a:solidFill>
                           <a:latin typeface="Calibri"/>
                         </a:rPr>
-                        <a:t>21</a:t>
+                        <a:t>18</a:t>
                       </a:r>
                     </a:p>
                   </a:txBody>
@@ -8222,7 +8807,7 @@
                           </a:solidFill>
                           <a:latin typeface="Calibri"/>
                         </a:rPr>
-                        <a:t>0</a:t>
+                        <a:t>2</a:t>
                       </a:r>
                     </a:p>
                   </a:txBody>
@@ -8245,7 +8830,7 @@
                           </a:solidFill>
                           <a:latin typeface="Calibri"/>
                         </a:rPr>
-                        <a:t>100.0%</a:t>
+                        <a:t>90.0%</a:t>
                       </a:r>
                     </a:p>
                   </a:txBody>
@@ -8268,7 +8853,7 @@
                           </a:solidFill>
                           <a:latin typeface="Calibri"/>
                         </a:rPr>
-                        <a:t>Excelente</a:t>
+                        <a:t>Regular</a:t>
                       </a:r>
                     </a:p>
                   </a:txBody>
@@ -8316,7 +8901,7 @@
                           </a:solidFill>
                           <a:latin typeface="Calibri"/>
                         </a:rPr>
-                        <a:t>EXATA CARGO - GUARULHOS / SP</a:t>
+                        <a:t>BUNZL EQUIPAMENTOS P - GUARULHOS / SP</a:t>
                       </a:r>
                     </a:p>
                   </a:txBody>
@@ -8339,7 +8924,7 @@
                           </a:solidFill>
                           <a:latin typeface="Calibri"/>
                         </a:rPr>
-                        <a:t>17</a:t>
+                        <a:t>18</a:t>
                       </a:r>
                     </a:p>
                   </a:txBody>
@@ -8362,7 +8947,7 @@
                           </a:solidFill>
                           <a:latin typeface="Calibri"/>
                         </a:rPr>
-                        <a:t>17</a:t>
+                        <a:t>18</a:t>
                       </a:r>
                     </a:p>
                   </a:txBody>
@@ -8479,7 +9064,7 @@
                           </a:solidFill>
                           <a:latin typeface="Calibri"/>
                         </a:rPr>
-                        <a:t>FITASSUL COMERCIO DI - ITAJUBA / MG</a:t>
+                        <a:t>NORTEL SUPRIMENTOS I - CAMPINAS / SP</a:t>
                       </a:r>
                     </a:p>
                   </a:txBody>
@@ -8502,7 +9087,7 @@
                           </a:solidFill>
                           <a:latin typeface="Calibri"/>
                         </a:rPr>
-                        <a:t>14</a:t>
+                        <a:t>15</a:t>
                       </a:r>
                     </a:p>
                   </a:txBody>
@@ -8525,7 +9110,7 @@
                           </a:solidFill>
                           <a:latin typeface="Calibri"/>
                         </a:rPr>
-                        <a:t>14</a:t>
+                        <a:t>15</a:t>
                       </a:r>
                     </a:p>
                   </a:txBody>
@@ -8642,7 +9227,7 @@
                           </a:solidFill>
                           <a:latin typeface="Calibri"/>
                         </a:rPr>
-                        <a:t>SP EQUIPAMENTOS DE P - GUARULHOS / SP</a:t>
+                        <a:t>ATIVA DISTRIBUICAO E - SAO PAULO / SP</a:t>
                       </a:r>
                     </a:p>
                   </a:txBody>
@@ -8665,7 +9250,7 @@
                           </a:solidFill>
                           <a:latin typeface="Calibri"/>
                         </a:rPr>
-                        <a:t>14</a:t>
+                        <a:t>13</a:t>
                       </a:r>
                     </a:p>
                   </a:txBody>
@@ -8688,7 +9273,7 @@
                           </a:solidFill>
                           <a:latin typeface="Calibri"/>
                         </a:rPr>
-                        <a:t>14</a:t>
+                        <a:t>12</a:t>
                       </a:r>
                     </a:p>
                   </a:txBody>
@@ -8711,7 +9296,7 @@
                           </a:solidFill>
                           <a:latin typeface="Calibri"/>
                         </a:rPr>
-                        <a:t>0</a:t>
+                        <a:t>1</a:t>
                       </a:r>
                     </a:p>
                   </a:txBody>
@@ -8734,7 +9319,7 @@
                           </a:solidFill>
                           <a:latin typeface="Calibri"/>
                         </a:rPr>
-                        <a:t>100.0%</a:t>
+                        <a:t>92.3%</a:t>
                       </a:r>
                     </a:p>
                   </a:txBody>
@@ -8757,7 +9342,7 @@
                           </a:solidFill>
                           <a:latin typeface="Calibri"/>
                         </a:rPr>
-                        <a:t>Excelente</a:t>
+                        <a:t>Regular</a:t>
                       </a:r>
                     </a:p>
                   </a:txBody>
@@ -8805,7 +9390,7 @@
                           </a:solidFill>
                           <a:latin typeface="Calibri"/>
                         </a:rPr>
-                        <a:t>NORTEL SUPRIMENTOS I - SERRA / ES</a:t>
+                        <a:t>EXATA CARGO - GUARULHOS / SP</a:t>
                       </a:r>
                     </a:p>
                   </a:txBody>
@@ -8851,7 +9436,7 @@
                           </a:solidFill>
                           <a:latin typeface="Calibri"/>
                         </a:rPr>
-                        <a:t>11</a:t>
+                        <a:t>10</a:t>
                       </a:r>
                     </a:p>
                   </a:txBody>
@@ -8874,7 +9459,7 @@
                           </a:solidFill>
                           <a:latin typeface="Calibri"/>
                         </a:rPr>
-                        <a:t>0</a:t>
+                        <a:t>1</a:t>
                       </a:r>
                     </a:p>
                   </a:txBody>
@@ -8897,7 +9482,7 @@
                           </a:solidFill>
                           <a:latin typeface="Calibri"/>
                         </a:rPr>
-                        <a:t>100.0%</a:t>
+                        <a:t>90.9%</a:t>
                       </a:r>
                     </a:p>
                   </a:txBody>
@@ -8920,7 +9505,7 @@
                           </a:solidFill>
                           <a:latin typeface="Calibri"/>
                         </a:rPr>
-                        <a:t>Excelente</a:t>
+                        <a:t>Regular</a:t>
                       </a:r>
                     </a:p>
                   </a:txBody>
@@ -8968,7 +9553,7 @@
                           </a:solidFill>
                           <a:latin typeface="Calibri"/>
                         </a:rPr>
-                        <a:t>DIMENSIONAL BRASIL S - SERRA / ES</a:t>
+                        <a:t>NORTEL SUPRIMENTOS I - GOIANIA / GO</a:t>
                       </a:r>
                     </a:p>
                   </a:txBody>
@@ -8991,7 +9576,7 @@
                           </a:solidFill>
                           <a:latin typeface="Calibri"/>
                         </a:rPr>
-                        <a:t>10</a:t>
+                        <a:t>11</a:t>
                       </a:r>
                     </a:p>
                   </a:txBody>
@@ -9014,7 +9599,7 @@
                           </a:solidFill>
                           <a:latin typeface="Calibri"/>
                         </a:rPr>
-                        <a:t>10</a:t>
+                        <a:t>11</a:t>
                       </a:r>
                     </a:p>
                   </a:txBody>
@@ -9131,7 +9716,7 @@
                           </a:solidFill>
                           <a:latin typeface="Calibri"/>
                         </a:rPr>
-                        <a:t>ATIVA DISTRIBUICAO E - SAO PAULO / SP</a:t>
+                        <a:t>NORTEL SUPRIMENTOS I - SERRA / ES</a:t>
                       </a:r>
                     </a:p>
                   </a:txBody>
@@ -9154,7 +9739,7 @@
                           </a:solidFill>
                           <a:latin typeface="Calibri"/>
                         </a:rPr>
-                        <a:t>9</a:t>
+                        <a:t>11</a:t>
                       </a:r>
                     </a:p>
                   </a:txBody>
@@ -9177,7 +9762,7 @@
                           </a:solidFill>
                           <a:latin typeface="Calibri"/>
                         </a:rPr>
-                        <a:t>9</a:t>
+                        <a:t>11</a:t>
                       </a:r>
                     </a:p>
                   </a:txBody>
@@ -9294,7 +9879,7 @@
                           </a:solidFill>
                           <a:latin typeface="Calibri"/>
                         </a:rPr>
-                        <a:t>BUNZL EQUIPAMENTOS P - CONTAGEM / MG</a:t>
+                        <a:t>LUZ TRANSPORTES - GUARULHOS / SP</a:t>
                       </a:r>
                     </a:p>
                   </a:txBody>
@@ -9317,7 +9902,7 @@
                           </a:solidFill>
                           <a:latin typeface="Calibri"/>
                         </a:rPr>
-                        <a:t>9</a:t>
+                        <a:t>11</a:t>
                       </a:r>
                     </a:p>
                   </a:txBody>
@@ -9340,7 +9925,7 @@
                           </a:solidFill>
                           <a:latin typeface="Calibri"/>
                         </a:rPr>
-                        <a:t>9</a:t>
+                        <a:t>11</a:t>
                       </a:r>
                     </a:p>
                   </a:txBody>
@@ -9457,7 +10042,7 @@
                           </a:solidFill>
                           <a:latin typeface="Calibri"/>
                         </a:rPr>
-                        <a:t>WILSON SONS LOGISTIC - SANTO ANDRE / SP</a:t>
+                        <a:t>DIMENSIONAL BRASIL S - SERRA / ES</a:t>
                       </a:r>
                     </a:p>
                   </a:txBody>
@@ -9503,7 +10088,7 @@
                           </a:solidFill>
                           <a:latin typeface="Calibri"/>
                         </a:rPr>
-                        <a:t>8</a:t>
+                        <a:t>9</a:t>
                       </a:r>
                     </a:p>
                   </a:txBody>
@@ -9526,7 +10111,7 @@
                           </a:solidFill>
                           <a:latin typeface="Calibri"/>
                         </a:rPr>
-                        <a:t>1</a:t>
+                        <a:t>0</a:t>
                       </a:r>
                     </a:p>
                   </a:txBody>
@@ -9549,7 +10134,7 @@
                           </a:solidFill>
                           <a:latin typeface="Calibri"/>
                         </a:rPr>
-                        <a:t>88.9%</a:t>
+                        <a:t>100.0%</a:t>
                       </a:r>
                     </a:p>
                   </a:txBody>
@@ -9572,7 +10157,7 @@
                           </a:solidFill>
                           <a:latin typeface="Calibri"/>
                         </a:rPr>
-                        <a:t>Regular</a:t>
+                        <a:t>Excelente</a:t>
                       </a:r>
                     </a:p>
                   </a:txBody>
@@ -9620,7 +10205,7 @@
                           </a:solidFill>
                           <a:latin typeface="Calibri"/>
                         </a:rPr>
-                        <a:t>LUZ TRANSPORTES - GUARULHOS / SP</a:t>
+                        <a:t>RF-BRA TRANSPORTES L - GUARULHOS / SP</a:t>
                       </a:r>
                     </a:p>
                   </a:txBody>
@@ -9783,7 +10368,7 @@
                           </a:solidFill>
                           <a:latin typeface="Calibri"/>
                         </a:rPr>
-                        <a:t>1000 MARCAS SAFETY B - ARACARIGUAMA / SP</a:t>
+                        <a:t>NORTEL SUPRIMENTOS I - PARAUAPEBAS / PA</a:t>
                       </a:r>
                     </a:p>
                   </a:txBody>
@@ -9806,7 +10391,7 @@
                           </a:solidFill>
                           <a:latin typeface="Calibri"/>
                         </a:rPr>
-                        <a:t>8</a:t>
+                        <a:t>7</a:t>
                       </a:r>
                     </a:p>
                   </a:txBody>
@@ -9852,7 +10437,7 @@
                           </a:solidFill>
                           <a:latin typeface="Calibri"/>
                         </a:rPr>
-                        <a:t>1</a:t>
+                        <a:t>0</a:t>
                       </a:r>
                     </a:p>
                   </a:txBody>
@@ -9875,7 +10460,7 @@
                           </a:solidFill>
                           <a:latin typeface="Calibri"/>
                         </a:rPr>
-                        <a:t>87.5%</a:t>
+                        <a:t>100.0%</a:t>
                       </a:r>
                     </a:p>
                   </a:txBody>
@@ -9898,7 +10483,7 @@
                           </a:solidFill>
                           <a:latin typeface="Calibri"/>
                         </a:rPr>
-                        <a:t>Regular</a:t>
+                        <a:t>Excelente</a:t>
                       </a:r>
                     </a:p>
                   </a:txBody>
@@ -9946,7 +10531,7 @@
                           </a:solidFill>
                           <a:latin typeface="Calibri"/>
                         </a:rPr>
-                        <a:t>NORTEL SUPRIMENTOS I - CAMPINAS / SP</a:t>
+                        <a:t>FITASSUL COMERCIO DI - ITAJUBA / MG</a:t>
                       </a:r>
                     </a:p>
                   </a:txBody>
@@ -9969,7 +10554,7 @@
                           </a:solidFill>
                           <a:latin typeface="Calibri"/>
                         </a:rPr>
-                        <a:t>8</a:t>
+                        <a:t>7</a:t>
                       </a:r>
                     </a:p>
                   </a:txBody>
@@ -9992,7 +10577,7 @@
                           </a:solidFill>
                           <a:latin typeface="Calibri"/>
                         </a:rPr>
-                        <a:t>8</a:t>
+                        <a:t>7</a:t>
                       </a:r>
                     </a:p>
                   </a:txBody>
@@ -10109,7 +10694,7 @@
                           </a:solidFill>
                           <a:latin typeface="Calibri"/>
                         </a:rPr>
-                        <a:t>RF-BRA TRANSPORTES L - GUARULHOS / SP</a:t>
+                        <a:t>ITURRI COIMPAR INDUS - ATIBAIA / SP</a:t>
                       </a:r>
                     </a:p>
                   </a:txBody>
